--- a/Ctrlr structure.pptx
+++ b/Ctrlr structure.pptx
@@ -25,6 +25,7 @@
     <p:sldId id="274" r:id="rId19"/>
     <p:sldId id="261" r:id="rId20"/>
     <p:sldId id="268" r:id="rId21"/>
+    <p:sldId id="277" r:id="rId22"/>
   </p:sldIdLst>
   <p:sldSz cx="12192000" cy="6858000"/>
   <p:notesSz cx="6797675" cy="9926638"/>
@@ -125,7 +126,18 @@
   </p:defaultTextStyle>
   <p:extLst>
     <p:ext uri="{EFAFB233-063F-42B5-8137-9DF3F51BA10A}">
-      <p15:sldGuideLst xmlns="" xmlns:p15="http://schemas.microsoft.com/office/powerpoint/2012/main"/>
+      <p15:sldGuideLst xmlns:p15="http://schemas.microsoft.com/office/powerpoint/2012/main">
+        <p15:guide id="1" orient="horz" pos="2160">
+          <p15:clr>
+            <a:srgbClr val="A4A3A4"/>
+          </p15:clr>
+        </p15:guide>
+        <p15:guide id="2" pos="3840">
+          <p15:clr>
+            <a:srgbClr val="A4A3A4"/>
+          </p15:clr>
+        </p15:guide>
+      </p15:sldGuideLst>
     </p:ext>
   </p:extLst>
 </p:presentation>
@@ -521,7 +533,7 @@
           <p:cNvPr id="2" name="Title 1">
             <a:extLst>
               <a:ext uri="{FF2B5EF4-FFF2-40B4-BE49-F238E27FC236}">
-                <a16:creationId xmlns="" xmlns:a16="http://schemas.microsoft.com/office/drawing/2014/main" id="{5D85D683-C9B9-9E8F-A79A-52C7A1FD04B5}"/>
+                <a16:creationId xmlns:a16="http://schemas.microsoft.com/office/drawing/2014/main" id="{5D85D683-C9B9-9E8F-A79A-52C7A1FD04B5}"/>
               </a:ext>
             </a:extLst>
           </p:cNvPr>
@@ -558,7 +570,7 @@
           <p:cNvPr id="3" name="Subtitle 2">
             <a:extLst>
               <a:ext uri="{FF2B5EF4-FFF2-40B4-BE49-F238E27FC236}">
-                <a16:creationId xmlns="" xmlns:a16="http://schemas.microsoft.com/office/drawing/2014/main" id="{D5407D6B-23B9-19CE-ED20-E8AF48555A02}"/>
+                <a16:creationId xmlns:a16="http://schemas.microsoft.com/office/drawing/2014/main" id="{D5407D6B-23B9-19CE-ED20-E8AF48555A02}"/>
               </a:ext>
             </a:extLst>
           </p:cNvPr>
@@ -628,7 +640,7 @@
           <p:cNvPr id="4" name="Date Placeholder 3">
             <a:extLst>
               <a:ext uri="{FF2B5EF4-FFF2-40B4-BE49-F238E27FC236}">
-                <a16:creationId xmlns="" xmlns:a16="http://schemas.microsoft.com/office/drawing/2014/main" id="{99474806-E945-E2BB-9C6C-7CE1F904A8B2}"/>
+                <a16:creationId xmlns:a16="http://schemas.microsoft.com/office/drawing/2014/main" id="{99474806-E945-E2BB-9C6C-7CE1F904A8B2}"/>
               </a:ext>
             </a:extLst>
           </p:cNvPr>
@@ -646,7 +658,7 @@
           <a:p>
             <a:fld id="{EF9AFC93-32DA-4276-9083-FEE9A3B9DD13}" type="datetimeFigureOut">
               <a:rPr lang="en-US" smtClean="0"/>
-              <a:t>8/1/2025</a:t>
+              <a:t>9/13/2026</a:t>
             </a:fld>
             <a:endParaRPr lang="en-US"/>
           </a:p>
@@ -657,7 +669,7 @@
           <p:cNvPr id="5" name="Footer Placeholder 4">
             <a:extLst>
               <a:ext uri="{FF2B5EF4-FFF2-40B4-BE49-F238E27FC236}">
-                <a16:creationId xmlns="" xmlns:a16="http://schemas.microsoft.com/office/drawing/2014/main" id="{A9273027-69FD-7C04-A459-54BBA2CCC85A}"/>
+                <a16:creationId xmlns:a16="http://schemas.microsoft.com/office/drawing/2014/main" id="{A9273027-69FD-7C04-A459-54BBA2CCC85A}"/>
               </a:ext>
             </a:extLst>
           </p:cNvPr>
@@ -682,7 +694,7 @@
           <p:cNvPr id="6" name="Slide Number Placeholder 5">
             <a:extLst>
               <a:ext uri="{FF2B5EF4-FFF2-40B4-BE49-F238E27FC236}">
-                <a16:creationId xmlns="" xmlns:a16="http://schemas.microsoft.com/office/drawing/2014/main" id="{FC67EF6F-4AC4-C7A8-D1C7-BA22F42D4059}"/>
+                <a16:creationId xmlns:a16="http://schemas.microsoft.com/office/drawing/2014/main" id="{FC67EF6F-4AC4-C7A8-D1C7-BA22F42D4059}"/>
               </a:ext>
             </a:extLst>
           </p:cNvPr>
@@ -700,7 +712,7 @@
           <a:p>
             <a:fld id="{7D2E704E-1645-4BFD-8AE1-FFCA6C9DAFBC}" type="slidenum">
               <a:rPr lang="en-US" smtClean="0"/>
-              <a:t>‹#›</a:t>
+              <a:t>‹N°›</a:t>
             </a:fld>
             <a:endParaRPr lang="en-US"/>
           </a:p>
@@ -741,7 +753,7 @@
           <p:cNvPr id="2" name="Title 1">
             <a:extLst>
               <a:ext uri="{FF2B5EF4-FFF2-40B4-BE49-F238E27FC236}">
-                <a16:creationId xmlns="" xmlns:a16="http://schemas.microsoft.com/office/drawing/2014/main" id="{E34BDAB5-89BB-4FE8-5F8C-7939E88E8EB3}"/>
+                <a16:creationId xmlns:a16="http://schemas.microsoft.com/office/drawing/2014/main" id="{E34BDAB5-89BB-4FE8-5F8C-7939E88E8EB3}"/>
               </a:ext>
             </a:extLst>
           </p:cNvPr>
@@ -769,7 +781,7 @@
           <p:cNvPr id="3" name="Vertical Text Placeholder 2">
             <a:extLst>
               <a:ext uri="{FF2B5EF4-FFF2-40B4-BE49-F238E27FC236}">
-                <a16:creationId xmlns="" xmlns:a16="http://schemas.microsoft.com/office/drawing/2014/main" id="{0E208381-E9BE-250C-96A9-24EC7D7923FE}"/>
+                <a16:creationId xmlns:a16="http://schemas.microsoft.com/office/drawing/2014/main" id="{0E208381-E9BE-250C-96A9-24EC7D7923FE}"/>
               </a:ext>
             </a:extLst>
           </p:cNvPr>
@@ -826,7 +838,7 @@
           <p:cNvPr id="4" name="Date Placeholder 3">
             <a:extLst>
               <a:ext uri="{FF2B5EF4-FFF2-40B4-BE49-F238E27FC236}">
-                <a16:creationId xmlns="" xmlns:a16="http://schemas.microsoft.com/office/drawing/2014/main" id="{8A59D388-5FB3-9F59-0CFD-69C2673F81AE}"/>
+                <a16:creationId xmlns:a16="http://schemas.microsoft.com/office/drawing/2014/main" id="{8A59D388-5FB3-9F59-0CFD-69C2673F81AE}"/>
               </a:ext>
             </a:extLst>
           </p:cNvPr>
@@ -844,7 +856,7 @@
           <a:p>
             <a:fld id="{EF9AFC93-32DA-4276-9083-FEE9A3B9DD13}" type="datetimeFigureOut">
               <a:rPr lang="en-US" smtClean="0"/>
-              <a:t>8/1/2025</a:t>
+              <a:t>9/13/2026</a:t>
             </a:fld>
             <a:endParaRPr lang="en-US"/>
           </a:p>
@@ -855,7 +867,7 @@
           <p:cNvPr id="5" name="Footer Placeholder 4">
             <a:extLst>
               <a:ext uri="{FF2B5EF4-FFF2-40B4-BE49-F238E27FC236}">
-                <a16:creationId xmlns="" xmlns:a16="http://schemas.microsoft.com/office/drawing/2014/main" id="{843B25AE-45BD-12B7-2813-29141FB2EDEA}"/>
+                <a16:creationId xmlns:a16="http://schemas.microsoft.com/office/drawing/2014/main" id="{843B25AE-45BD-12B7-2813-29141FB2EDEA}"/>
               </a:ext>
             </a:extLst>
           </p:cNvPr>
@@ -880,7 +892,7 @@
           <p:cNvPr id="6" name="Slide Number Placeholder 5">
             <a:extLst>
               <a:ext uri="{FF2B5EF4-FFF2-40B4-BE49-F238E27FC236}">
-                <a16:creationId xmlns="" xmlns:a16="http://schemas.microsoft.com/office/drawing/2014/main" id="{17C2DFCE-0D0E-3E8F-2A49-75567F38118A}"/>
+                <a16:creationId xmlns:a16="http://schemas.microsoft.com/office/drawing/2014/main" id="{17C2DFCE-0D0E-3E8F-2A49-75567F38118A}"/>
               </a:ext>
             </a:extLst>
           </p:cNvPr>
@@ -898,7 +910,7 @@
           <a:p>
             <a:fld id="{7D2E704E-1645-4BFD-8AE1-FFCA6C9DAFBC}" type="slidenum">
               <a:rPr lang="en-US" smtClean="0"/>
-              <a:t>‹#›</a:t>
+              <a:t>‹N°›</a:t>
             </a:fld>
             <a:endParaRPr lang="en-US"/>
           </a:p>
@@ -939,7 +951,7 @@
           <p:cNvPr id="2" name="Vertical Title 1">
             <a:extLst>
               <a:ext uri="{FF2B5EF4-FFF2-40B4-BE49-F238E27FC236}">
-                <a16:creationId xmlns="" xmlns:a16="http://schemas.microsoft.com/office/drawing/2014/main" id="{CC9B5294-B618-AB85-F446-63FDED984046}"/>
+                <a16:creationId xmlns:a16="http://schemas.microsoft.com/office/drawing/2014/main" id="{CC9B5294-B618-AB85-F446-63FDED984046}"/>
               </a:ext>
             </a:extLst>
           </p:cNvPr>
@@ -972,7 +984,7 @@
           <p:cNvPr id="3" name="Vertical Text Placeholder 2">
             <a:extLst>
               <a:ext uri="{FF2B5EF4-FFF2-40B4-BE49-F238E27FC236}">
-                <a16:creationId xmlns="" xmlns:a16="http://schemas.microsoft.com/office/drawing/2014/main" id="{33BA4B09-A22E-45C2-A28A-C45E217B71B5}"/>
+                <a16:creationId xmlns:a16="http://schemas.microsoft.com/office/drawing/2014/main" id="{33BA4B09-A22E-45C2-A28A-C45E217B71B5}"/>
               </a:ext>
             </a:extLst>
           </p:cNvPr>
@@ -1034,7 +1046,7 @@
           <p:cNvPr id="4" name="Date Placeholder 3">
             <a:extLst>
               <a:ext uri="{FF2B5EF4-FFF2-40B4-BE49-F238E27FC236}">
-                <a16:creationId xmlns="" xmlns:a16="http://schemas.microsoft.com/office/drawing/2014/main" id="{764340EF-7F5B-0EE0-3D9D-76E13053900F}"/>
+                <a16:creationId xmlns:a16="http://schemas.microsoft.com/office/drawing/2014/main" id="{764340EF-7F5B-0EE0-3D9D-76E13053900F}"/>
               </a:ext>
             </a:extLst>
           </p:cNvPr>
@@ -1052,7 +1064,7 @@
           <a:p>
             <a:fld id="{EF9AFC93-32DA-4276-9083-FEE9A3B9DD13}" type="datetimeFigureOut">
               <a:rPr lang="en-US" smtClean="0"/>
-              <a:t>8/1/2025</a:t>
+              <a:t>9/13/2026</a:t>
             </a:fld>
             <a:endParaRPr lang="en-US"/>
           </a:p>
@@ -1063,7 +1075,7 @@
           <p:cNvPr id="5" name="Footer Placeholder 4">
             <a:extLst>
               <a:ext uri="{FF2B5EF4-FFF2-40B4-BE49-F238E27FC236}">
-                <a16:creationId xmlns="" xmlns:a16="http://schemas.microsoft.com/office/drawing/2014/main" id="{8C44EF9E-EA79-B2A7-733C-24CEBB756AB7}"/>
+                <a16:creationId xmlns:a16="http://schemas.microsoft.com/office/drawing/2014/main" id="{8C44EF9E-EA79-B2A7-733C-24CEBB756AB7}"/>
               </a:ext>
             </a:extLst>
           </p:cNvPr>
@@ -1088,7 +1100,7 @@
           <p:cNvPr id="6" name="Slide Number Placeholder 5">
             <a:extLst>
               <a:ext uri="{FF2B5EF4-FFF2-40B4-BE49-F238E27FC236}">
-                <a16:creationId xmlns="" xmlns:a16="http://schemas.microsoft.com/office/drawing/2014/main" id="{EE36A3F5-0CDA-52F9-874A-C76EEE0B1D80}"/>
+                <a16:creationId xmlns:a16="http://schemas.microsoft.com/office/drawing/2014/main" id="{EE36A3F5-0CDA-52F9-874A-C76EEE0B1D80}"/>
               </a:ext>
             </a:extLst>
           </p:cNvPr>
@@ -1106,7 +1118,7 @@
           <a:p>
             <a:fld id="{7D2E704E-1645-4BFD-8AE1-FFCA6C9DAFBC}" type="slidenum">
               <a:rPr lang="en-US" smtClean="0"/>
-              <a:t>‹#›</a:t>
+              <a:t>‹N°›</a:t>
             </a:fld>
             <a:endParaRPr lang="en-US"/>
           </a:p>
@@ -1147,7 +1159,7 @@
           <p:cNvPr id="2" name="Title 1">
             <a:extLst>
               <a:ext uri="{FF2B5EF4-FFF2-40B4-BE49-F238E27FC236}">
-                <a16:creationId xmlns="" xmlns:a16="http://schemas.microsoft.com/office/drawing/2014/main" id="{3DBC67F1-3FC9-F175-6E07-516FCEE0ECF8}"/>
+                <a16:creationId xmlns:a16="http://schemas.microsoft.com/office/drawing/2014/main" id="{3DBC67F1-3FC9-F175-6E07-516FCEE0ECF8}"/>
               </a:ext>
             </a:extLst>
           </p:cNvPr>
@@ -1175,7 +1187,7 @@
           <p:cNvPr id="3" name="Content Placeholder 2">
             <a:extLst>
               <a:ext uri="{FF2B5EF4-FFF2-40B4-BE49-F238E27FC236}">
-                <a16:creationId xmlns="" xmlns:a16="http://schemas.microsoft.com/office/drawing/2014/main" id="{B1790D91-71B3-BA23-B2AE-1D03C9935FAD}"/>
+                <a16:creationId xmlns:a16="http://schemas.microsoft.com/office/drawing/2014/main" id="{B1790D91-71B3-BA23-B2AE-1D03C9935FAD}"/>
               </a:ext>
             </a:extLst>
           </p:cNvPr>
@@ -1232,7 +1244,7 @@
           <p:cNvPr id="4" name="Date Placeholder 3">
             <a:extLst>
               <a:ext uri="{FF2B5EF4-FFF2-40B4-BE49-F238E27FC236}">
-                <a16:creationId xmlns="" xmlns:a16="http://schemas.microsoft.com/office/drawing/2014/main" id="{D63CC5F3-D55E-C326-DC48-4E1BDB4401C1}"/>
+                <a16:creationId xmlns:a16="http://schemas.microsoft.com/office/drawing/2014/main" id="{D63CC5F3-D55E-C326-DC48-4E1BDB4401C1}"/>
               </a:ext>
             </a:extLst>
           </p:cNvPr>
@@ -1250,7 +1262,7 @@
           <a:p>
             <a:fld id="{EF9AFC93-32DA-4276-9083-FEE9A3B9DD13}" type="datetimeFigureOut">
               <a:rPr lang="en-US" smtClean="0"/>
-              <a:t>8/1/2025</a:t>
+              <a:t>9/13/2026</a:t>
             </a:fld>
             <a:endParaRPr lang="en-US"/>
           </a:p>
@@ -1261,7 +1273,7 @@
           <p:cNvPr id="5" name="Footer Placeholder 4">
             <a:extLst>
               <a:ext uri="{FF2B5EF4-FFF2-40B4-BE49-F238E27FC236}">
-                <a16:creationId xmlns="" xmlns:a16="http://schemas.microsoft.com/office/drawing/2014/main" id="{475B3ACC-803B-4E0C-E4BA-4A69CB04F172}"/>
+                <a16:creationId xmlns:a16="http://schemas.microsoft.com/office/drawing/2014/main" id="{475B3ACC-803B-4E0C-E4BA-4A69CB04F172}"/>
               </a:ext>
             </a:extLst>
           </p:cNvPr>
@@ -1286,7 +1298,7 @@
           <p:cNvPr id="6" name="Slide Number Placeholder 5">
             <a:extLst>
               <a:ext uri="{FF2B5EF4-FFF2-40B4-BE49-F238E27FC236}">
-                <a16:creationId xmlns="" xmlns:a16="http://schemas.microsoft.com/office/drawing/2014/main" id="{AC8B92A5-B89F-7067-0B1B-C10C84B64C6F}"/>
+                <a16:creationId xmlns:a16="http://schemas.microsoft.com/office/drawing/2014/main" id="{AC8B92A5-B89F-7067-0B1B-C10C84B64C6F}"/>
               </a:ext>
             </a:extLst>
           </p:cNvPr>
@@ -1304,7 +1316,7 @@
           <a:p>
             <a:fld id="{7D2E704E-1645-4BFD-8AE1-FFCA6C9DAFBC}" type="slidenum">
               <a:rPr lang="en-US" smtClean="0"/>
-              <a:t>‹#›</a:t>
+              <a:t>‹N°›</a:t>
             </a:fld>
             <a:endParaRPr lang="en-US"/>
           </a:p>
@@ -1345,7 +1357,7 @@
           <p:cNvPr id="2" name="Title 1">
             <a:extLst>
               <a:ext uri="{FF2B5EF4-FFF2-40B4-BE49-F238E27FC236}">
-                <a16:creationId xmlns="" xmlns:a16="http://schemas.microsoft.com/office/drawing/2014/main" id="{7CBDBB0C-9971-3FBA-2F67-353AB1C2BCB6}"/>
+                <a16:creationId xmlns:a16="http://schemas.microsoft.com/office/drawing/2014/main" id="{7CBDBB0C-9971-3FBA-2F67-353AB1C2BCB6}"/>
               </a:ext>
             </a:extLst>
           </p:cNvPr>
@@ -1382,7 +1394,7 @@
           <p:cNvPr id="3" name="Text Placeholder 2">
             <a:extLst>
               <a:ext uri="{FF2B5EF4-FFF2-40B4-BE49-F238E27FC236}">
-                <a16:creationId xmlns="" xmlns:a16="http://schemas.microsoft.com/office/drawing/2014/main" id="{072FA5A4-1517-F85C-1F29-C2B601D15E2C}"/>
+                <a16:creationId xmlns:a16="http://schemas.microsoft.com/office/drawing/2014/main" id="{072FA5A4-1517-F85C-1F29-C2B601D15E2C}"/>
               </a:ext>
             </a:extLst>
           </p:cNvPr>
@@ -1507,7 +1519,7 @@
           <p:cNvPr id="4" name="Date Placeholder 3">
             <a:extLst>
               <a:ext uri="{FF2B5EF4-FFF2-40B4-BE49-F238E27FC236}">
-                <a16:creationId xmlns="" xmlns:a16="http://schemas.microsoft.com/office/drawing/2014/main" id="{CB04BE8B-FCC0-8E0E-7601-BA82FFA1AF10}"/>
+                <a16:creationId xmlns:a16="http://schemas.microsoft.com/office/drawing/2014/main" id="{CB04BE8B-FCC0-8E0E-7601-BA82FFA1AF10}"/>
               </a:ext>
             </a:extLst>
           </p:cNvPr>
@@ -1525,7 +1537,7 @@
           <a:p>
             <a:fld id="{EF9AFC93-32DA-4276-9083-FEE9A3B9DD13}" type="datetimeFigureOut">
               <a:rPr lang="en-US" smtClean="0"/>
-              <a:t>8/1/2025</a:t>
+              <a:t>9/13/2026</a:t>
             </a:fld>
             <a:endParaRPr lang="en-US"/>
           </a:p>
@@ -1536,7 +1548,7 @@
           <p:cNvPr id="5" name="Footer Placeholder 4">
             <a:extLst>
               <a:ext uri="{FF2B5EF4-FFF2-40B4-BE49-F238E27FC236}">
-                <a16:creationId xmlns="" xmlns:a16="http://schemas.microsoft.com/office/drawing/2014/main" id="{67862D9B-40DC-E62D-636E-043810BE16FB}"/>
+                <a16:creationId xmlns:a16="http://schemas.microsoft.com/office/drawing/2014/main" id="{67862D9B-40DC-E62D-636E-043810BE16FB}"/>
               </a:ext>
             </a:extLst>
           </p:cNvPr>
@@ -1561,7 +1573,7 @@
           <p:cNvPr id="6" name="Slide Number Placeholder 5">
             <a:extLst>
               <a:ext uri="{FF2B5EF4-FFF2-40B4-BE49-F238E27FC236}">
-                <a16:creationId xmlns="" xmlns:a16="http://schemas.microsoft.com/office/drawing/2014/main" id="{D932F7A9-ADE4-FE1E-446E-60F33BC0DD95}"/>
+                <a16:creationId xmlns:a16="http://schemas.microsoft.com/office/drawing/2014/main" id="{D932F7A9-ADE4-FE1E-446E-60F33BC0DD95}"/>
               </a:ext>
             </a:extLst>
           </p:cNvPr>
@@ -1579,7 +1591,7 @@
           <a:p>
             <a:fld id="{7D2E704E-1645-4BFD-8AE1-FFCA6C9DAFBC}" type="slidenum">
               <a:rPr lang="en-US" smtClean="0"/>
-              <a:t>‹#›</a:t>
+              <a:t>‹N°›</a:t>
             </a:fld>
             <a:endParaRPr lang="en-US"/>
           </a:p>
@@ -1620,7 +1632,7 @@
           <p:cNvPr id="2" name="Title 1">
             <a:extLst>
               <a:ext uri="{FF2B5EF4-FFF2-40B4-BE49-F238E27FC236}">
-                <a16:creationId xmlns="" xmlns:a16="http://schemas.microsoft.com/office/drawing/2014/main" id="{BF6406BF-3509-617D-BFB3-21CB9A7EAE1C}"/>
+                <a16:creationId xmlns:a16="http://schemas.microsoft.com/office/drawing/2014/main" id="{BF6406BF-3509-617D-BFB3-21CB9A7EAE1C}"/>
               </a:ext>
             </a:extLst>
           </p:cNvPr>
@@ -1648,7 +1660,7 @@
           <p:cNvPr id="3" name="Content Placeholder 2">
             <a:extLst>
               <a:ext uri="{FF2B5EF4-FFF2-40B4-BE49-F238E27FC236}">
-                <a16:creationId xmlns="" xmlns:a16="http://schemas.microsoft.com/office/drawing/2014/main" id="{C7CF3A70-9B67-E32A-A1B3-1A73349BEE12}"/>
+                <a16:creationId xmlns:a16="http://schemas.microsoft.com/office/drawing/2014/main" id="{C7CF3A70-9B67-E32A-A1B3-1A73349BEE12}"/>
               </a:ext>
             </a:extLst>
           </p:cNvPr>
@@ -1710,7 +1722,7 @@
           <p:cNvPr id="4" name="Content Placeholder 3">
             <a:extLst>
               <a:ext uri="{FF2B5EF4-FFF2-40B4-BE49-F238E27FC236}">
-                <a16:creationId xmlns="" xmlns:a16="http://schemas.microsoft.com/office/drawing/2014/main" id="{7174E403-ABF5-E217-E008-1F690A7D68D4}"/>
+                <a16:creationId xmlns:a16="http://schemas.microsoft.com/office/drawing/2014/main" id="{7174E403-ABF5-E217-E008-1F690A7D68D4}"/>
               </a:ext>
             </a:extLst>
           </p:cNvPr>
@@ -1772,7 +1784,7 @@
           <p:cNvPr id="5" name="Date Placeholder 4">
             <a:extLst>
               <a:ext uri="{FF2B5EF4-FFF2-40B4-BE49-F238E27FC236}">
-                <a16:creationId xmlns="" xmlns:a16="http://schemas.microsoft.com/office/drawing/2014/main" id="{C4856849-73A0-460B-DD67-1B8318AFCDF6}"/>
+                <a16:creationId xmlns:a16="http://schemas.microsoft.com/office/drawing/2014/main" id="{C4856849-73A0-460B-DD67-1B8318AFCDF6}"/>
               </a:ext>
             </a:extLst>
           </p:cNvPr>
@@ -1790,7 +1802,7 @@
           <a:p>
             <a:fld id="{EF9AFC93-32DA-4276-9083-FEE9A3B9DD13}" type="datetimeFigureOut">
               <a:rPr lang="en-US" smtClean="0"/>
-              <a:t>8/1/2025</a:t>
+              <a:t>9/13/2026</a:t>
             </a:fld>
             <a:endParaRPr lang="en-US"/>
           </a:p>
@@ -1801,7 +1813,7 @@
           <p:cNvPr id="6" name="Footer Placeholder 5">
             <a:extLst>
               <a:ext uri="{FF2B5EF4-FFF2-40B4-BE49-F238E27FC236}">
-                <a16:creationId xmlns="" xmlns:a16="http://schemas.microsoft.com/office/drawing/2014/main" id="{791DCA2D-F007-C881-C028-A1911EFC7791}"/>
+                <a16:creationId xmlns:a16="http://schemas.microsoft.com/office/drawing/2014/main" id="{791DCA2D-F007-C881-C028-A1911EFC7791}"/>
               </a:ext>
             </a:extLst>
           </p:cNvPr>
@@ -1826,7 +1838,7 @@
           <p:cNvPr id="7" name="Slide Number Placeholder 6">
             <a:extLst>
               <a:ext uri="{FF2B5EF4-FFF2-40B4-BE49-F238E27FC236}">
-                <a16:creationId xmlns="" xmlns:a16="http://schemas.microsoft.com/office/drawing/2014/main" id="{071E8E43-938C-73A0-0DA9-AEFA73332EF9}"/>
+                <a16:creationId xmlns:a16="http://schemas.microsoft.com/office/drawing/2014/main" id="{071E8E43-938C-73A0-0DA9-AEFA73332EF9}"/>
               </a:ext>
             </a:extLst>
           </p:cNvPr>
@@ -1844,7 +1856,7 @@
           <a:p>
             <a:fld id="{7D2E704E-1645-4BFD-8AE1-FFCA6C9DAFBC}" type="slidenum">
               <a:rPr lang="en-US" smtClean="0"/>
-              <a:t>‹#›</a:t>
+              <a:t>‹N°›</a:t>
             </a:fld>
             <a:endParaRPr lang="en-US"/>
           </a:p>
@@ -1885,7 +1897,7 @@
           <p:cNvPr id="2" name="Title 1">
             <a:extLst>
               <a:ext uri="{FF2B5EF4-FFF2-40B4-BE49-F238E27FC236}">
-                <a16:creationId xmlns="" xmlns:a16="http://schemas.microsoft.com/office/drawing/2014/main" id="{2162B948-F4D5-77F5-D46D-B2A07F839C31}"/>
+                <a16:creationId xmlns:a16="http://schemas.microsoft.com/office/drawing/2014/main" id="{2162B948-F4D5-77F5-D46D-B2A07F839C31}"/>
               </a:ext>
             </a:extLst>
           </p:cNvPr>
@@ -1918,7 +1930,7 @@
           <p:cNvPr id="3" name="Text Placeholder 2">
             <a:extLst>
               <a:ext uri="{FF2B5EF4-FFF2-40B4-BE49-F238E27FC236}">
-                <a16:creationId xmlns="" xmlns:a16="http://schemas.microsoft.com/office/drawing/2014/main" id="{4BC577FB-258A-C660-4CB7-AA910BB8D3C9}"/>
+                <a16:creationId xmlns:a16="http://schemas.microsoft.com/office/drawing/2014/main" id="{4BC577FB-258A-C660-4CB7-AA910BB8D3C9}"/>
               </a:ext>
             </a:extLst>
           </p:cNvPr>
@@ -1989,7 +2001,7 @@
           <p:cNvPr id="4" name="Content Placeholder 3">
             <a:extLst>
               <a:ext uri="{FF2B5EF4-FFF2-40B4-BE49-F238E27FC236}">
-                <a16:creationId xmlns="" xmlns:a16="http://schemas.microsoft.com/office/drawing/2014/main" id="{B90EBBB2-609E-EE2F-6590-F3AE80C4E45F}"/>
+                <a16:creationId xmlns:a16="http://schemas.microsoft.com/office/drawing/2014/main" id="{B90EBBB2-609E-EE2F-6590-F3AE80C4E45F}"/>
               </a:ext>
             </a:extLst>
           </p:cNvPr>
@@ -2051,7 +2063,7 @@
           <p:cNvPr id="5" name="Text Placeholder 4">
             <a:extLst>
               <a:ext uri="{FF2B5EF4-FFF2-40B4-BE49-F238E27FC236}">
-                <a16:creationId xmlns="" xmlns:a16="http://schemas.microsoft.com/office/drawing/2014/main" id="{8434FBDC-340C-8B71-B6CB-D36C72EAB24E}"/>
+                <a16:creationId xmlns:a16="http://schemas.microsoft.com/office/drawing/2014/main" id="{8434FBDC-340C-8B71-B6CB-D36C72EAB24E}"/>
               </a:ext>
             </a:extLst>
           </p:cNvPr>
@@ -2122,7 +2134,7 @@
           <p:cNvPr id="6" name="Content Placeholder 5">
             <a:extLst>
               <a:ext uri="{FF2B5EF4-FFF2-40B4-BE49-F238E27FC236}">
-                <a16:creationId xmlns="" xmlns:a16="http://schemas.microsoft.com/office/drawing/2014/main" id="{AC32FDA0-9FCE-4EC2-08C1-8BFAE915CDE8}"/>
+                <a16:creationId xmlns:a16="http://schemas.microsoft.com/office/drawing/2014/main" id="{AC32FDA0-9FCE-4EC2-08C1-8BFAE915CDE8}"/>
               </a:ext>
             </a:extLst>
           </p:cNvPr>
@@ -2184,7 +2196,7 @@
           <p:cNvPr id="7" name="Date Placeholder 6">
             <a:extLst>
               <a:ext uri="{FF2B5EF4-FFF2-40B4-BE49-F238E27FC236}">
-                <a16:creationId xmlns="" xmlns:a16="http://schemas.microsoft.com/office/drawing/2014/main" id="{4B298944-6536-2CE2-2E41-A16A592BC72E}"/>
+                <a16:creationId xmlns:a16="http://schemas.microsoft.com/office/drawing/2014/main" id="{4B298944-6536-2CE2-2E41-A16A592BC72E}"/>
               </a:ext>
             </a:extLst>
           </p:cNvPr>
@@ -2202,7 +2214,7 @@
           <a:p>
             <a:fld id="{EF9AFC93-32DA-4276-9083-FEE9A3B9DD13}" type="datetimeFigureOut">
               <a:rPr lang="en-US" smtClean="0"/>
-              <a:t>8/1/2025</a:t>
+              <a:t>9/13/2026</a:t>
             </a:fld>
             <a:endParaRPr lang="en-US"/>
           </a:p>
@@ -2213,7 +2225,7 @@
           <p:cNvPr id="8" name="Footer Placeholder 7">
             <a:extLst>
               <a:ext uri="{FF2B5EF4-FFF2-40B4-BE49-F238E27FC236}">
-                <a16:creationId xmlns="" xmlns:a16="http://schemas.microsoft.com/office/drawing/2014/main" id="{0ECC2BB6-18A4-B522-291C-4680C9175F5F}"/>
+                <a16:creationId xmlns:a16="http://schemas.microsoft.com/office/drawing/2014/main" id="{0ECC2BB6-18A4-B522-291C-4680C9175F5F}"/>
               </a:ext>
             </a:extLst>
           </p:cNvPr>
@@ -2238,7 +2250,7 @@
           <p:cNvPr id="9" name="Slide Number Placeholder 8">
             <a:extLst>
               <a:ext uri="{FF2B5EF4-FFF2-40B4-BE49-F238E27FC236}">
-                <a16:creationId xmlns="" xmlns:a16="http://schemas.microsoft.com/office/drawing/2014/main" id="{9FFB42D0-67A0-FF0E-2B3B-8E6D42D8C08E}"/>
+                <a16:creationId xmlns:a16="http://schemas.microsoft.com/office/drawing/2014/main" id="{9FFB42D0-67A0-FF0E-2B3B-8E6D42D8C08E}"/>
               </a:ext>
             </a:extLst>
           </p:cNvPr>
@@ -2256,7 +2268,7 @@
           <a:p>
             <a:fld id="{7D2E704E-1645-4BFD-8AE1-FFCA6C9DAFBC}" type="slidenum">
               <a:rPr lang="en-US" smtClean="0"/>
-              <a:t>‹#›</a:t>
+              <a:t>‹N°›</a:t>
             </a:fld>
             <a:endParaRPr lang="en-US"/>
           </a:p>
@@ -2297,7 +2309,7 @@
           <p:cNvPr id="2" name="Title 1">
             <a:extLst>
               <a:ext uri="{FF2B5EF4-FFF2-40B4-BE49-F238E27FC236}">
-                <a16:creationId xmlns="" xmlns:a16="http://schemas.microsoft.com/office/drawing/2014/main" id="{1C54CCFF-717D-F560-0F84-D528F03F2B0C}"/>
+                <a16:creationId xmlns:a16="http://schemas.microsoft.com/office/drawing/2014/main" id="{1C54CCFF-717D-F560-0F84-D528F03F2B0C}"/>
               </a:ext>
             </a:extLst>
           </p:cNvPr>
@@ -2325,7 +2337,7 @@
           <p:cNvPr id="3" name="Date Placeholder 2">
             <a:extLst>
               <a:ext uri="{FF2B5EF4-FFF2-40B4-BE49-F238E27FC236}">
-                <a16:creationId xmlns="" xmlns:a16="http://schemas.microsoft.com/office/drawing/2014/main" id="{68CFA7F0-2B41-B812-92A2-6C0D043C50F5}"/>
+                <a16:creationId xmlns:a16="http://schemas.microsoft.com/office/drawing/2014/main" id="{68CFA7F0-2B41-B812-92A2-6C0D043C50F5}"/>
               </a:ext>
             </a:extLst>
           </p:cNvPr>
@@ -2343,7 +2355,7 @@
           <a:p>
             <a:fld id="{EF9AFC93-32DA-4276-9083-FEE9A3B9DD13}" type="datetimeFigureOut">
               <a:rPr lang="en-US" smtClean="0"/>
-              <a:t>8/1/2025</a:t>
+              <a:t>9/13/2026</a:t>
             </a:fld>
             <a:endParaRPr lang="en-US"/>
           </a:p>
@@ -2354,7 +2366,7 @@
           <p:cNvPr id="4" name="Footer Placeholder 3">
             <a:extLst>
               <a:ext uri="{FF2B5EF4-FFF2-40B4-BE49-F238E27FC236}">
-                <a16:creationId xmlns="" xmlns:a16="http://schemas.microsoft.com/office/drawing/2014/main" id="{F8005E0B-63DF-66CF-B74D-E08C99273D90}"/>
+                <a16:creationId xmlns:a16="http://schemas.microsoft.com/office/drawing/2014/main" id="{F8005E0B-63DF-66CF-B74D-E08C99273D90}"/>
               </a:ext>
             </a:extLst>
           </p:cNvPr>
@@ -2379,7 +2391,7 @@
           <p:cNvPr id="5" name="Slide Number Placeholder 4">
             <a:extLst>
               <a:ext uri="{FF2B5EF4-FFF2-40B4-BE49-F238E27FC236}">
-                <a16:creationId xmlns="" xmlns:a16="http://schemas.microsoft.com/office/drawing/2014/main" id="{BE67DA79-BA45-DDCF-06A3-9809FB2DAA41}"/>
+                <a16:creationId xmlns:a16="http://schemas.microsoft.com/office/drawing/2014/main" id="{BE67DA79-BA45-DDCF-06A3-9809FB2DAA41}"/>
               </a:ext>
             </a:extLst>
           </p:cNvPr>
@@ -2397,7 +2409,7 @@
           <a:p>
             <a:fld id="{7D2E704E-1645-4BFD-8AE1-FFCA6C9DAFBC}" type="slidenum">
               <a:rPr lang="en-US" smtClean="0"/>
-              <a:t>‹#›</a:t>
+              <a:t>‹N°›</a:t>
             </a:fld>
             <a:endParaRPr lang="en-US"/>
           </a:p>
@@ -2438,7 +2450,7 @@
           <p:cNvPr id="2" name="Date Placeholder 1">
             <a:extLst>
               <a:ext uri="{FF2B5EF4-FFF2-40B4-BE49-F238E27FC236}">
-                <a16:creationId xmlns="" xmlns:a16="http://schemas.microsoft.com/office/drawing/2014/main" id="{8FDCCF5A-4EC7-76F2-E349-6109C56B39BA}"/>
+                <a16:creationId xmlns:a16="http://schemas.microsoft.com/office/drawing/2014/main" id="{8FDCCF5A-4EC7-76F2-E349-6109C56B39BA}"/>
               </a:ext>
             </a:extLst>
           </p:cNvPr>
@@ -2456,7 +2468,7 @@
           <a:p>
             <a:fld id="{EF9AFC93-32DA-4276-9083-FEE9A3B9DD13}" type="datetimeFigureOut">
               <a:rPr lang="en-US" smtClean="0"/>
-              <a:t>8/1/2025</a:t>
+              <a:t>9/13/2026</a:t>
             </a:fld>
             <a:endParaRPr lang="en-US"/>
           </a:p>
@@ -2467,7 +2479,7 @@
           <p:cNvPr id="3" name="Footer Placeholder 2">
             <a:extLst>
               <a:ext uri="{FF2B5EF4-FFF2-40B4-BE49-F238E27FC236}">
-                <a16:creationId xmlns="" xmlns:a16="http://schemas.microsoft.com/office/drawing/2014/main" id="{3A6BC49D-A056-6CC7-C190-0DCCBC51F220}"/>
+                <a16:creationId xmlns:a16="http://schemas.microsoft.com/office/drawing/2014/main" id="{3A6BC49D-A056-6CC7-C190-0DCCBC51F220}"/>
               </a:ext>
             </a:extLst>
           </p:cNvPr>
@@ -2492,7 +2504,7 @@
           <p:cNvPr id="4" name="Slide Number Placeholder 3">
             <a:extLst>
               <a:ext uri="{FF2B5EF4-FFF2-40B4-BE49-F238E27FC236}">
-                <a16:creationId xmlns="" xmlns:a16="http://schemas.microsoft.com/office/drawing/2014/main" id="{1AAD599D-C8D4-9F15-F731-CB31D40D5D4A}"/>
+                <a16:creationId xmlns:a16="http://schemas.microsoft.com/office/drawing/2014/main" id="{1AAD599D-C8D4-9F15-F731-CB31D40D5D4A}"/>
               </a:ext>
             </a:extLst>
           </p:cNvPr>
@@ -2510,7 +2522,7 @@
           <a:p>
             <a:fld id="{7D2E704E-1645-4BFD-8AE1-FFCA6C9DAFBC}" type="slidenum">
               <a:rPr lang="en-US" smtClean="0"/>
-              <a:t>‹#›</a:t>
+              <a:t>‹N°›</a:t>
             </a:fld>
             <a:endParaRPr lang="en-US"/>
           </a:p>
@@ -2551,7 +2563,7 @@
           <p:cNvPr id="2" name="Title 1">
             <a:extLst>
               <a:ext uri="{FF2B5EF4-FFF2-40B4-BE49-F238E27FC236}">
-                <a16:creationId xmlns="" xmlns:a16="http://schemas.microsoft.com/office/drawing/2014/main" id="{B63CA34D-A26F-0BA4-C490-7927C607A7A0}"/>
+                <a16:creationId xmlns:a16="http://schemas.microsoft.com/office/drawing/2014/main" id="{B63CA34D-A26F-0BA4-C490-7927C607A7A0}"/>
               </a:ext>
             </a:extLst>
           </p:cNvPr>
@@ -2588,7 +2600,7 @@
           <p:cNvPr id="3" name="Content Placeholder 2">
             <a:extLst>
               <a:ext uri="{FF2B5EF4-FFF2-40B4-BE49-F238E27FC236}">
-                <a16:creationId xmlns="" xmlns:a16="http://schemas.microsoft.com/office/drawing/2014/main" id="{A7B48089-C1BB-CE11-5734-D18E98FABDD3}"/>
+                <a16:creationId xmlns:a16="http://schemas.microsoft.com/office/drawing/2014/main" id="{A7B48089-C1BB-CE11-5734-D18E98FABDD3}"/>
               </a:ext>
             </a:extLst>
           </p:cNvPr>
@@ -2678,7 +2690,7 @@
           <p:cNvPr id="4" name="Text Placeholder 3">
             <a:extLst>
               <a:ext uri="{FF2B5EF4-FFF2-40B4-BE49-F238E27FC236}">
-                <a16:creationId xmlns="" xmlns:a16="http://schemas.microsoft.com/office/drawing/2014/main" id="{11833130-9472-3BFE-873A-D2B0978CBBBB}"/>
+                <a16:creationId xmlns:a16="http://schemas.microsoft.com/office/drawing/2014/main" id="{11833130-9472-3BFE-873A-D2B0978CBBBB}"/>
               </a:ext>
             </a:extLst>
           </p:cNvPr>
@@ -2749,7 +2761,7 @@
           <p:cNvPr id="5" name="Date Placeholder 4">
             <a:extLst>
               <a:ext uri="{FF2B5EF4-FFF2-40B4-BE49-F238E27FC236}">
-                <a16:creationId xmlns="" xmlns:a16="http://schemas.microsoft.com/office/drawing/2014/main" id="{B017D77B-2C24-37EF-0935-F3F4A1F0F5DE}"/>
+                <a16:creationId xmlns:a16="http://schemas.microsoft.com/office/drawing/2014/main" id="{B017D77B-2C24-37EF-0935-F3F4A1F0F5DE}"/>
               </a:ext>
             </a:extLst>
           </p:cNvPr>
@@ -2767,7 +2779,7 @@
           <a:p>
             <a:fld id="{EF9AFC93-32DA-4276-9083-FEE9A3B9DD13}" type="datetimeFigureOut">
               <a:rPr lang="en-US" smtClean="0"/>
-              <a:t>8/1/2025</a:t>
+              <a:t>9/13/2026</a:t>
             </a:fld>
             <a:endParaRPr lang="en-US"/>
           </a:p>
@@ -2778,7 +2790,7 @@
           <p:cNvPr id="6" name="Footer Placeholder 5">
             <a:extLst>
               <a:ext uri="{FF2B5EF4-FFF2-40B4-BE49-F238E27FC236}">
-                <a16:creationId xmlns="" xmlns:a16="http://schemas.microsoft.com/office/drawing/2014/main" id="{98A64E74-C44B-1104-EC09-D25ABF3EA99B}"/>
+                <a16:creationId xmlns:a16="http://schemas.microsoft.com/office/drawing/2014/main" id="{98A64E74-C44B-1104-EC09-D25ABF3EA99B}"/>
               </a:ext>
             </a:extLst>
           </p:cNvPr>
@@ -2803,7 +2815,7 @@
           <p:cNvPr id="7" name="Slide Number Placeholder 6">
             <a:extLst>
               <a:ext uri="{FF2B5EF4-FFF2-40B4-BE49-F238E27FC236}">
-                <a16:creationId xmlns="" xmlns:a16="http://schemas.microsoft.com/office/drawing/2014/main" id="{F7C19B72-5CCD-B531-CC33-573894FE8F28}"/>
+                <a16:creationId xmlns:a16="http://schemas.microsoft.com/office/drawing/2014/main" id="{F7C19B72-5CCD-B531-CC33-573894FE8F28}"/>
               </a:ext>
             </a:extLst>
           </p:cNvPr>
@@ -2821,7 +2833,7 @@
           <a:p>
             <a:fld id="{7D2E704E-1645-4BFD-8AE1-FFCA6C9DAFBC}" type="slidenum">
               <a:rPr lang="en-US" smtClean="0"/>
-              <a:t>‹#›</a:t>
+              <a:t>‹N°›</a:t>
             </a:fld>
             <a:endParaRPr lang="en-US"/>
           </a:p>
@@ -2862,7 +2874,7 @@
           <p:cNvPr id="2" name="Title 1">
             <a:extLst>
               <a:ext uri="{FF2B5EF4-FFF2-40B4-BE49-F238E27FC236}">
-                <a16:creationId xmlns="" xmlns:a16="http://schemas.microsoft.com/office/drawing/2014/main" id="{F34A7E2F-B4C5-CA98-738D-6EE4FDFB2C00}"/>
+                <a16:creationId xmlns:a16="http://schemas.microsoft.com/office/drawing/2014/main" id="{F34A7E2F-B4C5-CA98-738D-6EE4FDFB2C00}"/>
               </a:ext>
             </a:extLst>
           </p:cNvPr>
@@ -2899,7 +2911,7 @@
           <p:cNvPr id="3" name="Picture Placeholder 2">
             <a:extLst>
               <a:ext uri="{FF2B5EF4-FFF2-40B4-BE49-F238E27FC236}">
-                <a16:creationId xmlns="" xmlns:a16="http://schemas.microsoft.com/office/drawing/2014/main" id="{01A005CF-C11F-4812-8CA6-356B5977B3F7}"/>
+                <a16:creationId xmlns:a16="http://schemas.microsoft.com/office/drawing/2014/main" id="{01A005CF-C11F-4812-8CA6-356B5977B3F7}"/>
               </a:ext>
             </a:extLst>
           </p:cNvPr>
@@ -2966,7 +2978,7 @@
           <p:cNvPr id="4" name="Text Placeholder 3">
             <a:extLst>
               <a:ext uri="{FF2B5EF4-FFF2-40B4-BE49-F238E27FC236}">
-                <a16:creationId xmlns="" xmlns:a16="http://schemas.microsoft.com/office/drawing/2014/main" id="{8EC81D04-1D58-9788-FD13-3D76179AB43E}"/>
+                <a16:creationId xmlns:a16="http://schemas.microsoft.com/office/drawing/2014/main" id="{8EC81D04-1D58-9788-FD13-3D76179AB43E}"/>
               </a:ext>
             </a:extLst>
           </p:cNvPr>
@@ -3037,7 +3049,7 @@
           <p:cNvPr id="5" name="Date Placeholder 4">
             <a:extLst>
               <a:ext uri="{FF2B5EF4-FFF2-40B4-BE49-F238E27FC236}">
-                <a16:creationId xmlns="" xmlns:a16="http://schemas.microsoft.com/office/drawing/2014/main" id="{8496EA6E-72BE-860B-E8DD-0F66B7661AE1}"/>
+                <a16:creationId xmlns:a16="http://schemas.microsoft.com/office/drawing/2014/main" id="{8496EA6E-72BE-860B-E8DD-0F66B7661AE1}"/>
               </a:ext>
             </a:extLst>
           </p:cNvPr>
@@ -3055,7 +3067,7 @@
           <a:p>
             <a:fld id="{EF9AFC93-32DA-4276-9083-FEE9A3B9DD13}" type="datetimeFigureOut">
               <a:rPr lang="en-US" smtClean="0"/>
-              <a:t>8/1/2025</a:t>
+              <a:t>9/13/2026</a:t>
             </a:fld>
             <a:endParaRPr lang="en-US"/>
           </a:p>
@@ -3066,7 +3078,7 @@
           <p:cNvPr id="6" name="Footer Placeholder 5">
             <a:extLst>
               <a:ext uri="{FF2B5EF4-FFF2-40B4-BE49-F238E27FC236}">
-                <a16:creationId xmlns="" xmlns:a16="http://schemas.microsoft.com/office/drawing/2014/main" id="{4CA63CB7-3015-110B-C89E-86666C140718}"/>
+                <a16:creationId xmlns:a16="http://schemas.microsoft.com/office/drawing/2014/main" id="{4CA63CB7-3015-110B-C89E-86666C140718}"/>
               </a:ext>
             </a:extLst>
           </p:cNvPr>
@@ -3091,7 +3103,7 @@
           <p:cNvPr id="7" name="Slide Number Placeholder 6">
             <a:extLst>
               <a:ext uri="{FF2B5EF4-FFF2-40B4-BE49-F238E27FC236}">
-                <a16:creationId xmlns="" xmlns:a16="http://schemas.microsoft.com/office/drawing/2014/main" id="{F8405851-801A-30B2-8B17-1FD12F7AE22E}"/>
+                <a16:creationId xmlns:a16="http://schemas.microsoft.com/office/drawing/2014/main" id="{F8405851-801A-30B2-8B17-1FD12F7AE22E}"/>
               </a:ext>
             </a:extLst>
           </p:cNvPr>
@@ -3109,7 +3121,7 @@
           <a:p>
             <a:fld id="{7D2E704E-1645-4BFD-8AE1-FFCA6C9DAFBC}" type="slidenum">
               <a:rPr lang="en-US" smtClean="0"/>
-              <a:t>‹#›</a:t>
+              <a:t>‹N°›</a:t>
             </a:fld>
             <a:endParaRPr lang="en-US"/>
           </a:p>
@@ -3155,7 +3167,7 @@
           <p:cNvPr id="2" name="Title Placeholder 1">
             <a:extLst>
               <a:ext uri="{FF2B5EF4-FFF2-40B4-BE49-F238E27FC236}">
-                <a16:creationId xmlns="" xmlns:a16="http://schemas.microsoft.com/office/drawing/2014/main" id="{4F814B11-D436-E5E5-66DE-AE28D97BDB9A}"/>
+                <a16:creationId xmlns:a16="http://schemas.microsoft.com/office/drawing/2014/main" id="{4F814B11-D436-E5E5-66DE-AE28D97BDB9A}"/>
               </a:ext>
             </a:extLst>
           </p:cNvPr>
@@ -3193,7 +3205,7 @@
           <p:cNvPr id="3" name="Text Placeholder 2">
             <a:extLst>
               <a:ext uri="{FF2B5EF4-FFF2-40B4-BE49-F238E27FC236}">
-                <a16:creationId xmlns="" xmlns:a16="http://schemas.microsoft.com/office/drawing/2014/main" id="{C11CDEBB-36E6-5C44-CD20-BB76E4126065}"/>
+                <a16:creationId xmlns:a16="http://schemas.microsoft.com/office/drawing/2014/main" id="{C11CDEBB-36E6-5C44-CD20-BB76E4126065}"/>
               </a:ext>
             </a:extLst>
           </p:cNvPr>
@@ -3260,7 +3272,7 @@
           <p:cNvPr id="4" name="Date Placeholder 3">
             <a:extLst>
               <a:ext uri="{FF2B5EF4-FFF2-40B4-BE49-F238E27FC236}">
-                <a16:creationId xmlns="" xmlns:a16="http://schemas.microsoft.com/office/drawing/2014/main" id="{14374639-296A-6F61-D75F-88E7EE3A0330}"/>
+                <a16:creationId xmlns:a16="http://schemas.microsoft.com/office/drawing/2014/main" id="{14374639-296A-6F61-D75F-88E7EE3A0330}"/>
               </a:ext>
             </a:extLst>
           </p:cNvPr>
@@ -3296,7 +3308,7 @@
           <a:p>
             <a:fld id="{EF9AFC93-32DA-4276-9083-FEE9A3B9DD13}" type="datetimeFigureOut">
               <a:rPr lang="en-US" smtClean="0"/>
-              <a:t>8/1/2025</a:t>
+              <a:t>9/13/2026</a:t>
             </a:fld>
             <a:endParaRPr lang="en-US"/>
           </a:p>
@@ -3307,7 +3319,7 @@
           <p:cNvPr id="5" name="Footer Placeholder 4">
             <a:extLst>
               <a:ext uri="{FF2B5EF4-FFF2-40B4-BE49-F238E27FC236}">
-                <a16:creationId xmlns="" xmlns:a16="http://schemas.microsoft.com/office/drawing/2014/main" id="{050BF68B-6253-87B7-DBB4-64CA0A161CED}"/>
+                <a16:creationId xmlns:a16="http://schemas.microsoft.com/office/drawing/2014/main" id="{050BF68B-6253-87B7-DBB4-64CA0A161CED}"/>
               </a:ext>
             </a:extLst>
           </p:cNvPr>
@@ -3350,7 +3362,7 @@
           <p:cNvPr id="6" name="Slide Number Placeholder 5">
             <a:extLst>
               <a:ext uri="{FF2B5EF4-FFF2-40B4-BE49-F238E27FC236}">
-                <a16:creationId xmlns="" xmlns:a16="http://schemas.microsoft.com/office/drawing/2014/main" id="{B6F0C3C2-CAE2-8E1F-5772-8772B3280C8A}"/>
+                <a16:creationId xmlns:a16="http://schemas.microsoft.com/office/drawing/2014/main" id="{B6F0C3C2-CAE2-8E1F-5772-8772B3280C8A}"/>
               </a:ext>
             </a:extLst>
           </p:cNvPr>
@@ -3386,7 +3398,7 @@
           <a:p>
             <a:fld id="{7D2E704E-1645-4BFD-8AE1-FFCA6C9DAFBC}" type="slidenum">
               <a:rPr lang="en-US" smtClean="0"/>
-              <a:t>‹#›</a:t>
+              <a:t>‹N°›</a:t>
             </a:fld>
             <a:endParaRPr lang="en-US"/>
           </a:p>
@@ -3718,7 +3730,7 @@
           <p:cNvPr id="2" name="Title 1">
             <a:extLst>
               <a:ext uri="{FF2B5EF4-FFF2-40B4-BE49-F238E27FC236}">
-                <a16:creationId xmlns="" xmlns:a16="http://schemas.microsoft.com/office/drawing/2014/main" id="{F0B53C7E-8B4B-4546-A54A-1E9F18DFF110}"/>
+                <a16:creationId xmlns:a16="http://schemas.microsoft.com/office/drawing/2014/main" id="{F0B53C7E-8B4B-4546-A54A-1E9F18DFF110}"/>
               </a:ext>
             </a:extLst>
           </p:cNvPr>
@@ -3746,7 +3758,7 @@
           <p:cNvPr id="3" name="Content Placeholder 2">
             <a:extLst>
               <a:ext uri="{FF2B5EF4-FFF2-40B4-BE49-F238E27FC236}">
-                <a16:creationId xmlns="" xmlns:a16="http://schemas.microsoft.com/office/drawing/2014/main" id="{D1595852-488E-DC7E-B409-A76F187C8742}"/>
+                <a16:creationId xmlns:a16="http://schemas.microsoft.com/office/drawing/2014/main" id="{D1595852-488E-DC7E-B409-A76F187C8742}"/>
               </a:ext>
             </a:extLst>
           </p:cNvPr>
@@ -3802,7 +3814,7 @@
         <p:cNvPr id="1" name="">
           <a:extLst>
             <a:ext uri="{FF2B5EF4-FFF2-40B4-BE49-F238E27FC236}">
-              <a16:creationId xmlns="" xmlns:a16="http://schemas.microsoft.com/office/drawing/2014/main" id="{9F3366F9-A30F-CF28-3BCA-A1277C7258F0}"/>
+              <a16:creationId xmlns:a16="http://schemas.microsoft.com/office/drawing/2014/main" id="{9F3366F9-A30F-CF28-3BCA-A1277C7258F0}"/>
             </a:ext>
           </a:extLst>
         </p:cNvPr>
@@ -3822,7 +3834,7 @@
           <p:cNvPr id="2" name="TextBox 1">
             <a:extLst>
               <a:ext uri="{FF2B5EF4-FFF2-40B4-BE49-F238E27FC236}">
-                <a16:creationId xmlns="" xmlns:a16="http://schemas.microsoft.com/office/drawing/2014/main" id="{35F3E650-6A82-FC00-1BBA-8487F624A954}"/>
+                <a16:creationId xmlns:a16="http://schemas.microsoft.com/office/drawing/2014/main" id="{35F3E650-6A82-FC00-1BBA-8487F624A954}"/>
               </a:ext>
             </a:extLst>
           </p:cNvPr>
@@ -3857,7 +3869,7 @@
           <p:cNvPr id="24" name="Rectangle: Folded Corner 23">
             <a:extLst>
               <a:ext uri="{FF2B5EF4-FFF2-40B4-BE49-F238E27FC236}">
-                <a16:creationId xmlns="" xmlns:a16="http://schemas.microsoft.com/office/drawing/2014/main" id="{C8A7C96C-E064-311F-6810-BA3E33C1CD7E}"/>
+                <a16:creationId xmlns:a16="http://schemas.microsoft.com/office/drawing/2014/main" id="{C8A7C96C-E064-311F-6810-BA3E33C1CD7E}"/>
               </a:ext>
             </a:extLst>
           </p:cNvPr>
@@ -3903,7 +3915,7 @@
           <p:cNvPr id="25" name="TextBox 24">
             <a:extLst>
               <a:ext uri="{FF2B5EF4-FFF2-40B4-BE49-F238E27FC236}">
-                <a16:creationId xmlns="" xmlns:a16="http://schemas.microsoft.com/office/drawing/2014/main" id="{852A0FD5-CCD7-9F7E-A9BC-0663419E7364}"/>
+                <a16:creationId xmlns:a16="http://schemas.microsoft.com/office/drawing/2014/main" id="{852A0FD5-CCD7-9F7E-A9BC-0663419E7364}"/>
               </a:ext>
             </a:extLst>
           </p:cNvPr>
@@ -3927,18 +3939,13 @@
           <a:lstStyle/>
           <a:p>
             <a:r>
-              <a:rPr lang="en-US" sz="1100" i="1" dirty="0" smtClean="0"/>
+              <a:rPr lang="en-US" sz="1100" i="1" dirty="0"/>
               <a:t>CtrlrInlineUtilities.cpp </a:t>
             </a:r>
             <a:r>
               <a:rPr lang="en-US" sz="1100" dirty="0"/>
-              <a:t>in </a:t>
-            </a:r>
-            <a:r>
-              <a:rPr lang="en-US" sz="1100" dirty="0" smtClean="0"/>
-              <a:t>Core</a:t>
-            </a:r>
-            <a:endParaRPr lang="en-US" sz="1100" dirty="0"/>
+              <a:t>in Core</a:t>
+            </a:r>
           </a:p>
         </p:txBody>
       </p:sp>
@@ -3947,7 +3954,7 @@
           <p:cNvPr id="26" name="TextBox 25">
             <a:extLst>
               <a:ext uri="{FF2B5EF4-FFF2-40B4-BE49-F238E27FC236}">
-                <a16:creationId xmlns="" xmlns:a16="http://schemas.microsoft.com/office/drawing/2014/main" id="{2F2DA160-EB90-49FC-ECBA-F36D71A57D15}"/>
+                <a16:creationId xmlns:a16="http://schemas.microsoft.com/office/drawing/2014/main" id="{2F2DA160-EB90-49FC-ECBA-F36D71A57D15}"/>
               </a:ext>
             </a:extLst>
           </p:cNvPr>
@@ -3977,13 +3984,8 @@
           <a:p>
             <a:r>
               <a:rPr lang="en-US" sz="1100" noProof="1"/>
-              <a:t>Colours for </a:t>
-            </a:r>
-            <a:r>
-              <a:rPr lang="en-US" sz="1100" noProof="1" smtClean="0"/>
-              <a:t>some V4 ColourSchemes</a:t>
-            </a:r>
-            <a:endParaRPr lang="en-US" sz="1100" noProof="1"/>
+              <a:t>Colours for some V4 ColourSchemes</a:t>
+            </a:r>
           </a:p>
         </p:txBody>
       </p:sp>
@@ -4046,7 +4048,7 @@
           <p:cNvPr id="10" name="TextBox 9">
             <a:extLst>
               <a:ext uri="{FF2B5EF4-FFF2-40B4-BE49-F238E27FC236}">
-                <a16:creationId xmlns="" xmlns:a16="http://schemas.microsoft.com/office/drawing/2014/main" id="{2F2DA160-EB90-49FC-ECBA-F36D71A57D15}"/>
+                <a16:creationId xmlns:a16="http://schemas.microsoft.com/office/drawing/2014/main" id="{2F2DA160-EB90-49FC-ECBA-F36D71A57D15}"/>
               </a:ext>
             </a:extLst>
           </p:cNvPr>
@@ -4139,13 +4141,8 @@
             </a:r>
             <a:r>
               <a:rPr lang="en-US" sz="1100" dirty="0"/>
-              <a:t> </a:t>
-            </a:r>
-            <a:r>
-              <a:rPr lang="en-US" sz="1100" dirty="0" smtClean="0"/>
-              <a:t>v5.6.34 by @dobo365 DB</a:t>
-            </a:r>
-            <a:endParaRPr lang="en-US" sz="1100" dirty="0"/>
+              <a:t> v5.6.34 by @dobo365 DB</a:t>
+            </a:r>
           </a:p>
           <a:p>
             <a:r>
@@ -4162,29 +4159,13 @@
           <a:p>
             <a:r>
               <a:rPr lang="en-US" sz="1100" dirty="0"/>
-              <a:t>             0xff666666, 0xff000000, </a:t>
-            </a:r>
-            <a:r>
-              <a:rPr lang="en-US" sz="1100" dirty="0" smtClean="0"/>
-              <a:t>0xff8584bc</a:t>
-            </a:r>
+              <a:t>             0xff666666, 0xff000000, 0xff8584bc,</a:t>
+            </a:r>
+          </a:p>
+          <a:p>
             <a:r>
               <a:rPr lang="en-US" sz="1100" dirty="0"/>
-              <a:t>,</a:t>
-            </a:r>
-          </a:p>
-          <a:p>
-            <a:r>
-              <a:rPr lang="en-US" sz="1100" dirty="0"/>
-              <a:t>             0xff000000, </a:t>
-            </a:r>
-            <a:r>
-              <a:rPr lang="en-US" sz="1100" dirty="0" smtClean="0"/>
-              <a:t>0xffd9d2e9, </a:t>
-            </a:r>
-            <a:r>
-              <a:rPr lang="en-US" sz="1100" dirty="0"/>
-              <a:t>0xff000000 };</a:t>
+              <a:t>             0xff000000, 0xffd9d2e9, 0xff000000 };</a:t>
             </a:r>
           </a:p>
           <a:p>
@@ -4284,7 +4265,7 @@
           <p:cNvPr id="2" name="TextBox 1">
             <a:extLst>
               <a:ext uri="{FF2B5EF4-FFF2-40B4-BE49-F238E27FC236}">
-                <a16:creationId xmlns="" xmlns:a16="http://schemas.microsoft.com/office/drawing/2014/main" id="{1CD60342-2F70-F14D-21F6-C2F8D6092854}"/>
+                <a16:creationId xmlns:a16="http://schemas.microsoft.com/office/drawing/2014/main" id="{1CD60342-2F70-F14D-21F6-C2F8D6092854}"/>
               </a:ext>
             </a:extLst>
           </p:cNvPr>
@@ -4319,7 +4300,7 @@
           <p:cNvPr id="3" name="Rectangle: Folded Corner 2">
             <a:extLst>
               <a:ext uri="{FF2B5EF4-FFF2-40B4-BE49-F238E27FC236}">
-                <a16:creationId xmlns="" xmlns:a16="http://schemas.microsoft.com/office/drawing/2014/main" id="{2F0CCEC3-21A5-F92D-FBFE-C830549559F9}"/>
+                <a16:creationId xmlns:a16="http://schemas.microsoft.com/office/drawing/2014/main" id="{2F0CCEC3-21A5-F92D-FBFE-C830549559F9}"/>
               </a:ext>
             </a:extLst>
           </p:cNvPr>
@@ -4365,7 +4346,7 @@
           <p:cNvPr id="4" name="TextBox 3">
             <a:extLst>
               <a:ext uri="{FF2B5EF4-FFF2-40B4-BE49-F238E27FC236}">
-                <a16:creationId xmlns="" xmlns:a16="http://schemas.microsoft.com/office/drawing/2014/main" id="{FBF9DB6C-D32F-01F4-71C2-22CABA02546C}"/>
+                <a16:creationId xmlns:a16="http://schemas.microsoft.com/office/drawing/2014/main" id="{FBF9DB6C-D32F-01F4-71C2-22CABA02546C}"/>
               </a:ext>
             </a:extLst>
           </p:cNvPr>
@@ -4412,7 +4393,7 @@
           <p:cNvPr id="5" name="Rectangle: Folded Corner 4">
             <a:extLst>
               <a:ext uri="{FF2B5EF4-FFF2-40B4-BE49-F238E27FC236}">
-                <a16:creationId xmlns="" xmlns:a16="http://schemas.microsoft.com/office/drawing/2014/main" id="{93ACA03D-CC40-789F-25A3-6F60C4F426E2}"/>
+                <a16:creationId xmlns:a16="http://schemas.microsoft.com/office/drawing/2014/main" id="{93ACA03D-CC40-789F-25A3-6F60C4F426E2}"/>
               </a:ext>
             </a:extLst>
           </p:cNvPr>
@@ -4458,7 +4439,7 @@
           <p:cNvPr id="6" name="TextBox 5">
             <a:extLst>
               <a:ext uri="{FF2B5EF4-FFF2-40B4-BE49-F238E27FC236}">
-                <a16:creationId xmlns="" xmlns:a16="http://schemas.microsoft.com/office/drawing/2014/main" id="{58A3501C-0D94-8CC7-C030-6236B7176A5B}"/>
+                <a16:creationId xmlns:a16="http://schemas.microsoft.com/office/drawing/2014/main" id="{58A3501C-0D94-8CC7-C030-6236B7176A5B}"/>
               </a:ext>
             </a:extLst>
           </p:cNvPr>
@@ -4517,7 +4498,7 @@
           <p:cNvPr id="7" name="Arrow: Down 6">
             <a:extLst>
               <a:ext uri="{FF2B5EF4-FFF2-40B4-BE49-F238E27FC236}">
-                <a16:creationId xmlns="" xmlns:a16="http://schemas.microsoft.com/office/drawing/2014/main" id="{D09E19D5-BF03-CBC0-F5AB-98A63E2545BB}"/>
+                <a16:creationId xmlns:a16="http://schemas.microsoft.com/office/drawing/2014/main" id="{D09E19D5-BF03-CBC0-F5AB-98A63E2545BB}"/>
               </a:ext>
             </a:extLst>
           </p:cNvPr>
@@ -4563,7 +4544,7 @@
           <p:cNvPr id="8" name="Rectangle: Folded Corner 7">
             <a:extLst>
               <a:ext uri="{FF2B5EF4-FFF2-40B4-BE49-F238E27FC236}">
-                <a16:creationId xmlns="" xmlns:a16="http://schemas.microsoft.com/office/drawing/2014/main" id="{BC158E4C-7617-00AB-4D71-830A2FEABDD0}"/>
+                <a16:creationId xmlns:a16="http://schemas.microsoft.com/office/drawing/2014/main" id="{BC158E4C-7617-00AB-4D71-830A2FEABDD0}"/>
               </a:ext>
             </a:extLst>
           </p:cNvPr>
@@ -4609,7 +4590,7 @@
           <p:cNvPr id="9" name="TextBox 8">
             <a:extLst>
               <a:ext uri="{FF2B5EF4-FFF2-40B4-BE49-F238E27FC236}">
-                <a16:creationId xmlns="" xmlns:a16="http://schemas.microsoft.com/office/drawing/2014/main" id="{3AAB64D5-658B-7111-C349-31CFD1FB97D5}"/>
+                <a16:creationId xmlns:a16="http://schemas.microsoft.com/office/drawing/2014/main" id="{3AAB64D5-658B-7111-C349-31CFD1FB97D5}"/>
               </a:ext>
             </a:extLst>
           </p:cNvPr>
@@ -4661,7 +4642,7 @@
           <p:cNvPr id="11" name="Arrow: Down 10">
             <a:extLst>
               <a:ext uri="{FF2B5EF4-FFF2-40B4-BE49-F238E27FC236}">
-                <a16:creationId xmlns="" xmlns:a16="http://schemas.microsoft.com/office/drawing/2014/main" id="{D5C503C0-6410-F852-1609-FC58C9FCACAA}"/>
+                <a16:creationId xmlns:a16="http://schemas.microsoft.com/office/drawing/2014/main" id="{D5C503C0-6410-F852-1609-FC58C9FCACAA}"/>
               </a:ext>
             </a:extLst>
           </p:cNvPr>
@@ -4707,7 +4688,7 @@
           <p:cNvPr id="14" name="TextBox 13">
             <a:extLst>
               <a:ext uri="{FF2B5EF4-FFF2-40B4-BE49-F238E27FC236}">
-                <a16:creationId xmlns="" xmlns:a16="http://schemas.microsoft.com/office/drawing/2014/main" id="{EFA4D243-0F05-0B5A-B733-E9CB44B5CF96}"/>
+                <a16:creationId xmlns:a16="http://schemas.microsoft.com/office/drawing/2014/main" id="{EFA4D243-0F05-0B5A-B733-E9CB44B5CF96}"/>
               </a:ext>
             </a:extLst>
           </p:cNvPr>
@@ -4753,7 +4734,7 @@
           <p:cNvPr id="15" name="Rectangle: Folded Corner 14">
             <a:extLst>
               <a:ext uri="{FF2B5EF4-FFF2-40B4-BE49-F238E27FC236}">
-                <a16:creationId xmlns="" xmlns:a16="http://schemas.microsoft.com/office/drawing/2014/main" id="{46EFCCA3-C9D4-0EF7-2848-F875BDA10531}"/>
+                <a16:creationId xmlns:a16="http://schemas.microsoft.com/office/drawing/2014/main" id="{46EFCCA3-C9D4-0EF7-2848-F875BDA10531}"/>
               </a:ext>
             </a:extLst>
           </p:cNvPr>
@@ -4799,7 +4780,7 @@
           <p:cNvPr id="16" name="TextBox 15">
             <a:extLst>
               <a:ext uri="{FF2B5EF4-FFF2-40B4-BE49-F238E27FC236}">
-                <a16:creationId xmlns="" xmlns:a16="http://schemas.microsoft.com/office/drawing/2014/main" id="{8B2EB5C0-18AE-FEEB-A7BB-93E56F2C3BF2}"/>
+                <a16:creationId xmlns:a16="http://schemas.microsoft.com/office/drawing/2014/main" id="{8B2EB5C0-18AE-FEEB-A7BB-93E56F2C3BF2}"/>
               </a:ext>
             </a:extLst>
           </p:cNvPr>
@@ -4851,7 +4832,7 @@
           <p:cNvPr id="17" name="TextBox 16">
             <a:extLst>
               <a:ext uri="{FF2B5EF4-FFF2-40B4-BE49-F238E27FC236}">
-                <a16:creationId xmlns="" xmlns:a16="http://schemas.microsoft.com/office/drawing/2014/main" id="{3B2F7FB2-D074-029B-C6C3-E3FC3C66F255}"/>
+                <a16:creationId xmlns:a16="http://schemas.microsoft.com/office/drawing/2014/main" id="{3B2F7FB2-D074-029B-C6C3-E3FC3C66F255}"/>
               </a:ext>
             </a:extLst>
           </p:cNvPr>
@@ -4897,7 +4878,7 @@
           <p:cNvPr id="18" name="Arrow: Down 17">
             <a:extLst>
               <a:ext uri="{FF2B5EF4-FFF2-40B4-BE49-F238E27FC236}">
-                <a16:creationId xmlns="" xmlns:a16="http://schemas.microsoft.com/office/drawing/2014/main" id="{B7A210A6-4E25-EC76-449F-98B079230D7D}"/>
+                <a16:creationId xmlns:a16="http://schemas.microsoft.com/office/drawing/2014/main" id="{B7A210A6-4E25-EC76-449F-98B079230D7D}"/>
               </a:ext>
             </a:extLst>
           </p:cNvPr>
@@ -4943,7 +4924,7 @@
           <p:cNvPr id="20" name="TextBox 19">
             <a:extLst>
               <a:ext uri="{FF2B5EF4-FFF2-40B4-BE49-F238E27FC236}">
-                <a16:creationId xmlns="" xmlns:a16="http://schemas.microsoft.com/office/drawing/2014/main" id="{AE50DCC8-0F63-361C-499D-C93EBBD7DAD8}"/>
+                <a16:creationId xmlns:a16="http://schemas.microsoft.com/office/drawing/2014/main" id="{AE50DCC8-0F63-361C-499D-C93EBBD7DAD8}"/>
               </a:ext>
             </a:extLst>
           </p:cNvPr>
@@ -5939,7 +5920,7 @@
           <p:cNvPr id="22" name="TextBox 21">
             <a:extLst>
               <a:ext uri="{FF2B5EF4-FFF2-40B4-BE49-F238E27FC236}">
-                <a16:creationId xmlns="" xmlns:a16="http://schemas.microsoft.com/office/drawing/2014/main" id="{1C1AC38F-75CB-EAF7-AD9F-2481DA2DF406}"/>
+                <a16:creationId xmlns:a16="http://schemas.microsoft.com/office/drawing/2014/main" id="{1C1AC38F-75CB-EAF7-AD9F-2481DA2DF406}"/>
               </a:ext>
             </a:extLst>
           </p:cNvPr>
@@ -6353,7 +6334,7 @@
           <p:cNvPr id="24" name="TextBox 23">
             <a:extLst>
               <a:ext uri="{FF2B5EF4-FFF2-40B4-BE49-F238E27FC236}">
-                <a16:creationId xmlns="" xmlns:a16="http://schemas.microsoft.com/office/drawing/2014/main" id="{9065A895-170F-6F8C-ED7F-20B4FA3C7FC2}"/>
+                <a16:creationId xmlns:a16="http://schemas.microsoft.com/office/drawing/2014/main" id="{9065A895-170F-6F8C-ED7F-20B4FA3C7FC2}"/>
               </a:ext>
             </a:extLst>
           </p:cNvPr>
@@ -7123,7 +7104,7 @@
           <p:cNvPr id="25" name="TextBox 24">
             <a:extLst>
               <a:ext uri="{FF2B5EF4-FFF2-40B4-BE49-F238E27FC236}">
-                <a16:creationId xmlns="" xmlns:a16="http://schemas.microsoft.com/office/drawing/2014/main" id="{26FB9210-4A5B-F8C0-AC5B-09559067D741}"/>
+                <a16:creationId xmlns:a16="http://schemas.microsoft.com/office/drawing/2014/main" id="{26FB9210-4A5B-F8C0-AC5B-09559067D741}"/>
               </a:ext>
             </a:extLst>
           </p:cNvPr>
@@ -7169,7 +7150,7 @@
           <p:cNvPr id="26" name="TextBox 25">
             <a:extLst>
               <a:ext uri="{FF2B5EF4-FFF2-40B4-BE49-F238E27FC236}">
-                <a16:creationId xmlns="" xmlns:a16="http://schemas.microsoft.com/office/drawing/2014/main" id="{0EADBD5F-F551-7BC1-B9A7-97D9944987C2}"/>
+                <a16:creationId xmlns:a16="http://schemas.microsoft.com/office/drawing/2014/main" id="{0EADBD5F-F551-7BC1-B9A7-97D9944987C2}"/>
               </a:ext>
             </a:extLst>
           </p:cNvPr>
@@ -7209,7 +7190,7 @@
           <p:cNvPr id="27" name="TextBox 26">
             <a:extLst>
               <a:ext uri="{FF2B5EF4-FFF2-40B4-BE49-F238E27FC236}">
-                <a16:creationId xmlns="" xmlns:a16="http://schemas.microsoft.com/office/drawing/2014/main" id="{042BE9BB-880E-1404-4C68-D6D30A8168FC}"/>
+                <a16:creationId xmlns:a16="http://schemas.microsoft.com/office/drawing/2014/main" id="{042BE9BB-880E-1404-4C68-D6D30A8168FC}"/>
               </a:ext>
             </a:extLst>
           </p:cNvPr>
@@ -7263,7 +7244,7 @@
           <p:cNvPr id="23" name="TextBox 22">
             <a:extLst>
               <a:ext uri="{FF2B5EF4-FFF2-40B4-BE49-F238E27FC236}">
-                <a16:creationId xmlns="" xmlns:a16="http://schemas.microsoft.com/office/drawing/2014/main" id="{042BE9BB-880E-1404-4C68-D6D30A8168FC}"/>
+                <a16:creationId xmlns:a16="http://schemas.microsoft.com/office/drawing/2014/main" id="{042BE9BB-880E-1404-4C68-D6D30A8168FC}"/>
               </a:ext>
             </a:extLst>
           </p:cNvPr>
@@ -7287,7 +7268,7 @@
           <a:lstStyle/>
           <a:p>
             <a:r>
-              <a:rPr lang="en-US" sz="1200" dirty="0" smtClean="0">
+              <a:rPr lang="en-US" sz="1200" dirty="0">
                 <a:solidFill>
                   <a:srgbClr val="C00000"/>
                 </a:solidFill>
@@ -7295,7 +7276,7 @@
               <a:t>!! In </a:t>
             </a:r>
             <a:r>
-              <a:rPr lang="en-US" sz="1200" i="1" dirty="0" smtClean="0">
+              <a:rPr lang="en-US" sz="1200" i="1" dirty="0">
                 <a:solidFill>
                   <a:srgbClr val="C00000"/>
                 </a:solidFill>
@@ -7303,7 +7284,7 @@
               <a:t>Juce_LookAndFeel_V2.h  </a:t>
             </a:r>
             <a:r>
-              <a:rPr lang="en-US" sz="1200" dirty="0" smtClean="0">
+              <a:rPr lang="en-US" sz="1200" dirty="0">
                 <a:solidFill>
                   <a:srgbClr val="C00000"/>
                 </a:solidFill>
@@ -7311,44 +7292,44 @@
               <a:t>and in </a:t>
             </a:r>
             <a:r>
-              <a:rPr lang="en-US" sz="1200" i="1" dirty="0" smtClean="0">
+              <a:rPr lang="en-US" sz="1200" i="1" dirty="0">
                 <a:solidFill>
                   <a:srgbClr val="C00000"/>
                 </a:solidFill>
               </a:rPr>
-              <a:t>Juce_LookAndFeel_V2.cpp, there </a:t>
-            </a:r>
-            <a:r>
-              <a:rPr lang="en-US" sz="1200" i="1" dirty="0">
+              <a:t>Juce_LookAndFeel_V2.cpp, there is </a:t>
+            </a:r>
+            <a:r>
+              <a:rPr lang="en-US" sz="1200" dirty="0">
                 <a:solidFill>
                   <a:srgbClr val="C00000"/>
                 </a:solidFill>
               </a:rPr>
-              <a:t>is </a:t>
-            </a:r>
-            <a:r>
-              <a:rPr lang="en-US" sz="1200" dirty="0" smtClean="0">
+              <a:t>LookAndFeel_V2::</a:t>
+            </a:r>
+            <a:r>
+              <a:rPr lang="en-US" sz="1200" dirty="0" err="1">
                 <a:solidFill>
                   <a:srgbClr val="C00000"/>
                 </a:solidFill>
               </a:rPr>
-              <a:t>LookAndFeel_V2::</a:t>
-            </a:r>
-            <a:r>
-              <a:rPr lang="en-US" sz="1200" dirty="0" err="1" smtClean="0">
+              <a:t>createAlertWindow</a:t>
+            </a:r>
+            <a:r>
+              <a:rPr lang="en-US" sz="1200" dirty="0">
                 <a:solidFill>
                   <a:srgbClr val="C00000"/>
                 </a:solidFill>
               </a:rPr>
-              <a:t>createAlertWindow</a:t>
-            </a:r>
-            <a:r>
-              <a:rPr lang="en-US" sz="1200" dirty="0" smtClean="0">
+              <a:t> and LookAndFeel_V2:: </a:t>
+            </a:r>
+            <a:r>
+              <a:rPr lang="en-US" sz="1200" dirty="0" err="1">
                 <a:solidFill>
                   <a:srgbClr val="C00000"/>
                 </a:solidFill>
               </a:rPr>
-              <a:t> </a:t>
+              <a:t>drawAlertBox</a:t>
             </a:r>
             <a:r>
               <a:rPr lang="en-US" sz="1200" dirty="0">
@@ -7356,55 +7337,7 @@
                   <a:srgbClr val="C00000"/>
                 </a:solidFill>
               </a:rPr>
-              <a:t>and </a:t>
-            </a:r>
-            <a:r>
-              <a:rPr lang="en-US" sz="1200" dirty="0" smtClean="0">
-                <a:solidFill>
-                  <a:srgbClr val="C00000"/>
-                </a:solidFill>
-              </a:rPr>
-              <a:t>LookAndFeel_V2:: </a:t>
-            </a:r>
-            <a:r>
-              <a:rPr lang="en-US" sz="1200" dirty="0" err="1" smtClean="0">
-                <a:solidFill>
-                  <a:srgbClr val="C00000"/>
-                </a:solidFill>
-              </a:rPr>
-              <a:t>drawAlertBox</a:t>
-            </a:r>
-            <a:r>
-              <a:rPr lang="en-US" sz="1200" dirty="0" smtClean="0">
-                <a:solidFill>
-                  <a:srgbClr val="C00000"/>
-                </a:solidFill>
-              </a:rPr>
-              <a:t> </a:t>
-            </a:r>
-            <a:r>
-              <a:rPr lang="en-US" sz="1200" dirty="0">
-                <a:solidFill>
-                  <a:srgbClr val="C00000"/>
-                </a:solidFill>
-              </a:rPr>
-              <a:t>with the correct </a:t>
-            </a:r>
-            <a:r>
-              <a:rPr lang="en-US" sz="1200" dirty="0" smtClean="0">
-                <a:solidFill>
-                  <a:srgbClr val="C00000"/>
-                </a:solidFill>
-              </a:rPr>
-              <a:t>colors</a:t>
-            </a:r>
-            <a:r>
-              <a:rPr lang="en-US" sz="1200" i="1" dirty="0">
-                <a:solidFill>
-                  <a:srgbClr val="C00000"/>
-                </a:solidFill>
-              </a:rPr>
-              <a:t/>
+              <a:t> with the correct colors</a:t>
             </a:r>
             <a:br>
               <a:rPr lang="en-US" sz="1200" i="1" dirty="0">
@@ -7414,7 +7347,7 @@
               </a:rPr>
             </a:br>
             <a:r>
-              <a:rPr lang="en-US" sz="1200" dirty="0" smtClean="0">
+              <a:rPr lang="en-US" sz="1200" dirty="0">
                 <a:solidFill>
                   <a:srgbClr val="C00000"/>
                 </a:solidFill>
@@ -7422,7 +7355,7 @@
               <a:t>In </a:t>
             </a:r>
             <a:r>
-              <a:rPr lang="en-US" sz="1200" i="1" dirty="0" smtClean="0">
+              <a:rPr lang="en-US" sz="1200" i="1" dirty="0">
                 <a:solidFill>
                   <a:srgbClr val="C00000"/>
                 </a:solidFill>
@@ -7430,12 +7363,20 @@
               <a:t>Juce_LookAndFeel_V4.cpp, </a:t>
             </a:r>
             <a:r>
-              <a:rPr lang="en-US" sz="1200" dirty="0" smtClean="0">
+              <a:rPr lang="en-US" sz="1200" dirty="0">
                 <a:solidFill>
                   <a:srgbClr val="C00000"/>
                 </a:solidFill>
               </a:rPr>
-              <a:t>LookAndFeel_V2</a:t>
+              <a:t>LookAndFeel_V2::</a:t>
+            </a:r>
+            <a:r>
+              <a:rPr lang="en-US" sz="1200" dirty="0" err="1">
+                <a:solidFill>
+                  <a:srgbClr val="C00000"/>
+                </a:solidFill>
+              </a:rPr>
+              <a:t>createAlertWindow</a:t>
             </a:r>
             <a:r>
               <a:rPr lang="en-US" sz="1200" dirty="0">
@@ -7443,10 +7384,10 @@
                   <a:srgbClr val="C00000"/>
                 </a:solidFill>
               </a:rPr>
-              <a:t>::</a:t>
-            </a:r>
-            <a:r>
-              <a:rPr lang="en-US" sz="1200" dirty="0" err="1" smtClean="0">
+              <a:t> seems to refer to LookAndFeel_V4::</a:t>
+            </a:r>
+            <a:r>
+              <a:rPr lang="en-US" sz="1200" dirty="0" err="1">
                 <a:solidFill>
                   <a:srgbClr val="C00000"/>
                 </a:solidFill>
@@ -7454,27 +7395,11 @@
               <a:t>createAlertWindow</a:t>
             </a:r>
             <a:r>
-              <a:rPr lang="en-US" sz="1200" dirty="0" smtClean="0">
+              <a:rPr lang="en-US" sz="1200" dirty="0">
                 <a:solidFill>
                   <a:srgbClr val="C00000"/>
                 </a:solidFill>
               </a:rPr>
-              <a:t> seems to refer to LookAndFeel_V4::</a:t>
-            </a:r>
-            <a:r>
-              <a:rPr lang="en-US" sz="1200" dirty="0" err="1">
-                <a:solidFill>
-                  <a:srgbClr val="C00000"/>
-                </a:solidFill>
-              </a:rPr>
-              <a:t>createAlertWindow</a:t>
-            </a:r>
-            <a:r>
-              <a:rPr lang="en-US" sz="1200" dirty="0">
-                <a:solidFill>
-                  <a:srgbClr val="C00000"/>
-                </a:solidFill>
-              </a:rPr>
               <a:t> </a:t>
             </a:r>
           </a:p>
@@ -7485,7 +7410,7 @@
           <p:cNvPr id="28" name="TextBox 27">
             <a:extLst>
               <a:ext uri="{FF2B5EF4-FFF2-40B4-BE49-F238E27FC236}">
-                <a16:creationId xmlns="" xmlns:a16="http://schemas.microsoft.com/office/drawing/2014/main" id="{042BE9BB-880E-1404-4C68-D6D30A8168FC}"/>
+                <a16:creationId xmlns:a16="http://schemas.microsoft.com/office/drawing/2014/main" id="{042BE9BB-880E-1404-4C68-D6D30A8168FC}"/>
               </a:ext>
             </a:extLst>
           </p:cNvPr>
@@ -7509,7 +7434,7 @@
           <a:lstStyle/>
           <a:p>
             <a:r>
-              <a:rPr lang="en-US" sz="1200" dirty="0" smtClean="0">
+              <a:rPr lang="en-US" sz="1200" dirty="0">
                 <a:solidFill>
                   <a:srgbClr val="C00000"/>
                 </a:solidFill>
@@ -7517,7 +7442,7 @@
               <a:t>Changed to </a:t>
             </a:r>
             <a:r>
-              <a:rPr lang="en-US" sz="1200" dirty="0" err="1" smtClean="0">
+              <a:rPr lang="en-US" sz="1200" dirty="0" err="1">
                 <a:solidFill>
                   <a:srgbClr val="C00000"/>
                 </a:solidFill>
@@ -7572,7 +7497,7 @@
           <p:cNvPr id="29" name="Rectangle: Folded Corner 2">
             <a:extLst>
               <a:ext uri="{FF2B5EF4-FFF2-40B4-BE49-F238E27FC236}">
-                <a16:creationId xmlns="" xmlns:a16="http://schemas.microsoft.com/office/drawing/2014/main" id="{2F0CCEC3-21A5-F92D-FBFE-C830549559F9}"/>
+                <a16:creationId xmlns:a16="http://schemas.microsoft.com/office/drawing/2014/main" id="{2F0CCEC3-21A5-F92D-FBFE-C830549559F9}"/>
               </a:ext>
             </a:extLst>
           </p:cNvPr>
@@ -7618,7 +7543,7 @@
           <p:cNvPr id="30" name="TextBox 29">
             <a:extLst>
               <a:ext uri="{FF2B5EF4-FFF2-40B4-BE49-F238E27FC236}">
-                <a16:creationId xmlns="" xmlns:a16="http://schemas.microsoft.com/office/drawing/2014/main" id="{FBF9DB6C-D32F-01F4-71C2-22CABA02546C}"/>
+                <a16:creationId xmlns:a16="http://schemas.microsoft.com/office/drawing/2014/main" id="{FBF9DB6C-D32F-01F4-71C2-22CABA02546C}"/>
               </a:ext>
             </a:extLst>
           </p:cNvPr>
@@ -7642,18 +7567,13 @@
           <a:lstStyle/>
           <a:p>
             <a:r>
-              <a:rPr lang="en-US" sz="1100" i="1" dirty="0" smtClean="0"/>
+              <a:rPr lang="en-US" sz="1100" i="1" dirty="0"/>
               <a:t>CtrlrLuaUtils.cpp </a:t>
             </a:r>
             <a:r>
               <a:rPr lang="en-US" sz="1100" dirty="0"/>
-              <a:t>in </a:t>
-            </a:r>
-            <a:r>
-              <a:rPr lang="en-US" sz="1100" dirty="0" smtClean="0"/>
-              <a:t>Source – Lua</a:t>
-            </a:r>
-            <a:endParaRPr lang="en-US" sz="1100" dirty="0"/>
+              <a:t>in Source – Lua</a:t>
+            </a:r>
           </a:p>
         </p:txBody>
       </p:sp>
@@ -7662,7 +7582,7 @@
           <p:cNvPr id="31" name="Arrow: Down 6">
             <a:extLst>
               <a:ext uri="{FF2B5EF4-FFF2-40B4-BE49-F238E27FC236}">
-                <a16:creationId xmlns="" xmlns:a16="http://schemas.microsoft.com/office/drawing/2014/main" id="{D09E19D5-BF03-CBC0-F5AB-98A63E2545BB}"/>
+                <a16:creationId xmlns:a16="http://schemas.microsoft.com/office/drawing/2014/main" id="{D09E19D5-BF03-CBC0-F5AB-98A63E2545BB}"/>
               </a:ext>
             </a:extLst>
           </p:cNvPr>
@@ -7708,7 +7628,7 @@
           <p:cNvPr id="32" name="TextBox 31">
             <a:extLst>
               <a:ext uri="{FF2B5EF4-FFF2-40B4-BE49-F238E27FC236}">
-                <a16:creationId xmlns="" xmlns:a16="http://schemas.microsoft.com/office/drawing/2014/main" id="{26FB9210-4A5B-F8C0-AC5B-09559067D741}"/>
+                <a16:creationId xmlns:a16="http://schemas.microsoft.com/office/drawing/2014/main" id="{26FB9210-4A5B-F8C0-AC5B-09559067D741}"/>
               </a:ext>
             </a:extLst>
           </p:cNvPr>
@@ -7737,10 +7657,9 @@
           <a:lstStyle/>
           <a:p>
             <a:r>
-              <a:rPr lang="en-US" sz="1100" noProof="1" smtClean="0"/>
+              <a:rPr lang="en-US" sz="1100" noProof="1"/>
               <a:t>The 4 types of AlertWindows available in Ctrlr (question, warning, info, askForTextInput)</a:t>
             </a:r>
-            <a:endParaRPr lang="en-US" sz="1100" noProof="1"/>
           </a:p>
         </p:txBody>
       </p:sp>
@@ -7765,7 +7684,7 @@
         <p:cNvPr id="1" name="">
           <a:extLst>
             <a:ext uri="{FF2B5EF4-FFF2-40B4-BE49-F238E27FC236}">
-              <a16:creationId xmlns="" xmlns:a16="http://schemas.microsoft.com/office/drawing/2014/main" id="{F310EAFA-CDD2-049A-1195-3B485301C06D}"/>
+              <a16:creationId xmlns:a16="http://schemas.microsoft.com/office/drawing/2014/main" id="{F310EAFA-CDD2-049A-1195-3B485301C06D}"/>
             </a:ext>
           </a:extLst>
         </p:cNvPr>
@@ -7785,7 +7704,7 @@
           <p:cNvPr id="2" name="TextBox 1">
             <a:extLst>
               <a:ext uri="{FF2B5EF4-FFF2-40B4-BE49-F238E27FC236}">
-                <a16:creationId xmlns="" xmlns:a16="http://schemas.microsoft.com/office/drawing/2014/main" id="{1DFCE08E-D5E7-F2B8-7809-3167008B2328}"/>
+                <a16:creationId xmlns:a16="http://schemas.microsoft.com/office/drawing/2014/main" id="{1DFCE08E-D5E7-F2B8-7809-3167008B2328}"/>
               </a:ext>
             </a:extLst>
           </p:cNvPr>
@@ -7820,7 +7739,7 @@
           <p:cNvPr id="3" name="Rectangle: Folded Corner 2">
             <a:extLst>
               <a:ext uri="{FF2B5EF4-FFF2-40B4-BE49-F238E27FC236}">
-                <a16:creationId xmlns="" xmlns:a16="http://schemas.microsoft.com/office/drawing/2014/main" id="{52EBC1B3-A6EE-3933-AF67-467ACF942355}"/>
+                <a16:creationId xmlns:a16="http://schemas.microsoft.com/office/drawing/2014/main" id="{52EBC1B3-A6EE-3933-AF67-467ACF942355}"/>
               </a:ext>
             </a:extLst>
           </p:cNvPr>
@@ -7866,7 +7785,7 @@
           <p:cNvPr id="4" name="TextBox 3">
             <a:extLst>
               <a:ext uri="{FF2B5EF4-FFF2-40B4-BE49-F238E27FC236}">
-                <a16:creationId xmlns="" xmlns:a16="http://schemas.microsoft.com/office/drawing/2014/main" id="{F8BCB8C7-314A-570B-0AB4-DCA7C4B7B160}"/>
+                <a16:creationId xmlns:a16="http://schemas.microsoft.com/office/drawing/2014/main" id="{F8BCB8C7-314A-570B-0AB4-DCA7C4B7B160}"/>
               </a:ext>
             </a:extLst>
           </p:cNvPr>
@@ -7890,19 +7809,15 @@
           <a:lstStyle/>
           <a:p>
             <a:r>
-              <a:rPr lang="en-US" sz="1100" i="1" dirty="0" smtClean="0"/>
+              <a:rPr lang="en-US" sz="1100" i="1" dirty="0"/>
               <a:t>CtrlrPanel.cpp </a:t>
             </a:r>
             <a:r>
               <a:rPr lang="en-US" sz="1100" dirty="0"/>
-              <a:t>in </a:t>
-            </a:r>
-            <a:r>
-              <a:rPr lang="en-US" sz="1100" dirty="0" smtClean="0"/>
-              <a:t>Core - </a:t>
-            </a:r>
-            <a:r>
-              <a:rPr lang="en-US" sz="1100" dirty="0" err="1" smtClean="0"/>
+              <a:t>in Core - </a:t>
+            </a:r>
+            <a:r>
+              <a:rPr lang="en-US" sz="1100" dirty="0" err="1"/>
               <a:t>CtrlrPanel</a:t>
             </a:r>
             <a:endParaRPr lang="en-US" sz="1100" dirty="0"/>
@@ -7914,7 +7829,7 @@
           <p:cNvPr id="5" name="TextBox 4">
             <a:extLst>
               <a:ext uri="{FF2B5EF4-FFF2-40B4-BE49-F238E27FC236}">
-                <a16:creationId xmlns="" xmlns:a16="http://schemas.microsoft.com/office/drawing/2014/main" id="{0EADBD5F-F551-7BC1-B9A7-97D9944987C2}"/>
+                <a16:creationId xmlns:a16="http://schemas.microsoft.com/office/drawing/2014/main" id="{0EADBD5F-F551-7BC1-B9A7-97D9944987C2}"/>
               </a:ext>
             </a:extLst>
           </p:cNvPr>
@@ -7954,7 +7869,7 @@
           <p:cNvPr id="6" name="Rectangle: Folded Corner 2">
             <a:extLst>
               <a:ext uri="{FF2B5EF4-FFF2-40B4-BE49-F238E27FC236}">
-                <a16:creationId xmlns="" xmlns:a16="http://schemas.microsoft.com/office/drawing/2014/main" id="{52EBC1B3-A6EE-3933-AF67-467ACF942355}"/>
+                <a16:creationId xmlns:a16="http://schemas.microsoft.com/office/drawing/2014/main" id="{52EBC1B3-A6EE-3933-AF67-467ACF942355}"/>
               </a:ext>
             </a:extLst>
           </p:cNvPr>
@@ -8000,7 +7915,7 @@
           <p:cNvPr id="7" name="TextBox 6">
             <a:extLst>
               <a:ext uri="{FF2B5EF4-FFF2-40B4-BE49-F238E27FC236}">
-                <a16:creationId xmlns="" xmlns:a16="http://schemas.microsoft.com/office/drawing/2014/main" id="{F8BCB8C7-314A-570B-0AB4-DCA7C4B7B160}"/>
+                <a16:creationId xmlns:a16="http://schemas.microsoft.com/office/drawing/2014/main" id="{F8BCB8C7-314A-570B-0AB4-DCA7C4B7B160}"/>
               </a:ext>
             </a:extLst>
           </p:cNvPr>
@@ -8024,7 +7939,7 @@
           <a:lstStyle/>
           <a:p>
             <a:r>
-              <a:rPr lang="en-US" sz="1100" i="1" dirty="0" smtClean="0"/>
+              <a:rPr lang="en-US" sz="1100" i="1" dirty="0"/>
               <a:t>CtrlrPanelProperties.cpp </a:t>
             </a:r>
             <a:r>
@@ -8032,15 +7947,15 @@
               <a:t>in </a:t>
             </a:r>
             <a:r>
-              <a:rPr lang="en-US" sz="1100" dirty="0" err="1" smtClean="0"/>
+              <a:rPr lang="en-US" sz="1100" dirty="0" err="1"/>
               <a:t>UIComponent</a:t>
             </a:r>
             <a:r>
-              <a:rPr lang="en-US" sz="1100" dirty="0" smtClean="0"/>
+              <a:rPr lang="en-US" sz="1100" dirty="0"/>
               <a:t> - </a:t>
             </a:r>
             <a:r>
-              <a:rPr lang="en-US" sz="1100" dirty="0" err="1" smtClean="0"/>
+              <a:rPr lang="en-US" sz="1100" dirty="0" err="1"/>
               <a:t>CtrlrPanel</a:t>
             </a:r>
             <a:endParaRPr lang="en-US" sz="1100" dirty="0"/>
@@ -8052,7 +7967,7 @@
           <p:cNvPr id="8" name="TextBox 7">
             <a:extLst>
               <a:ext uri="{FF2B5EF4-FFF2-40B4-BE49-F238E27FC236}">
-                <a16:creationId xmlns="" xmlns:a16="http://schemas.microsoft.com/office/drawing/2014/main" id="{0EADBD5F-F551-7BC1-B9A7-97D9944987C2}"/>
+                <a16:creationId xmlns:a16="http://schemas.microsoft.com/office/drawing/2014/main" id="{0EADBD5F-F551-7BC1-B9A7-97D9944987C2}"/>
               </a:ext>
             </a:extLst>
           </p:cNvPr>
@@ -8081,10 +7996,9 @@
           <a:lstStyle/>
           <a:p>
             <a:r>
-              <a:rPr lang="en-US" sz="1100" noProof="1" smtClean="0"/>
+              <a:rPr lang="en-US" sz="1100" noProof="1"/>
               <a:t>Right vertical tabs (General, Resources, Utility)</a:t>
             </a:r>
-            <a:endParaRPr lang="en-US" sz="1100" noProof="1"/>
           </a:p>
         </p:txBody>
       </p:sp>
@@ -8093,7 +8007,7 @@
           <p:cNvPr id="9" name="Rectangle: Folded Corner 2">
             <a:extLst>
               <a:ext uri="{FF2B5EF4-FFF2-40B4-BE49-F238E27FC236}">
-                <a16:creationId xmlns="" xmlns:a16="http://schemas.microsoft.com/office/drawing/2014/main" id="{52EBC1B3-A6EE-3933-AF67-467ACF942355}"/>
+                <a16:creationId xmlns:a16="http://schemas.microsoft.com/office/drawing/2014/main" id="{52EBC1B3-A6EE-3933-AF67-467ACF942355}"/>
               </a:ext>
             </a:extLst>
           </p:cNvPr>
@@ -8139,7 +8053,7 @@
           <p:cNvPr id="10" name="TextBox 9">
             <a:extLst>
               <a:ext uri="{FF2B5EF4-FFF2-40B4-BE49-F238E27FC236}">
-                <a16:creationId xmlns="" xmlns:a16="http://schemas.microsoft.com/office/drawing/2014/main" id="{F8BCB8C7-314A-570B-0AB4-DCA7C4B7B160}"/>
+                <a16:creationId xmlns:a16="http://schemas.microsoft.com/office/drawing/2014/main" id="{F8BCB8C7-314A-570B-0AB4-DCA7C4B7B160}"/>
               </a:ext>
             </a:extLst>
           </p:cNvPr>
@@ -8163,7 +8077,7 @@
           <a:lstStyle/>
           <a:p>
             <a:r>
-              <a:rPr lang="en-US" sz="1100" i="1" dirty="0" smtClean="0"/>
+              <a:rPr lang="en-US" sz="1100" i="1" dirty="0"/>
               <a:t>CtrlrPanelResourceEditor.cpp </a:t>
             </a:r>
             <a:r>
@@ -8171,15 +8085,15 @@
               <a:t>in </a:t>
             </a:r>
             <a:r>
-              <a:rPr lang="en-US" sz="1100" dirty="0" err="1" smtClean="0"/>
+              <a:rPr lang="en-US" sz="1100" dirty="0" err="1"/>
               <a:t>UIComponent</a:t>
             </a:r>
             <a:r>
-              <a:rPr lang="en-US" sz="1100" dirty="0" smtClean="0"/>
+              <a:rPr lang="en-US" sz="1100" dirty="0"/>
               <a:t> - </a:t>
             </a:r>
             <a:r>
-              <a:rPr lang="en-US" sz="1100" dirty="0" err="1" smtClean="0"/>
+              <a:rPr lang="en-US" sz="1100" dirty="0" err="1"/>
               <a:t>CtrlrPanel</a:t>
             </a:r>
             <a:endParaRPr lang="en-US" sz="1100" dirty="0"/>
@@ -8191,7 +8105,7 @@
           <p:cNvPr id="11" name="Rectangle: Folded Corner 2">
             <a:extLst>
               <a:ext uri="{FF2B5EF4-FFF2-40B4-BE49-F238E27FC236}">
-                <a16:creationId xmlns="" xmlns:a16="http://schemas.microsoft.com/office/drawing/2014/main" id="{52EBC1B3-A6EE-3933-AF67-467ACF942355}"/>
+                <a16:creationId xmlns:a16="http://schemas.microsoft.com/office/drawing/2014/main" id="{52EBC1B3-A6EE-3933-AF67-467ACF942355}"/>
               </a:ext>
             </a:extLst>
           </p:cNvPr>
@@ -8237,7 +8151,7 @@
           <p:cNvPr id="12" name="TextBox 11">
             <a:extLst>
               <a:ext uri="{FF2B5EF4-FFF2-40B4-BE49-F238E27FC236}">
-                <a16:creationId xmlns="" xmlns:a16="http://schemas.microsoft.com/office/drawing/2014/main" id="{F8BCB8C7-314A-570B-0AB4-DCA7C4B7B160}"/>
+                <a16:creationId xmlns:a16="http://schemas.microsoft.com/office/drawing/2014/main" id="{F8BCB8C7-314A-570B-0AB4-DCA7C4B7B160}"/>
               </a:ext>
             </a:extLst>
           </p:cNvPr>
@@ -8261,7 +8175,7 @@
           <a:lstStyle/>
           <a:p>
             <a:r>
-              <a:rPr lang="en-US" sz="1100" i="1" dirty="0" smtClean="0"/>
+              <a:rPr lang="en-US" sz="1100" i="1" dirty="0"/>
               <a:t>CtrlrPanelUtilities.cpp </a:t>
             </a:r>
             <a:r>
@@ -8269,15 +8183,15 @@
               <a:t>in </a:t>
             </a:r>
             <a:r>
-              <a:rPr lang="en-US" sz="1100" dirty="0" err="1" smtClean="0"/>
+              <a:rPr lang="en-US" sz="1100" dirty="0" err="1"/>
               <a:t>UIComponent</a:t>
             </a:r>
             <a:r>
-              <a:rPr lang="en-US" sz="1100" dirty="0" smtClean="0"/>
+              <a:rPr lang="en-US" sz="1100" dirty="0"/>
               <a:t> - </a:t>
             </a:r>
             <a:r>
-              <a:rPr lang="en-US" sz="1100" dirty="0" err="1" smtClean="0"/>
+              <a:rPr lang="en-US" sz="1100" dirty="0" err="1"/>
               <a:t>CtrlrPanel</a:t>
             </a:r>
             <a:endParaRPr lang="en-US" sz="1100" dirty="0"/>
@@ -8355,7 +8269,7 @@
           <p:cNvPr id="22" name="Rectangle: Folded Corner 2">
             <a:extLst>
               <a:ext uri="{FF2B5EF4-FFF2-40B4-BE49-F238E27FC236}">
-                <a16:creationId xmlns="" xmlns:a16="http://schemas.microsoft.com/office/drawing/2014/main" id="{52EBC1B3-A6EE-3933-AF67-467ACF942355}"/>
+                <a16:creationId xmlns:a16="http://schemas.microsoft.com/office/drawing/2014/main" id="{52EBC1B3-A6EE-3933-AF67-467ACF942355}"/>
               </a:ext>
             </a:extLst>
           </p:cNvPr>
@@ -8401,7 +8315,7 @@
           <p:cNvPr id="23" name="TextBox 22">
             <a:extLst>
               <a:ext uri="{FF2B5EF4-FFF2-40B4-BE49-F238E27FC236}">
-                <a16:creationId xmlns="" xmlns:a16="http://schemas.microsoft.com/office/drawing/2014/main" id="{F8BCB8C7-314A-570B-0AB4-DCA7C4B7B160}"/>
+                <a16:creationId xmlns:a16="http://schemas.microsoft.com/office/drawing/2014/main" id="{F8BCB8C7-314A-570B-0AB4-DCA7C4B7B160}"/>
               </a:ext>
             </a:extLst>
           </p:cNvPr>
@@ -8425,7 +8339,7 @@
           <a:lstStyle/>
           <a:p>
             <a:r>
-              <a:rPr lang="en-US" sz="1100" i="1" dirty="0" smtClean="0"/>
+              <a:rPr lang="en-US" sz="1100" i="1" dirty="0"/>
               <a:t>CtrlrPanelComponentProperties.cpp </a:t>
             </a:r>
             <a:r>
@@ -8433,15 +8347,15 @@
               <a:t>in </a:t>
             </a:r>
             <a:r>
-              <a:rPr lang="en-US" sz="1100" dirty="0" err="1" smtClean="0"/>
+              <a:rPr lang="en-US" sz="1100" dirty="0" err="1"/>
               <a:t>UIComponent</a:t>
             </a:r>
             <a:r>
-              <a:rPr lang="en-US" sz="1100" dirty="0" smtClean="0"/>
+              <a:rPr lang="en-US" sz="1100" dirty="0"/>
               <a:t> - </a:t>
             </a:r>
             <a:r>
-              <a:rPr lang="en-US" sz="1100" dirty="0" err="1" smtClean="0"/>
+              <a:rPr lang="en-US" sz="1100" dirty="0" err="1"/>
               <a:t>CtrlrPanel</a:t>
             </a:r>
             <a:endParaRPr lang="en-US" sz="1100" dirty="0"/>
@@ -8486,7 +8400,7 @@
           <p:cNvPr id="26" name="TextBox 25">
             <a:extLst>
               <a:ext uri="{FF2B5EF4-FFF2-40B4-BE49-F238E27FC236}">
-                <a16:creationId xmlns="" xmlns:a16="http://schemas.microsoft.com/office/drawing/2014/main" id="{0EADBD5F-F551-7BC1-B9A7-97D9944987C2}"/>
+                <a16:creationId xmlns:a16="http://schemas.microsoft.com/office/drawing/2014/main" id="{0EADBD5F-F551-7BC1-B9A7-97D9944987C2}"/>
               </a:ext>
             </a:extLst>
           </p:cNvPr>
@@ -8533,7 +8447,7 @@
           <p:cNvPr id="27" name="TextBox 26">
             <a:extLst>
               <a:ext uri="{FF2B5EF4-FFF2-40B4-BE49-F238E27FC236}">
-                <a16:creationId xmlns="" xmlns:a16="http://schemas.microsoft.com/office/drawing/2014/main" id="{0EADBD5F-F551-7BC1-B9A7-97D9944987C2}"/>
+                <a16:creationId xmlns:a16="http://schemas.microsoft.com/office/drawing/2014/main" id="{0EADBD5F-F551-7BC1-B9A7-97D9944987C2}"/>
               </a:ext>
             </a:extLst>
           </p:cNvPr>
@@ -8580,7 +8494,7 @@
           <p:cNvPr id="28" name="TextBox 27">
             <a:extLst>
               <a:ext uri="{FF2B5EF4-FFF2-40B4-BE49-F238E27FC236}">
-                <a16:creationId xmlns="" xmlns:a16="http://schemas.microsoft.com/office/drawing/2014/main" id="{0EADBD5F-F551-7BC1-B9A7-97D9944987C2}"/>
+                <a16:creationId xmlns:a16="http://schemas.microsoft.com/office/drawing/2014/main" id="{0EADBD5F-F551-7BC1-B9A7-97D9944987C2}"/>
               </a:ext>
             </a:extLst>
           </p:cNvPr>
@@ -8627,7 +8541,7 @@
           <p:cNvPr id="29" name="Rectangle: Folded Corner 2">
             <a:extLst>
               <a:ext uri="{FF2B5EF4-FFF2-40B4-BE49-F238E27FC236}">
-                <a16:creationId xmlns="" xmlns:a16="http://schemas.microsoft.com/office/drawing/2014/main" id="{52EBC1B3-A6EE-3933-AF67-467ACF942355}"/>
+                <a16:creationId xmlns:a16="http://schemas.microsoft.com/office/drawing/2014/main" id="{52EBC1B3-A6EE-3933-AF67-467ACF942355}"/>
               </a:ext>
             </a:extLst>
           </p:cNvPr>
@@ -8673,7 +8587,7 @@
           <p:cNvPr id="30" name="TextBox 29">
             <a:extLst>
               <a:ext uri="{FF2B5EF4-FFF2-40B4-BE49-F238E27FC236}">
-                <a16:creationId xmlns="" xmlns:a16="http://schemas.microsoft.com/office/drawing/2014/main" id="{F8BCB8C7-314A-570B-0AB4-DCA7C4B7B160}"/>
+                <a16:creationId xmlns:a16="http://schemas.microsoft.com/office/drawing/2014/main" id="{F8BCB8C7-314A-570B-0AB4-DCA7C4B7B160}"/>
               </a:ext>
             </a:extLst>
           </p:cNvPr>
@@ -8697,7 +8611,7 @@
           <a:lstStyle/>
           <a:p>
             <a:r>
-              <a:rPr lang="en-US" sz="1100" i="1" dirty="0" smtClean="0"/>
+              <a:rPr lang="en-US" sz="1100" i="1" dirty="0"/>
               <a:t>CtrlrDocumentPanel.cpp </a:t>
             </a:r>
             <a:r>
@@ -8705,15 +8619,15 @@
               <a:t>in </a:t>
             </a:r>
             <a:r>
-              <a:rPr lang="en-US" sz="1100" dirty="0" err="1" smtClean="0"/>
+              <a:rPr lang="en-US" sz="1100" dirty="0" err="1"/>
               <a:t>UIComponent</a:t>
             </a:r>
             <a:r>
-              <a:rPr lang="en-US" sz="1100" dirty="0" smtClean="0"/>
+              <a:rPr lang="en-US" sz="1100" dirty="0"/>
               <a:t> - </a:t>
             </a:r>
             <a:r>
-              <a:rPr lang="en-US" sz="1100" dirty="0" err="1" smtClean="0"/>
+              <a:rPr lang="en-US" sz="1100" dirty="0" err="1"/>
               <a:t>CtrlrApplicationWindow</a:t>
             </a:r>
             <a:endParaRPr lang="en-US" sz="1100" dirty="0"/>
@@ -8725,7 +8639,7 @@
           <p:cNvPr id="31" name="TextBox 30">
             <a:extLst>
               <a:ext uri="{FF2B5EF4-FFF2-40B4-BE49-F238E27FC236}">
-                <a16:creationId xmlns="" xmlns:a16="http://schemas.microsoft.com/office/drawing/2014/main" id="{0EADBD5F-F551-7BC1-B9A7-97D9944987C2}"/>
+                <a16:creationId xmlns:a16="http://schemas.microsoft.com/office/drawing/2014/main" id="{0EADBD5F-F551-7BC1-B9A7-97D9944987C2}"/>
               </a:ext>
             </a:extLst>
           </p:cNvPr>
@@ -8754,10 +8668,9 @@
           <a:lstStyle/>
           <a:p>
             <a:r>
-              <a:rPr lang="en-US" sz="1100" noProof="1" smtClean="0"/>
+              <a:rPr lang="en-US" sz="1100" noProof="1"/>
               <a:t>Panel …</a:t>
             </a:r>
-            <a:endParaRPr lang="en-US" sz="1100" noProof="1"/>
           </a:p>
         </p:txBody>
       </p:sp>
@@ -8796,7 +8709,7 @@
           <p:cNvPr id="4" name="TextBox 3">
             <a:extLst>
               <a:ext uri="{FF2B5EF4-FFF2-40B4-BE49-F238E27FC236}">
-                <a16:creationId xmlns="" xmlns:a16="http://schemas.microsoft.com/office/drawing/2014/main" id="{A3B539CD-C74B-1F9E-D839-77A060D08F3D}"/>
+                <a16:creationId xmlns:a16="http://schemas.microsoft.com/office/drawing/2014/main" id="{A3B539CD-C74B-1F9E-D839-77A060D08F3D}"/>
               </a:ext>
             </a:extLst>
           </p:cNvPr>
@@ -8831,7 +8744,7 @@
           <p:cNvPr id="5" name="Rectangle: Folded Corner 4">
             <a:extLst>
               <a:ext uri="{FF2B5EF4-FFF2-40B4-BE49-F238E27FC236}">
-                <a16:creationId xmlns="" xmlns:a16="http://schemas.microsoft.com/office/drawing/2014/main" id="{04E7AE66-B5DB-564A-8CD4-1AAAD8423438}"/>
+                <a16:creationId xmlns:a16="http://schemas.microsoft.com/office/drawing/2014/main" id="{04E7AE66-B5DB-564A-8CD4-1AAAD8423438}"/>
               </a:ext>
             </a:extLst>
           </p:cNvPr>
@@ -8877,7 +8790,7 @@
           <p:cNvPr id="6" name="TextBox 5">
             <a:extLst>
               <a:ext uri="{FF2B5EF4-FFF2-40B4-BE49-F238E27FC236}">
-                <a16:creationId xmlns="" xmlns:a16="http://schemas.microsoft.com/office/drawing/2014/main" id="{7CA3E327-877E-7395-7A86-FDD9DE103876}"/>
+                <a16:creationId xmlns:a16="http://schemas.microsoft.com/office/drawing/2014/main" id="{7CA3E327-877E-7395-7A86-FDD9DE103876}"/>
               </a:ext>
             </a:extLst>
           </p:cNvPr>
@@ -8916,7 +8829,7 @@
           <p:cNvPr id="7" name="TextBox 6">
             <a:extLst>
               <a:ext uri="{FF2B5EF4-FFF2-40B4-BE49-F238E27FC236}">
-                <a16:creationId xmlns="" xmlns:a16="http://schemas.microsoft.com/office/drawing/2014/main" id="{89553F22-90DF-6C3C-8E53-2988B3844390}"/>
+                <a16:creationId xmlns:a16="http://schemas.microsoft.com/office/drawing/2014/main" id="{89553F22-90DF-6C3C-8E53-2988B3844390}"/>
               </a:ext>
             </a:extLst>
           </p:cNvPr>
@@ -8969,7 +8882,7 @@
           <p:cNvPr id="8" name="TextBox 7">
             <a:extLst>
               <a:ext uri="{FF2B5EF4-FFF2-40B4-BE49-F238E27FC236}">
-                <a16:creationId xmlns="" xmlns:a16="http://schemas.microsoft.com/office/drawing/2014/main" id="{DF778951-890E-68A0-8C2C-9AEF29812715}"/>
+                <a16:creationId xmlns:a16="http://schemas.microsoft.com/office/drawing/2014/main" id="{DF778951-890E-68A0-8C2C-9AEF29812715}"/>
               </a:ext>
             </a:extLst>
           </p:cNvPr>
@@ -9125,7 +9038,7 @@
           <p:cNvPr id="9" name="Rectangle: Folded Corner 8">
             <a:extLst>
               <a:ext uri="{FF2B5EF4-FFF2-40B4-BE49-F238E27FC236}">
-                <a16:creationId xmlns="" xmlns:a16="http://schemas.microsoft.com/office/drawing/2014/main" id="{44FF2919-83AF-DE82-3B8D-0778DEB2D056}"/>
+                <a16:creationId xmlns:a16="http://schemas.microsoft.com/office/drawing/2014/main" id="{44FF2919-83AF-DE82-3B8D-0778DEB2D056}"/>
               </a:ext>
             </a:extLst>
           </p:cNvPr>
@@ -9171,7 +9084,7 @@
           <p:cNvPr id="10" name="TextBox 9">
             <a:extLst>
               <a:ext uri="{FF2B5EF4-FFF2-40B4-BE49-F238E27FC236}">
-                <a16:creationId xmlns="" xmlns:a16="http://schemas.microsoft.com/office/drawing/2014/main" id="{2AEC73FF-63D6-EAD3-5C1C-A34EB11321C3}"/>
+                <a16:creationId xmlns:a16="http://schemas.microsoft.com/office/drawing/2014/main" id="{2AEC73FF-63D6-EAD3-5C1C-A34EB11321C3}"/>
               </a:ext>
             </a:extLst>
           </p:cNvPr>
@@ -9210,7 +9123,7 @@
           <p:cNvPr id="11" name="Rectangle: Folded Corner 10">
             <a:extLst>
               <a:ext uri="{FF2B5EF4-FFF2-40B4-BE49-F238E27FC236}">
-                <a16:creationId xmlns="" xmlns:a16="http://schemas.microsoft.com/office/drawing/2014/main" id="{68CB3551-568B-DA44-BC1C-8DFBC3DDF1EE}"/>
+                <a16:creationId xmlns:a16="http://schemas.microsoft.com/office/drawing/2014/main" id="{68CB3551-568B-DA44-BC1C-8DFBC3DDF1EE}"/>
               </a:ext>
             </a:extLst>
           </p:cNvPr>
@@ -9256,7 +9169,7 @@
           <p:cNvPr id="12" name="TextBox 11">
             <a:extLst>
               <a:ext uri="{FF2B5EF4-FFF2-40B4-BE49-F238E27FC236}">
-                <a16:creationId xmlns="" xmlns:a16="http://schemas.microsoft.com/office/drawing/2014/main" id="{4F2EFA46-8D8A-A300-256B-B7AFA0095F95}"/>
+                <a16:creationId xmlns:a16="http://schemas.microsoft.com/office/drawing/2014/main" id="{4F2EFA46-8D8A-A300-256B-B7AFA0095F95}"/>
               </a:ext>
             </a:extLst>
           </p:cNvPr>
@@ -9295,7 +9208,7 @@
           <p:cNvPr id="13" name="TextBox 12">
             <a:extLst>
               <a:ext uri="{FF2B5EF4-FFF2-40B4-BE49-F238E27FC236}">
-                <a16:creationId xmlns="" xmlns:a16="http://schemas.microsoft.com/office/drawing/2014/main" id="{34F95AC0-13B4-C476-D8DC-F23D9F9C1C47}"/>
+                <a16:creationId xmlns:a16="http://schemas.microsoft.com/office/drawing/2014/main" id="{34F95AC0-13B4-C476-D8DC-F23D9F9C1C47}"/>
               </a:ext>
             </a:extLst>
           </p:cNvPr>
@@ -9343,7 +9256,7 @@
           <p:cNvPr id="14" name="TextBox 13">
             <a:extLst>
               <a:ext uri="{FF2B5EF4-FFF2-40B4-BE49-F238E27FC236}">
-                <a16:creationId xmlns="" xmlns:a16="http://schemas.microsoft.com/office/drawing/2014/main" id="{7078546D-9F10-263D-C605-0C2CA2B007E2}"/>
+                <a16:creationId xmlns:a16="http://schemas.microsoft.com/office/drawing/2014/main" id="{7078546D-9F10-263D-C605-0C2CA2B007E2}"/>
               </a:ext>
             </a:extLst>
           </p:cNvPr>
@@ -9383,7 +9296,7 @@
           <p:cNvPr id="15" name="Arrow: Down 14">
             <a:extLst>
               <a:ext uri="{FF2B5EF4-FFF2-40B4-BE49-F238E27FC236}">
-                <a16:creationId xmlns="" xmlns:a16="http://schemas.microsoft.com/office/drawing/2014/main" id="{71F13246-8D55-628E-8E07-A951792513CB}"/>
+                <a16:creationId xmlns:a16="http://schemas.microsoft.com/office/drawing/2014/main" id="{71F13246-8D55-628E-8E07-A951792513CB}"/>
               </a:ext>
             </a:extLst>
           </p:cNvPr>
@@ -9429,7 +9342,7 @@
           <p:cNvPr id="16" name="TextBox 15">
             <a:extLst>
               <a:ext uri="{FF2B5EF4-FFF2-40B4-BE49-F238E27FC236}">
-                <a16:creationId xmlns="" xmlns:a16="http://schemas.microsoft.com/office/drawing/2014/main" id="{3AC763A8-4110-6FD6-558B-95BF9323BF58}"/>
+                <a16:creationId xmlns:a16="http://schemas.microsoft.com/office/drawing/2014/main" id="{3AC763A8-4110-6FD6-558B-95BF9323BF58}"/>
               </a:ext>
             </a:extLst>
           </p:cNvPr>
@@ -9468,7 +9381,7 @@
           <p:cNvPr id="17" name="Rectangle: Folded Corner 16">
             <a:extLst>
               <a:ext uri="{FF2B5EF4-FFF2-40B4-BE49-F238E27FC236}">
-                <a16:creationId xmlns="" xmlns:a16="http://schemas.microsoft.com/office/drawing/2014/main" id="{FF7B541B-B35D-1E4D-EEE1-512CFFAA9281}"/>
+                <a16:creationId xmlns:a16="http://schemas.microsoft.com/office/drawing/2014/main" id="{FF7B541B-B35D-1E4D-EEE1-512CFFAA9281}"/>
               </a:ext>
             </a:extLst>
           </p:cNvPr>
@@ -9514,7 +9427,7 @@
           <p:cNvPr id="18" name="TextBox 17">
             <a:extLst>
               <a:ext uri="{FF2B5EF4-FFF2-40B4-BE49-F238E27FC236}">
-                <a16:creationId xmlns="" xmlns:a16="http://schemas.microsoft.com/office/drawing/2014/main" id="{90D45B93-3DDB-3BBB-B2A7-1C0A7784AFE6}"/>
+                <a16:creationId xmlns:a16="http://schemas.microsoft.com/office/drawing/2014/main" id="{90D45B93-3DDB-3BBB-B2A7-1C0A7784AFE6}"/>
               </a:ext>
             </a:extLst>
           </p:cNvPr>
@@ -9553,7 +9466,7 @@
           <p:cNvPr id="19" name="Arrow: Down 18">
             <a:extLst>
               <a:ext uri="{FF2B5EF4-FFF2-40B4-BE49-F238E27FC236}">
-                <a16:creationId xmlns="" xmlns:a16="http://schemas.microsoft.com/office/drawing/2014/main" id="{16C18FED-E1B3-1132-8E46-BDD35B915A9C}"/>
+                <a16:creationId xmlns:a16="http://schemas.microsoft.com/office/drawing/2014/main" id="{16C18FED-E1B3-1132-8E46-BDD35B915A9C}"/>
               </a:ext>
             </a:extLst>
           </p:cNvPr>
@@ -9599,7 +9512,7 @@
           <p:cNvPr id="20" name="TextBox 19">
             <a:extLst>
               <a:ext uri="{FF2B5EF4-FFF2-40B4-BE49-F238E27FC236}">
-                <a16:creationId xmlns="" xmlns:a16="http://schemas.microsoft.com/office/drawing/2014/main" id="{06B00A8D-CBAA-ED5A-9895-CA6BF77A7338}"/>
+                <a16:creationId xmlns:a16="http://schemas.microsoft.com/office/drawing/2014/main" id="{06B00A8D-CBAA-ED5A-9895-CA6BF77A7338}"/>
               </a:ext>
             </a:extLst>
           </p:cNvPr>
@@ -9647,7 +9560,7 @@
           <p:cNvPr id="21" name="Arrow: Down 20">
             <a:extLst>
               <a:ext uri="{FF2B5EF4-FFF2-40B4-BE49-F238E27FC236}">
-                <a16:creationId xmlns="" xmlns:a16="http://schemas.microsoft.com/office/drawing/2014/main" id="{6A9240A9-1F61-9906-BB30-F872049BD62B}"/>
+                <a16:creationId xmlns:a16="http://schemas.microsoft.com/office/drawing/2014/main" id="{6A9240A9-1F61-9906-BB30-F872049BD62B}"/>
               </a:ext>
             </a:extLst>
           </p:cNvPr>
@@ -9693,7 +9606,7 @@
           <p:cNvPr id="22" name="Rectangle: Folded Corner 21">
             <a:extLst>
               <a:ext uri="{FF2B5EF4-FFF2-40B4-BE49-F238E27FC236}">
-                <a16:creationId xmlns="" xmlns:a16="http://schemas.microsoft.com/office/drawing/2014/main" id="{E1570AF6-82D2-0F10-A5C9-2CF5620E8E81}"/>
+                <a16:creationId xmlns:a16="http://schemas.microsoft.com/office/drawing/2014/main" id="{E1570AF6-82D2-0F10-A5C9-2CF5620E8E81}"/>
               </a:ext>
             </a:extLst>
           </p:cNvPr>
@@ -9739,7 +9652,7 @@
           <p:cNvPr id="23" name="TextBox 22">
             <a:extLst>
               <a:ext uri="{FF2B5EF4-FFF2-40B4-BE49-F238E27FC236}">
-                <a16:creationId xmlns="" xmlns:a16="http://schemas.microsoft.com/office/drawing/2014/main" id="{6B0AFA88-8BE7-ABF8-E40D-8D32A639A4C4}"/>
+                <a16:creationId xmlns:a16="http://schemas.microsoft.com/office/drawing/2014/main" id="{6B0AFA88-8BE7-ABF8-E40D-8D32A639A4C4}"/>
               </a:ext>
             </a:extLst>
           </p:cNvPr>
@@ -9778,7 +9691,7 @@
           <p:cNvPr id="24" name="Rectangle: Folded Corner 23">
             <a:extLst>
               <a:ext uri="{FF2B5EF4-FFF2-40B4-BE49-F238E27FC236}">
-                <a16:creationId xmlns="" xmlns:a16="http://schemas.microsoft.com/office/drawing/2014/main" id="{A36F59E0-DE31-8CC8-FBAF-F41DD0F67F92}"/>
+                <a16:creationId xmlns:a16="http://schemas.microsoft.com/office/drawing/2014/main" id="{A36F59E0-DE31-8CC8-FBAF-F41DD0F67F92}"/>
               </a:ext>
             </a:extLst>
           </p:cNvPr>
@@ -9824,7 +9737,7 @@
           <p:cNvPr id="25" name="TextBox 24">
             <a:extLst>
               <a:ext uri="{FF2B5EF4-FFF2-40B4-BE49-F238E27FC236}">
-                <a16:creationId xmlns="" xmlns:a16="http://schemas.microsoft.com/office/drawing/2014/main" id="{ED857D55-5F17-0A0D-CC10-E0D079E96BE0}"/>
+                <a16:creationId xmlns:a16="http://schemas.microsoft.com/office/drawing/2014/main" id="{ED857D55-5F17-0A0D-CC10-E0D079E96BE0}"/>
               </a:ext>
             </a:extLst>
           </p:cNvPr>
@@ -9863,7 +9776,7 @@
           <p:cNvPr id="26" name="TextBox 25">
             <a:extLst>
               <a:ext uri="{FF2B5EF4-FFF2-40B4-BE49-F238E27FC236}">
-                <a16:creationId xmlns="" xmlns:a16="http://schemas.microsoft.com/office/drawing/2014/main" id="{1C14D2A6-96F1-1BB6-75C2-FB97B0218A5D}"/>
+                <a16:creationId xmlns:a16="http://schemas.microsoft.com/office/drawing/2014/main" id="{1C14D2A6-96F1-1BB6-75C2-FB97B0218A5D}"/>
               </a:ext>
             </a:extLst>
           </p:cNvPr>
@@ -9903,7 +9816,7 @@
           <p:cNvPr id="27" name="TextBox 26">
             <a:extLst>
               <a:ext uri="{FF2B5EF4-FFF2-40B4-BE49-F238E27FC236}">
-                <a16:creationId xmlns="" xmlns:a16="http://schemas.microsoft.com/office/drawing/2014/main" id="{D27F0F62-8394-C12C-C756-489D3314AD2C}"/>
+                <a16:creationId xmlns:a16="http://schemas.microsoft.com/office/drawing/2014/main" id="{D27F0F62-8394-C12C-C756-489D3314AD2C}"/>
               </a:ext>
             </a:extLst>
           </p:cNvPr>
@@ -9962,7 +9875,7 @@
           <p:cNvPr id="28" name="TextBox 27">
             <a:extLst>
               <a:ext uri="{FF2B5EF4-FFF2-40B4-BE49-F238E27FC236}">
-                <a16:creationId xmlns="" xmlns:a16="http://schemas.microsoft.com/office/drawing/2014/main" id="{346493EF-8AEF-A2CB-5215-47C93F45045D}"/>
+                <a16:creationId xmlns:a16="http://schemas.microsoft.com/office/drawing/2014/main" id="{346493EF-8AEF-A2CB-5215-47C93F45045D}"/>
               </a:ext>
             </a:extLst>
           </p:cNvPr>
@@ -10002,7 +9915,7 @@
           <p:cNvPr id="29" name="TextBox 28">
             <a:extLst>
               <a:ext uri="{FF2B5EF4-FFF2-40B4-BE49-F238E27FC236}">
-                <a16:creationId xmlns="" xmlns:a16="http://schemas.microsoft.com/office/drawing/2014/main" id="{D7309F9D-9AE4-A66A-F677-138CD258E1ED}"/>
+                <a16:creationId xmlns:a16="http://schemas.microsoft.com/office/drawing/2014/main" id="{D7309F9D-9AE4-A66A-F677-138CD258E1ED}"/>
               </a:ext>
             </a:extLst>
           </p:cNvPr>
@@ -10041,7 +9954,7 @@
           <p:cNvPr id="30" name="TextBox 29">
             <a:extLst>
               <a:ext uri="{FF2B5EF4-FFF2-40B4-BE49-F238E27FC236}">
-                <a16:creationId xmlns="" xmlns:a16="http://schemas.microsoft.com/office/drawing/2014/main" id="{E9F700C7-FE2B-0908-968E-C22CDD21AE1C}"/>
+                <a16:creationId xmlns:a16="http://schemas.microsoft.com/office/drawing/2014/main" id="{E9F700C7-FE2B-0908-968E-C22CDD21AE1C}"/>
               </a:ext>
             </a:extLst>
           </p:cNvPr>
@@ -10081,7 +9994,7 @@
           <p:cNvPr id="31" name="TextBox 30">
             <a:extLst>
               <a:ext uri="{FF2B5EF4-FFF2-40B4-BE49-F238E27FC236}">
-                <a16:creationId xmlns="" xmlns:a16="http://schemas.microsoft.com/office/drawing/2014/main" id="{16E374FD-AB83-2F99-4C49-B8F61EBB3E0A}"/>
+                <a16:creationId xmlns:a16="http://schemas.microsoft.com/office/drawing/2014/main" id="{16E374FD-AB83-2F99-4C49-B8F61EBB3E0A}"/>
               </a:ext>
             </a:extLst>
           </p:cNvPr>
@@ -10267,7 +10180,7 @@
           <p:cNvPr id="32" name="Arrow: Down 31">
             <a:extLst>
               <a:ext uri="{FF2B5EF4-FFF2-40B4-BE49-F238E27FC236}">
-                <a16:creationId xmlns="" xmlns:a16="http://schemas.microsoft.com/office/drawing/2014/main" id="{F57188FE-4EFA-8671-56F5-5D71884C8051}"/>
+                <a16:creationId xmlns:a16="http://schemas.microsoft.com/office/drawing/2014/main" id="{F57188FE-4EFA-8671-56F5-5D71884C8051}"/>
               </a:ext>
             </a:extLst>
           </p:cNvPr>
@@ -10313,7 +10226,7 @@
           <p:cNvPr id="33" name="Arrow: Down 32">
             <a:extLst>
               <a:ext uri="{FF2B5EF4-FFF2-40B4-BE49-F238E27FC236}">
-                <a16:creationId xmlns="" xmlns:a16="http://schemas.microsoft.com/office/drawing/2014/main" id="{B7E6DFD9-C62E-9F53-007D-5DAA7304C843}"/>
+                <a16:creationId xmlns:a16="http://schemas.microsoft.com/office/drawing/2014/main" id="{B7E6DFD9-C62E-9F53-007D-5DAA7304C843}"/>
               </a:ext>
             </a:extLst>
           </p:cNvPr>
@@ -10359,7 +10272,7 @@
           <p:cNvPr id="35" name="TextBox 34">
             <a:extLst>
               <a:ext uri="{FF2B5EF4-FFF2-40B4-BE49-F238E27FC236}">
-                <a16:creationId xmlns="" xmlns:a16="http://schemas.microsoft.com/office/drawing/2014/main" id="{315E6C83-F014-C25B-1D48-B145EE187C71}"/>
+                <a16:creationId xmlns:a16="http://schemas.microsoft.com/office/drawing/2014/main" id="{315E6C83-F014-C25B-1D48-B145EE187C71}"/>
               </a:ext>
             </a:extLst>
           </p:cNvPr>
@@ -10742,7 +10655,7 @@
           <p:cNvPr id="36" name="Oval 35">
             <a:extLst>
               <a:ext uri="{FF2B5EF4-FFF2-40B4-BE49-F238E27FC236}">
-                <a16:creationId xmlns="" xmlns:a16="http://schemas.microsoft.com/office/drawing/2014/main" id="{1B58A6E4-F8AB-DED4-AB35-57E34AB521FB}"/>
+                <a16:creationId xmlns:a16="http://schemas.microsoft.com/office/drawing/2014/main" id="{1B58A6E4-F8AB-DED4-AB35-57E34AB521FB}"/>
               </a:ext>
             </a:extLst>
           </p:cNvPr>
@@ -10794,7 +10707,7 @@
           <p:cNvPr id="38" name="Connector: Curved 37">
             <a:extLst>
               <a:ext uri="{FF2B5EF4-FFF2-40B4-BE49-F238E27FC236}">
-                <a16:creationId xmlns="" xmlns:a16="http://schemas.microsoft.com/office/drawing/2014/main" id="{8230680C-1CF4-25AE-E672-7A2E2F4CC9A1}"/>
+                <a16:creationId xmlns:a16="http://schemas.microsoft.com/office/drawing/2014/main" id="{8230680C-1CF4-25AE-E672-7A2E2F4CC9A1}"/>
               </a:ext>
             </a:extLst>
           </p:cNvPr>
@@ -10838,7 +10751,7 @@
           <p:cNvPr id="40" name="Connector: Curved 39">
             <a:extLst>
               <a:ext uri="{FF2B5EF4-FFF2-40B4-BE49-F238E27FC236}">
-                <a16:creationId xmlns="" xmlns:a16="http://schemas.microsoft.com/office/drawing/2014/main" id="{0EFC8EDC-7302-5BBB-0BC3-D241733D9A81}"/>
+                <a16:creationId xmlns:a16="http://schemas.microsoft.com/office/drawing/2014/main" id="{0EFC8EDC-7302-5BBB-0BC3-D241733D9A81}"/>
               </a:ext>
             </a:extLst>
           </p:cNvPr>
@@ -10886,7 +10799,7 @@
           <p:cNvPr id="41" name="Rectangle 40">
             <a:extLst>
               <a:ext uri="{FF2B5EF4-FFF2-40B4-BE49-F238E27FC236}">
-                <a16:creationId xmlns="" xmlns:a16="http://schemas.microsoft.com/office/drawing/2014/main" id="{1334B709-2F22-6EA2-45E3-CA584006EA78}"/>
+                <a16:creationId xmlns:a16="http://schemas.microsoft.com/office/drawing/2014/main" id="{1334B709-2F22-6EA2-45E3-CA584006EA78}"/>
               </a:ext>
             </a:extLst>
           </p:cNvPr>
@@ -10936,7 +10849,7 @@
           <p:cNvPr id="43" name="Rectangle 42">
             <a:extLst>
               <a:ext uri="{FF2B5EF4-FFF2-40B4-BE49-F238E27FC236}">
-                <a16:creationId xmlns="" xmlns:a16="http://schemas.microsoft.com/office/drawing/2014/main" id="{660DB912-0C35-B520-CB29-E4CBA93190DA}"/>
+                <a16:creationId xmlns:a16="http://schemas.microsoft.com/office/drawing/2014/main" id="{660DB912-0C35-B520-CB29-E4CBA93190DA}"/>
               </a:ext>
             </a:extLst>
           </p:cNvPr>
@@ -10986,7 +10899,7 @@
           <p:cNvPr id="45" name="Connector: Curved 44">
             <a:extLst>
               <a:ext uri="{FF2B5EF4-FFF2-40B4-BE49-F238E27FC236}">
-                <a16:creationId xmlns="" xmlns:a16="http://schemas.microsoft.com/office/drawing/2014/main" id="{BD305012-B4D5-E046-E0D9-F8EF524E5B3B}"/>
+                <a16:creationId xmlns:a16="http://schemas.microsoft.com/office/drawing/2014/main" id="{BD305012-B4D5-E046-E0D9-F8EF524E5B3B}"/>
               </a:ext>
             </a:extLst>
           </p:cNvPr>
@@ -11064,7 +10977,7 @@
           <p:cNvPr id="10" name="Picture 9">
             <a:extLst>
               <a:ext uri="{FF2B5EF4-FFF2-40B4-BE49-F238E27FC236}">
-                <a16:creationId xmlns="" xmlns:a16="http://schemas.microsoft.com/office/drawing/2014/main" id="{5431CAED-F147-7951-F74F-5059806F9D55}"/>
+                <a16:creationId xmlns:a16="http://schemas.microsoft.com/office/drawing/2014/main" id="{5431CAED-F147-7951-F74F-5059806F9D55}"/>
               </a:ext>
             </a:extLst>
           </p:cNvPr>
@@ -11107,7 +11020,7 @@
           <p:cNvPr id="19" name="Rectangle 18">
             <a:extLst>
               <a:ext uri="{FF2B5EF4-FFF2-40B4-BE49-F238E27FC236}">
-                <a16:creationId xmlns="" xmlns:a16="http://schemas.microsoft.com/office/drawing/2014/main" id="{FB4CDD78-8B06-DFA7-355D-6A323A9A638E}"/>
+                <a16:creationId xmlns:a16="http://schemas.microsoft.com/office/drawing/2014/main" id="{FB4CDD78-8B06-DFA7-355D-6A323A9A638E}"/>
               </a:ext>
             </a:extLst>
           </p:cNvPr>
@@ -11159,7 +11072,7 @@
           <p:cNvPr id="2" name="TextBox 1">
             <a:extLst>
               <a:ext uri="{FF2B5EF4-FFF2-40B4-BE49-F238E27FC236}">
-                <a16:creationId xmlns="" xmlns:a16="http://schemas.microsoft.com/office/drawing/2014/main" id="{1CD60342-2F70-F14D-21F6-C2F8D6092854}"/>
+                <a16:creationId xmlns:a16="http://schemas.microsoft.com/office/drawing/2014/main" id="{1CD60342-2F70-F14D-21F6-C2F8D6092854}"/>
               </a:ext>
             </a:extLst>
           </p:cNvPr>
@@ -11194,7 +11107,7 @@
           <p:cNvPr id="11" name="TextBox 10">
             <a:extLst>
               <a:ext uri="{FF2B5EF4-FFF2-40B4-BE49-F238E27FC236}">
-                <a16:creationId xmlns="" xmlns:a16="http://schemas.microsoft.com/office/drawing/2014/main" id="{A69AEEE1-B60C-A425-1A0C-1700D10B2456}"/>
+                <a16:creationId xmlns:a16="http://schemas.microsoft.com/office/drawing/2014/main" id="{A69AEEE1-B60C-A425-1A0C-1700D10B2456}"/>
               </a:ext>
             </a:extLst>
           </p:cNvPr>
@@ -11234,7 +11147,7 @@
           <p:cNvPr id="12" name="TextBox 11">
             <a:extLst>
               <a:ext uri="{FF2B5EF4-FFF2-40B4-BE49-F238E27FC236}">
-                <a16:creationId xmlns="" xmlns:a16="http://schemas.microsoft.com/office/drawing/2014/main" id="{4AED61D7-B7D1-02D0-B578-4984DABC8FD4}"/>
+                <a16:creationId xmlns:a16="http://schemas.microsoft.com/office/drawing/2014/main" id="{4AED61D7-B7D1-02D0-B578-4984DABC8FD4}"/>
               </a:ext>
             </a:extLst>
           </p:cNvPr>
@@ -11274,7 +11187,7 @@
           <p:cNvPr id="13" name="TextBox 12">
             <a:extLst>
               <a:ext uri="{FF2B5EF4-FFF2-40B4-BE49-F238E27FC236}">
-                <a16:creationId xmlns="" xmlns:a16="http://schemas.microsoft.com/office/drawing/2014/main" id="{E7B273F2-779C-3548-BC14-74C560E43E9F}"/>
+                <a16:creationId xmlns:a16="http://schemas.microsoft.com/office/drawing/2014/main" id="{E7B273F2-779C-3548-BC14-74C560E43E9F}"/>
               </a:ext>
             </a:extLst>
           </p:cNvPr>
@@ -11314,7 +11227,7 @@
           <p:cNvPr id="14" name="Rectangle: Folded Corner 13">
             <a:extLst>
               <a:ext uri="{FF2B5EF4-FFF2-40B4-BE49-F238E27FC236}">
-                <a16:creationId xmlns="" xmlns:a16="http://schemas.microsoft.com/office/drawing/2014/main" id="{BE75F13C-EE95-C1B9-172D-77A52EB80836}"/>
+                <a16:creationId xmlns:a16="http://schemas.microsoft.com/office/drawing/2014/main" id="{BE75F13C-EE95-C1B9-172D-77A52EB80836}"/>
               </a:ext>
             </a:extLst>
           </p:cNvPr>
@@ -11360,7 +11273,7 @@
           <p:cNvPr id="15" name="TextBox 14">
             <a:extLst>
               <a:ext uri="{FF2B5EF4-FFF2-40B4-BE49-F238E27FC236}">
-                <a16:creationId xmlns="" xmlns:a16="http://schemas.microsoft.com/office/drawing/2014/main" id="{2DD4BD2E-13F7-A68E-718A-D953DC7D4298}"/>
+                <a16:creationId xmlns:a16="http://schemas.microsoft.com/office/drawing/2014/main" id="{2DD4BD2E-13F7-A68E-718A-D953DC7D4298}"/>
               </a:ext>
             </a:extLst>
           </p:cNvPr>
@@ -11399,7 +11312,7 @@
           <p:cNvPr id="16" name="TextBox 15">
             <a:extLst>
               <a:ext uri="{FF2B5EF4-FFF2-40B4-BE49-F238E27FC236}">
-                <a16:creationId xmlns="" xmlns:a16="http://schemas.microsoft.com/office/drawing/2014/main" id="{043351FB-04C3-ABDD-3152-538D74287CF1}"/>
+                <a16:creationId xmlns:a16="http://schemas.microsoft.com/office/drawing/2014/main" id="{043351FB-04C3-ABDD-3152-538D74287CF1}"/>
               </a:ext>
             </a:extLst>
           </p:cNvPr>
@@ -11439,7 +11352,7 @@
           <p:cNvPr id="3" name="Rectangle: Folded Corner 2">
             <a:extLst>
               <a:ext uri="{FF2B5EF4-FFF2-40B4-BE49-F238E27FC236}">
-                <a16:creationId xmlns="" xmlns:a16="http://schemas.microsoft.com/office/drawing/2014/main" id="{823510AD-A1DD-FF92-6FEB-98AA64AA5A40}"/>
+                <a16:creationId xmlns:a16="http://schemas.microsoft.com/office/drawing/2014/main" id="{823510AD-A1DD-FF92-6FEB-98AA64AA5A40}"/>
               </a:ext>
             </a:extLst>
           </p:cNvPr>
@@ -11485,7 +11398,7 @@
           <p:cNvPr id="4" name="TextBox 3">
             <a:extLst>
               <a:ext uri="{FF2B5EF4-FFF2-40B4-BE49-F238E27FC236}">
-                <a16:creationId xmlns="" xmlns:a16="http://schemas.microsoft.com/office/drawing/2014/main" id="{00A424EE-F41A-D71B-B074-97BD61B60BBC}"/>
+                <a16:creationId xmlns:a16="http://schemas.microsoft.com/office/drawing/2014/main" id="{00A424EE-F41A-D71B-B074-97BD61B60BBC}"/>
               </a:ext>
             </a:extLst>
           </p:cNvPr>
@@ -11524,7 +11437,7 @@
           <p:cNvPr id="5" name="TextBox 4">
             <a:extLst>
               <a:ext uri="{FF2B5EF4-FFF2-40B4-BE49-F238E27FC236}">
-                <a16:creationId xmlns="" xmlns:a16="http://schemas.microsoft.com/office/drawing/2014/main" id="{FDFC23DE-06F5-BB77-341E-986B3A6B4F9B}"/>
+                <a16:creationId xmlns:a16="http://schemas.microsoft.com/office/drawing/2014/main" id="{FDFC23DE-06F5-BB77-341E-986B3A6B4F9B}"/>
               </a:ext>
             </a:extLst>
           </p:cNvPr>
@@ -11564,7 +11477,7 @@
           <p:cNvPr id="6" name="Rectangle: Folded Corner 5">
             <a:extLst>
               <a:ext uri="{FF2B5EF4-FFF2-40B4-BE49-F238E27FC236}">
-                <a16:creationId xmlns="" xmlns:a16="http://schemas.microsoft.com/office/drawing/2014/main" id="{B9DCAB74-9C5C-6D36-18D3-85660AF62BEC}"/>
+                <a16:creationId xmlns:a16="http://schemas.microsoft.com/office/drawing/2014/main" id="{B9DCAB74-9C5C-6D36-18D3-85660AF62BEC}"/>
               </a:ext>
             </a:extLst>
           </p:cNvPr>
@@ -11610,7 +11523,7 @@
           <p:cNvPr id="7" name="TextBox 6">
             <a:extLst>
               <a:ext uri="{FF2B5EF4-FFF2-40B4-BE49-F238E27FC236}">
-                <a16:creationId xmlns="" xmlns:a16="http://schemas.microsoft.com/office/drawing/2014/main" id="{B533F8C1-C4E1-22D5-EAAE-2EF3F08B3E54}"/>
+                <a16:creationId xmlns:a16="http://schemas.microsoft.com/office/drawing/2014/main" id="{B533F8C1-C4E1-22D5-EAAE-2EF3F08B3E54}"/>
               </a:ext>
             </a:extLst>
           </p:cNvPr>
@@ -11649,7 +11562,7 @@
           <p:cNvPr id="8" name="TextBox 7">
             <a:extLst>
               <a:ext uri="{FF2B5EF4-FFF2-40B4-BE49-F238E27FC236}">
-                <a16:creationId xmlns="" xmlns:a16="http://schemas.microsoft.com/office/drawing/2014/main" id="{FB974B0D-45AE-CF46-6540-E4289CEDFAE9}"/>
+                <a16:creationId xmlns:a16="http://schemas.microsoft.com/office/drawing/2014/main" id="{FB974B0D-45AE-CF46-6540-E4289CEDFAE9}"/>
               </a:ext>
             </a:extLst>
           </p:cNvPr>
@@ -11696,7 +11609,7 @@
           <p:cNvPr id="9" name="Rectangle: Folded Corner 8">
             <a:extLst>
               <a:ext uri="{FF2B5EF4-FFF2-40B4-BE49-F238E27FC236}">
-                <a16:creationId xmlns="" xmlns:a16="http://schemas.microsoft.com/office/drawing/2014/main" id="{1C3E50B8-6AA6-97A8-AE00-05ACF329349F}"/>
+                <a16:creationId xmlns:a16="http://schemas.microsoft.com/office/drawing/2014/main" id="{1C3E50B8-6AA6-97A8-AE00-05ACF329349F}"/>
               </a:ext>
             </a:extLst>
           </p:cNvPr>
@@ -11742,7 +11655,7 @@
           <p:cNvPr id="17" name="TextBox 16">
             <a:extLst>
               <a:ext uri="{FF2B5EF4-FFF2-40B4-BE49-F238E27FC236}">
-                <a16:creationId xmlns="" xmlns:a16="http://schemas.microsoft.com/office/drawing/2014/main" id="{51F4C21B-045F-0AA9-D8E8-081E88B3B232}"/>
+                <a16:creationId xmlns:a16="http://schemas.microsoft.com/office/drawing/2014/main" id="{51F4C21B-045F-0AA9-D8E8-081E88B3B232}"/>
               </a:ext>
             </a:extLst>
           </p:cNvPr>
@@ -11781,7 +11694,7 @@
           <p:cNvPr id="18" name="TextBox 17">
             <a:extLst>
               <a:ext uri="{FF2B5EF4-FFF2-40B4-BE49-F238E27FC236}">
-                <a16:creationId xmlns="" xmlns:a16="http://schemas.microsoft.com/office/drawing/2014/main" id="{37A98937-9510-E09E-C425-C4258BAAACBF}"/>
+                <a16:creationId xmlns:a16="http://schemas.microsoft.com/office/drawing/2014/main" id="{37A98937-9510-E09E-C425-C4258BAAACBF}"/>
               </a:ext>
             </a:extLst>
           </p:cNvPr>
@@ -11821,7 +11734,7 @@
           <p:cNvPr id="20" name="TextBox 19">
             <a:extLst>
               <a:ext uri="{FF2B5EF4-FFF2-40B4-BE49-F238E27FC236}">
-                <a16:creationId xmlns="" xmlns:a16="http://schemas.microsoft.com/office/drawing/2014/main" id="{827823C3-240A-A1A8-6C08-C50E4A3858F9}"/>
+                <a16:creationId xmlns:a16="http://schemas.microsoft.com/office/drawing/2014/main" id="{827823C3-240A-A1A8-6C08-C50E4A3858F9}"/>
               </a:ext>
             </a:extLst>
           </p:cNvPr>
@@ -11861,7 +11774,7 @@
           <p:cNvPr id="21" name="TextBox 20">
             <a:extLst>
               <a:ext uri="{FF2B5EF4-FFF2-40B4-BE49-F238E27FC236}">
-                <a16:creationId xmlns="" xmlns:a16="http://schemas.microsoft.com/office/drawing/2014/main" id="{6C87E3B4-FC03-8EA7-45B3-A9FEDD8B83FC}"/>
+                <a16:creationId xmlns:a16="http://schemas.microsoft.com/office/drawing/2014/main" id="{6C87E3B4-FC03-8EA7-45B3-A9FEDD8B83FC}"/>
               </a:ext>
             </a:extLst>
           </p:cNvPr>
@@ -11901,7 +11814,7 @@
           <p:cNvPr id="22" name="TextBox 21">
             <a:extLst>
               <a:ext uri="{FF2B5EF4-FFF2-40B4-BE49-F238E27FC236}">
-                <a16:creationId xmlns="" xmlns:a16="http://schemas.microsoft.com/office/drawing/2014/main" id="{246AFF82-DCB9-EDB9-2A55-43671E040B49}"/>
+                <a16:creationId xmlns:a16="http://schemas.microsoft.com/office/drawing/2014/main" id="{246AFF82-DCB9-EDB9-2A55-43671E040B49}"/>
               </a:ext>
             </a:extLst>
           </p:cNvPr>
@@ -11941,7 +11854,7 @@
           <p:cNvPr id="24" name="TextBox 23">
             <a:extLst>
               <a:ext uri="{FF2B5EF4-FFF2-40B4-BE49-F238E27FC236}">
-                <a16:creationId xmlns="" xmlns:a16="http://schemas.microsoft.com/office/drawing/2014/main" id="{C46E4350-AE8F-EC29-2445-DF09E0EAEAD2}"/>
+                <a16:creationId xmlns:a16="http://schemas.microsoft.com/office/drawing/2014/main" id="{C46E4350-AE8F-EC29-2445-DF09E0EAEAD2}"/>
               </a:ext>
             </a:extLst>
           </p:cNvPr>
@@ -12015,7 +11928,7 @@
           <p:cNvPr id="2" name="TextBox 1">
             <a:extLst>
               <a:ext uri="{FF2B5EF4-FFF2-40B4-BE49-F238E27FC236}">
-                <a16:creationId xmlns="" xmlns:a16="http://schemas.microsoft.com/office/drawing/2014/main" id="{1CD60342-2F70-F14D-21F6-C2F8D6092854}"/>
+                <a16:creationId xmlns:a16="http://schemas.microsoft.com/office/drawing/2014/main" id="{1CD60342-2F70-F14D-21F6-C2F8D6092854}"/>
               </a:ext>
             </a:extLst>
           </p:cNvPr>
@@ -12050,7 +11963,7 @@
           <p:cNvPr id="3" name="Rectangle: Folded Corner 2">
             <a:extLst>
               <a:ext uri="{FF2B5EF4-FFF2-40B4-BE49-F238E27FC236}">
-                <a16:creationId xmlns="" xmlns:a16="http://schemas.microsoft.com/office/drawing/2014/main" id="{71489425-E604-DED0-0EC3-234871AA7B66}"/>
+                <a16:creationId xmlns:a16="http://schemas.microsoft.com/office/drawing/2014/main" id="{71489425-E604-DED0-0EC3-234871AA7B66}"/>
               </a:ext>
             </a:extLst>
           </p:cNvPr>
@@ -12096,7 +12009,7 @@
           <p:cNvPr id="4" name="TextBox 3">
             <a:extLst>
               <a:ext uri="{FF2B5EF4-FFF2-40B4-BE49-F238E27FC236}">
-                <a16:creationId xmlns="" xmlns:a16="http://schemas.microsoft.com/office/drawing/2014/main" id="{7E88EFD6-127A-381B-555B-327C19DC289B}"/>
+                <a16:creationId xmlns:a16="http://schemas.microsoft.com/office/drawing/2014/main" id="{7E88EFD6-127A-381B-555B-327C19DC289B}"/>
               </a:ext>
             </a:extLst>
           </p:cNvPr>
@@ -12156,7 +12069,7 @@
           <p:cNvPr id="5" name="Rectangle: Folded Corner 4">
             <a:extLst>
               <a:ext uri="{FF2B5EF4-FFF2-40B4-BE49-F238E27FC236}">
-                <a16:creationId xmlns="" xmlns:a16="http://schemas.microsoft.com/office/drawing/2014/main" id="{4914F5C6-EBFC-CE22-D774-C1421C8246EA}"/>
+                <a16:creationId xmlns:a16="http://schemas.microsoft.com/office/drawing/2014/main" id="{4914F5C6-EBFC-CE22-D774-C1421C8246EA}"/>
               </a:ext>
             </a:extLst>
           </p:cNvPr>
@@ -12202,7 +12115,7 @@
           <p:cNvPr id="6" name="TextBox 5">
             <a:extLst>
               <a:ext uri="{FF2B5EF4-FFF2-40B4-BE49-F238E27FC236}">
-                <a16:creationId xmlns="" xmlns:a16="http://schemas.microsoft.com/office/drawing/2014/main" id="{C65147B6-9927-3FBC-0ACF-10B922E35875}"/>
+                <a16:creationId xmlns:a16="http://schemas.microsoft.com/office/drawing/2014/main" id="{C65147B6-9927-3FBC-0ACF-10B922E35875}"/>
               </a:ext>
             </a:extLst>
           </p:cNvPr>
@@ -12266,7 +12179,7 @@
           <p:cNvPr id="7" name="TextBox 6">
             <a:extLst>
               <a:ext uri="{FF2B5EF4-FFF2-40B4-BE49-F238E27FC236}">
-                <a16:creationId xmlns="" xmlns:a16="http://schemas.microsoft.com/office/drawing/2014/main" id="{FFFD000B-E8B1-C997-E58E-985369BB724C}"/>
+                <a16:creationId xmlns:a16="http://schemas.microsoft.com/office/drawing/2014/main" id="{FFFD000B-E8B1-C997-E58E-985369BB724C}"/>
               </a:ext>
             </a:extLst>
           </p:cNvPr>
@@ -12306,7 +12219,7 @@
           <p:cNvPr id="8" name="TextBox 7">
             <a:extLst>
               <a:ext uri="{FF2B5EF4-FFF2-40B4-BE49-F238E27FC236}">
-                <a16:creationId xmlns="" xmlns:a16="http://schemas.microsoft.com/office/drawing/2014/main" id="{E85F719B-5B20-A2E8-BABD-FA738F959EF4}"/>
+                <a16:creationId xmlns:a16="http://schemas.microsoft.com/office/drawing/2014/main" id="{E85F719B-5B20-A2E8-BABD-FA738F959EF4}"/>
               </a:ext>
             </a:extLst>
           </p:cNvPr>
@@ -12347,7 +12260,7 @@
           <p:cNvPr id="9" name="Rectangle: Folded Corner 8">
             <a:extLst>
               <a:ext uri="{FF2B5EF4-FFF2-40B4-BE49-F238E27FC236}">
-                <a16:creationId xmlns="" xmlns:a16="http://schemas.microsoft.com/office/drawing/2014/main" id="{D29B255C-5371-29BF-8C92-7DAACA0642BB}"/>
+                <a16:creationId xmlns:a16="http://schemas.microsoft.com/office/drawing/2014/main" id="{D29B255C-5371-29BF-8C92-7DAACA0642BB}"/>
               </a:ext>
             </a:extLst>
           </p:cNvPr>
@@ -12393,7 +12306,7 @@
           <p:cNvPr id="10" name="TextBox 9">
             <a:extLst>
               <a:ext uri="{FF2B5EF4-FFF2-40B4-BE49-F238E27FC236}">
-                <a16:creationId xmlns="" xmlns:a16="http://schemas.microsoft.com/office/drawing/2014/main" id="{E0CB3E88-5FF1-7432-A5AC-9804DC2C92A2}"/>
+                <a16:creationId xmlns:a16="http://schemas.microsoft.com/office/drawing/2014/main" id="{E0CB3E88-5FF1-7432-A5AC-9804DC2C92A2}"/>
               </a:ext>
             </a:extLst>
           </p:cNvPr>
@@ -12445,7 +12358,7 @@
           <p:cNvPr id="11" name="TextBox 10">
             <a:extLst>
               <a:ext uri="{FF2B5EF4-FFF2-40B4-BE49-F238E27FC236}">
-                <a16:creationId xmlns="" xmlns:a16="http://schemas.microsoft.com/office/drawing/2014/main" id="{831C92E9-02FD-3257-E422-3DA87210AB5C}"/>
+                <a16:creationId xmlns:a16="http://schemas.microsoft.com/office/drawing/2014/main" id="{831C92E9-02FD-3257-E422-3DA87210AB5C}"/>
               </a:ext>
             </a:extLst>
           </p:cNvPr>
@@ -12480,7 +12393,7 @@
           <p:cNvPr id="12" name="TextBox 11">
             <a:extLst>
               <a:ext uri="{FF2B5EF4-FFF2-40B4-BE49-F238E27FC236}">
-                <a16:creationId xmlns="" xmlns:a16="http://schemas.microsoft.com/office/drawing/2014/main" id="{514A450E-0CB0-32FC-C1A5-529D43BD7BA7}"/>
+                <a16:creationId xmlns:a16="http://schemas.microsoft.com/office/drawing/2014/main" id="{514A450E-0CB0-32FC-C1A5-529D43BD7BA7}"/>
               </a:ext>
             </a:extLst>
           </p:cNvPr>
@@ -12520,7 +12433,7 @@
           <p:cNvPr id="13" name="TextBox 12">
             <a:extLst>
               <a:ext uri="{FF2B5EF4-FFF2-40B4-BE49-F238E27FC236}">
-                <a16:creationId xmlns="" xmlns:a16="http://schemas.microsoft.com/office/drawing/2014/main" id="{4244749F-60E4-461E-2F71-C4E314E47C84}"/>
+                <a16:creationId xmlns:a16="http://schemas.microsoft.com/office/drawing/2014/main" id="{4244749F-60E4-461E-2F71-C4E314E47C84}"/>
               </a:ext>
             </a:extLst>
           </p:cNvPr>
@@ -12560,7 +12473,7 @@
           <p:cNvPr id="14" name="TextBox 13">
             <a:extLst>
               <a:ext uri="{FF2B5EF4-FFF2-40B4-BE49-F238E27FC236}">
-                <a16:creationId xmlns="" xmlns:a16="http://schemas.microsoft.com/office/drawing/2014/main" id="{51CF7B5D-A9AF-9FEB-9028-545CC5A44940}"/>
+                <a16:creationId xmlns:a16="http://schemas.microsoft.com/office/drawing/2014/main" id="{51CF7B5D-A9AF-9FEB-9028-545CC5A44940}"/>
               </a:ext>
             </a:extLst>
           </p:cNvPr>
@@ -12619,7 +12532,7 @@
           <p:cNvPr id="15" name="Rectangle: Folded Corner 14">
             <a:extLst>
               <a:ext uri="{FF2B5EF4-FFF2-40B4-BE49-F238E27FC236}">
-                <a16:creationId xmlns="" xmlns:a16="http://schemas.microsoft.com/office/drawing/2014/main" id="{184A72A6-DD1E-F88A-B54D-9C18FFA02797}"/>
+                <a16:creationId xmlns:a16="http://schemas.microsoft.com/office/drawing/2014/main" id="{184A72A6-DD1E-F88A-B54D-9C18FFA02797}"/>
               </a:ext>
             </a:extLst>
           </p:cNvPr>
@@ -12665,7 +12578,7 @@
           <p:cNvPr id="16" name="TextBox 15">
             <a:extLst>
               <a:ext uri="{FF2B5EF4-FFF2-40B4-BE49-F238E27FC236}">
-                <a16:creationId xmlns="" xmlns:a16="http://schemas.microsoft.com/office/drawing/2014/main" id="{694E23BB-843D-7DF4-0AA2-534CB1530C56}"/>
+                <a16:creationId xmlns:a16="http://schemas.microsoft.com/office/drawing/2014/main" id="{694E23BB-843D-7DF4-0AA2-534CB1530C56}"/>
               </a:ext>
             </a:extLst>
           </p:cNvPr>
@@ -12717,7 +12630,7 @@
           <p:cNvPr id="17" name="TextBox 16">
             <a:extLst>
               <a:ext uri="{FF2B5EF4-FFF2-40B4-BE49-F238E27FC236}">
-                <a16:creationId xmlns="" xmlns:a16="http://schemas.microsoft.com/office/drawing/2014/main" id="{0B169D33-530E-1FE2-AD4C-945D3B1BFDD2}"/>
+                <a16:creationId xmlns:a16="http://schemas.microsoft.com/office/drawing/2014/main" id="{0B169D33-530E-1FE2-AD4C-945D3B1BFDD2}"/>
               </a:ext>
             </a:extLst>
           </p:cNvPr>
@@ -12757,7 +12670,7 @@
           <p:cNvPr id="18" name="Arrow: Down 17">
             <a:extLst>
               <a:ext uri="{FF2B5EF4-FFF2-40B4-BE49-F238E27FC236}">
-                <a16:creationId xmlns="" xmlns:a16="http://schemas.microsoft.com/office/drawing/2014/main" id="{C9565DA2-D493-B756-4421-A8690B9267E0}"/>
+                <a16:creationId xmlns:a16="http://schemas.microsoft.com/office/drawing/2014/main" id="{C9565DA2-D493-B756-4421-A8690B9267E0}"/>
               </a:ext>
             </a:extLst>
           </p:cNvPr>
@@ -12803,7 +12716,7 @@
           <p:cNvPr id="19" name="Rectangle: Folded Corner 18">
             <a:extLst>
               <a:ext uri="{FF2B5EF4-FFF2-40B4-BE49-F238E27FC236}">
-                <a16:creationId xmlns="" xmlns:a16="http://schemas.microsoft.com/office/drawing/2014/main" id="{D9EDB382-FB13-B6A2-FEBA-D8C11C516BC9}"/>
+                <a16:creationId xmlns:a16="http://schemas.microsoft.com/office/drawing/2014/main" id="{D9EDB382-FB13-B6A2-FEBA-D8C11C516BC9}"/>
               </a:ext>
             </a:extLst>
           </p:cNvPr>
@@ -12849,7 +12762,7 @@
           <p:cNvPr id="20" name="TextBox 19">
             <a:extLst>
               <a:ext uri="{FF2B5EF4-FFF2-40B4-BE49-F238E27FC236}">
-                <a16:creationId xmlns="" xmlns:a16="http://schemas.microsoft.com/office/drawing/2014/main" id="{84C178C1-65A4-C3B3-F10D-DC6768BE5D46}"/>
+                <a16:creationId xmlns:a16="http://schemas.microsoft.com/office/drawing/2014/main" id="{84C178C1-65A4-C3B3-F10D-DC6768BE5D46}"/>
               </a:ext>
             </a:extLst>
           </p:cNvPr>
@@ -12888,7 +12801,7 @@
           <p:cNvPr id="22" name="TextBox 21">
             <a:extLst>
               <a:ext uri="{FF2B5EF4-FFF2-40B4-BE49-F238E27FC236}">
-                <a16:creationId xmlns="" xmlns:a16="http://schemas.microsoft.com/office/drawing/2014/main" id="{570C645C-437A-C8F0-F28A-9D326F2A3D18}"/>
+                <a16:creationId xmlns:a16="http://schemas.microsoft.com/office/drawing/2014/main" id="{570C645C-437A-C8F0-F28A-9D326F2A3D18}"/>
               </a:ext>
             </a:extLst>
           </p:cNvPr>
@@ -12928,7 +12841,7 @@
           <p:cNvPr id="21" name="Rectangle: Folded Corner 20">
             <a:extLst>
               <a:ext uri="{FF2B5EF4-FFF2-40B4-BE49-F238E27FC236}">
-                <a16:creationId xmlns="" xmlns:a16="http://schemas.microsoft.com/office/drawing/2014/main" id="{ACBF56C1-B2BC-C4FE-CF79-E594EDBAF26B}"/>
+                <a16:creationId xmlns:a16="http://schemas.microsoft.com/office/drawing/2014/main" id="{ACBF56C1-B2BC-C4FE-CF79-E594EDBAF26B}"/>
               </a:ext>
             </a:extLst>
           </p:cNvPr>
@@ -12974,7 +12887,7 @@
           <p:cNvPr id="23" name="TextBox 22">
             <a:extLst>
               <a:ext uri="{FF2B5EF4-FFF2-40B4-BE49-F238E27FC236}">
-                <a16:creationId xmlns="" xmlns:a16="http://schemas.microsoft.com/office/drawing/2014/main" id="{6802F1EA-F75F-BEF0-39C0-00551CF77A30}"/>
+                <a16:creationId xmlns:a16="http://schemas.microsoft.com/office/drawing/2014/main" id="{6802F1EA-F75F-BEF0-39C0-00551CF77A30}"/>
               </a:ext>
             </a:extLst>
           </p:cNvPr>
@@ -13013,7 +12926,7 @@
           <p:cNvPr id="24" name="TextBox 23">
             <a:extLst>
               <a:ext uri="{FF2B5EF4-FFF2-40B4-BE49-F238E27FC236}">
-                <a16:creationId xmlns="" xmlns:a16="http://schemas.microsoft.com/office/drawing/2014/main" id="{A9B34678-0595-E236-27F2-B280AEFD8587}"/>
+                <a16:creationId xmlns:a16="http://schemas.microsoft.com/office/drawing/2014/main" id="{A9B34678-0595-E236-27F2-B280AEFD8587}"/>
               </a:ext>
             </a:extLst>
           </p:cNvPr>
@@ -13053,7 +12966,7 @@
           <p:cNvPr id="25" name="Rectangle: Folded Corner 24">
             <a:extLst>
               <a:ext uri="{FF2B5EF4-FFF2-40B4-BE49-F238E27FC236}">
-                <a16:creationId xmlns="" xmlns:a16="http://schemas.microsoft.com/office/drawing/2014/main" id="{2C26392E-00A6-B4A6-D909-EC06494D1272}"/>
+                <a16:creationId xmlns:a16="http://schemas.microsoft.com/office/drawing/2014/main" id="{2C26392E-00A6-B4A6-D909-EC06494D1272}"/>
               </a:ext>
             </a:extLst>
           </p:cNvPr>
@@ -13099,7 +13012,7 @@
           <p:cNvPr id="26" name="TextBox 25">
             <a:extLst>
               <a:ext uri="{FF2B5EF4-FFF2-40B4-BE49-F238E27FC236}">
-                <a16:creationId xmlns="" xmlns:a16="http://schemas.microsoft.com/office/drawing/2014/main" id="{BF732DC6-AB15-08C8-0C27-A537D27545FA}"/>
+                <a16:creationId xmlns:a16="http://schemas.microsoft.com/office/drawing/2014/main" id="{BF732DC6-AB15-08C8-0C27-A537D27545FA}"/>
               </a:ext>
             </a:extLst>
           </p:cNvPr>
@@ -13138,7 +13051,7 @@
           <p:cNvPr id="27" name="Rectangle: Folded Corner 26">
             <a:extLst>
               <a:ext uri="{FF2B5EF4-FFF2-40B4-BE49-F238E27FC236}">
-                <a16:creationId xmlns="" xmlns:a16="http://schemas.microsoft.com/office/drawing/2014/main" id="{4FDE4943-1A43-CE60-BF95-ABEF20E16ADB}"/>
+                <a16:creationId xmlns:a16="http://schemas.microsoft.com/office/drawing/2014/main" id="{4FDE4943-1A43-CE60-BF95-ABEF20E16ADB}"/>
               </a:ext>
             </a:extLst>
           </p:cNvPr>
@@ -13184,7 +13097,7 @@
           <p:cNvPr id="28" name="TextBox 27">
             <a:extLst>
               <a:ext uri="{FF2B5EF4-FFF2-40B4-BE49-F238E27FC236}">
-                <a16:creationId xmlns="" xmlns:a16="http://schemas.microsoft.com/office/drawing/2014/main" id="{2B9BD540-01E2-B887-8C4E-629E6AC911EA}"/>
+                <a16:creationId xmlns:a16="http://schemas.microsoft.com/office/drawing/2014/main" id="{2B9BD540-01E2-B887-8C4E-629E6AC911EA}"/>
               </a:ext>
             </a:extLst>
           </p:cNvPr>
@@ -13213,13 +13126,8 @@
             </a:r>
             <a:r>
               <a:rPr lang="en-US" sz="1100" noProof="1"/>
-              <a:t>in </a:t>
-            </a:r>
-            <a:r>
-              <a:rPr lang="en-US" sz="1100" noProof="1" smtClean="0"/>
-              <a:t>Core</a:t>
-            </a:r>
-            <a:endParaRPr lang="en-US" sz="1100" noProof="1"/>
+              <a:t>in Core</a:t>
+            </a:r>
           </a:p>
         </p:txBody>
       </p:sp>
@@ -13228,7 +13136,7 @@
           <p:cNvPr id="29" name="TextBox 28">
             <a:extLst>
               <a:ext uri="{FF2B5EF4-FFF2-40B4-BE49-F238E27FC236}">
-                <a16:creationId xmlns="" xmlns:a16="http://schemas.microsoft.com/office/drawing/2014/main" id="{53573486-397C-444D-2244-FF2F4321FB64}"/>
+                <a16:creationId xmlns:a16="http://schemas.microsoft.com/office/drawing/2014/main" id="{53573486-397C-444D-2244-FF2F4321FB64}"/>
               </a:ext>
             </a:extLst>
           </p:cNvPr>
@@ -13275,7 +13183,7 @@
           <p:cNvPr id="30" name="TextBox 29">
             <a:extLst>
               <a:ext uri="{FF2B5EF4-FFF2-40B4-BE49-F238E27FC236}">
-                <a16:creationId xmlns="" xmlns:a16="http://schemas.microsoft.com/office/drawing/2014/main" id="{E9815C94-44B8-C435-96CD-D15ACF7E849C}"/>
+                <a16:creationId xmlns:a16="http://schemas.microsoft.com/office/drawing/2014/main" id="{E9815C94-44B8-C435-96CD-D15ACF7E849C}"/>
               </a:ext>
             </a:extLst>
           </p:cNvPr>
@@ -13310,7 +13218,7 @@
           <p:cNvPr id="31" name="Arrow: Down 30">
             <a:extLst>
               <a:ext uri="{FF2B5EF4-FFF2-40B4-BE49-F238E27FC236}">
-                <a16:creationId xmlns="" xmlns:a16="http://schemas.microsoft.com/office/drawing/2014/main" id="{52E709B7-19EC-B836-580E-AE7823EA1975}"/>
+                <a16:creationId xmlns:a16="http://schemas.microsoft.com/office/drawing/2014/main" id="{52E709B7-19EC-B836-580E-AE7823EA1975}"/>
               </a:ext>
             </a:extLst>
           </p:cNvPr>
@@ -13356,7 +13264,7 @@
           <p:cNvPr id="32" name="Arrow: Down 31">
             <a:extLst>
               <a:ext uri="{FF2B5EF4-FFF2-40B4-BE49-F238E27FC236}">
-                <a16:creationId xmlns="" xmlns:a16="http://schemas.microsoft.com/office/drawing/2014/main" id="{44581307-A173-312A-049A-484ACCE3CD0A}"/>
+                <a16:creationId xmlns:a16="http://schemas.microsoft.com/office/drawing/2014/main" id="{44581307-A173-312A-049A-484ACCE3CD0A}"/>
               </a:ext>
             </a:extLst>
           </p:cNvPr>
@@ -13432,7 +13340,7 @@
           <p:cNvPr id="2" name="TextBox 1">
             <a:extLst>
               <a:ext uri="{FF2B5EF4-FFF2-40B4-BE49-F238E27FC236}">
-                <a16:creationId xmlns="" xmlns:a16="http://schemas.microsoft.com/office/drawing/2014/main" id="{1CD60342-2F70-F14D-21F6-C2F8D6092854}"/>
+                <a16:creationId xmlns:a16="http://schemas.microsoft.com/office/drawing/2014/main" id="{1CD60342-2F70-F14D-21F6-C2F8D6092854}"/>
               </a:ext>
             </a:extLst>
           </p:cNvPr>
@@ -13467,7 +13375,7 @@
           <p:cNvPr id="9" name="Picture 8">
             <a:extLst>
               <a:ext uri="{FF2B5EF4-FFF2-40B4-BE49-F238E27FC236}">
-                <a16:creationId xmlns="" xmlns:a16="http://schemas.microsoft.com/office/drawing/2014/main" id="{A83D4BF0-D353-0E5D-6E96-094B12D9F4B7}"/>
+                <a16:creationId xmlns:a16="http://schemas.microsoft.com/office/drawing/2014/main" id="{A83D4BF0-D353-0E5D-6E96-094B12D9F4B7}"/>
               </a:ext>
             </a:extLst>
           </p:cNvPr>
@@ -13503,7 +13411,7 @@
           <p:cNvPr id="10" name="Rectangle: Folded Corner 9">
             <a:extLst>
               <a:ext uri="{FF2B5EF4-FFF2-40B4-BE49-F238E27FC236}">
-                <a16:creationId xmlns="" xmlns:a16="http://schemas.microsoft.com/office/drawing/2014/main" id="{9148A524-080A-3589-25B5-31670D1E1AF2}"/>
+                <a16:creationId xmlns:a16="http://schemas.microsoft.com/office/drawing/2014/main" id="{9148A524-080A-3589-25B5-31670D1E1AF2}"/>
               </a:ext>
             </a:extLst>
           </p:cNvPr>
@@ -13549,7 +13457,7 @@
           <p:cNvPr id="15" name="TextBox 14">
             <a:extLst>
               <a:ext uri="{FF2B5EF4-FFF2-40B4-BE49-F238E27FC236}">
-                <a16:creationId xmlns="" xmlns:a16="http://schemas.microsoft.com/office/drawing/2014/main" id="{8D4DB026-640C-C8E1-545F-5CDE3CF78B0D}"/>
+                <a16:creationId xmlns:a16="http://schemas.microsoft.com/office/drawing/2014/main" id="{8D4DB026-640C-C8E1-545F-5CDE3CF78B0D}"/>
               </a:ext>
             </a:extLst>
           </p:cNvPr>
@@ -13588,7 +13496,7 @@
           <p:cNvPr id="16" name="TextBox 15">
             <a:extLst>
               <a:ext uri="{FF2B5EF4-FFF2-40B4-BE49-F238E27FC236}">
-                <a16:creationId xmlns="" xmlns:a16="http://schemas.microsoft.com/office/drawing/2014/main" id="{90D05497-AA99-743E-8BEE-F55D5ED50B1D}"/>
+                <a16:creationId xmlns:a16="http://schemas.microsoft.com/office/drawing/2014/main" id="{90D05497-AA99-743E-8BEE-F55D5ED50B1D}"/>
               </a:ext>
             </a:extLst>
           </p:cNvPr>
@@ -13647,7 +13555,7 @@
           <p:cNvPr id="17" name="Rectangle: Folded Corner 16">
             <a:extLst>
               <a:ext uri="{FF2B5EF4-FFF2-40B4-BE49-F238E27FC236}">
-                <a16:creationId xmlns="" xmlns:a16="http://schemas.microsoft.com/office/drawing/2014/main" id="{455DDDA7-B3E5-300C-A984-D749B36C25E3}"/>
+                <a16:creationId xmlns:a16="http://schemas.microsoft.com/office/drawing/2014/main" id="{455DDDA7-B3E5-300C-A984-D749B36C25E3}"/>
               </a:ext>
             </a:extLst>
           </p:cNvPr>
@@ -13693,7 +13601,7 @@
           <p:cNvPr id="18" name="TextBox 17">
             <a:extLst>
               <a:ext uri="{FF2B5EF4-FFF2-40B4-BE49-F238E27FC236}">
-                <a16:creationId xmlns="" xmlns:a16="http://schemas.microsoft.com/office/drawing/2014/main" id="{0F503983-17BC-ACA8-CE79-F91CB533ADED}"/>
+                <a16:creationId xmlns:a16="http://schemas.microsoft.com/office/drawing/2014/main" id="{0F503983-17BC-ACA8-CE79-F91CB533ADED}"/>
               </a:ext>
             </a:extLst>
           </p:cNvPr>
@@ -13732,7 +13640,7 @@
           <p:cNvPr id="19" name="TextBox 18">
             <a:extLst>
               <a:ext uri="{FF2B5EF4-FFF2-40B4-BE49-F238E27FC236}">
-                <a16:creationId xmlns="" xmlns:a16="http://schemas.microsoft.com/office/drawing/2014/main" id="{2A838C46-FB1F-C5E0-9BFA-B02956414226}"/>
+                <a16:creationId xmlns:a16="http://schemas.microsoft.com/office/drawing/2014/main" id="{2A838C46-FB1F-C5E0-9BFA-B02956414226}"/>
               </a:ext>
             </a:extLst>
           </p:cNvPr>
@@ -13779,7 +13687,7 @@
           <p:cNvPr id="20" name="Rectangle: Folded Corner 19">
             <a:extLst>
               <a:ext uri="{FF2B5EF4-FFF2-40B4-BE49-F238E27FC236}">
-                <a16:creationId xmlns="" xmlns:a16="http://schemas.microsoft.com/office/drawing/2014/main" id="{78127A12-6C27-6237-FBBA-E243F634BA7A}"/>
+                <a16:creationId xmlns:a16="http://schemas.microsoft.com/office/drawing/2014/main" id="{78127A12-6C27-6237-FBBA-E243F634BA7A}"/>
               </a:ext>
             </a:extLst>
           </p:cNvPr>
@@ -13825,7 +13733,7 @@
           <p:cNvPr id="21" name="TextBox 20">
             <a:extLst>
               <a:ext uri="{FF2B5EF4-FFF2-40B4-BE49-F238E27FC236}">
-                <a16:creationId xmlns="" xmlns:a16="http://schemas.microsoft.com/office/drawing/2014/main" id="{CFFAAA98-E3E9-E37A-214C-F49ED4C0E1D3}"/>
+                <a16:creationId xmlns:a16="http://schemas.microsoft.com/office/drawing/2014/main" id="{CFFAAA98-E3E9-E37A-214C-F49ED4C0E1D3}"/>
               </a:ext>
             </a:extLst>
           </p:cNvPr>
@@ -13864,7 +13772,7 @@
           <p:cNvPr id="22" name="TextBox 21">
             <a:extLst>
               <a:ext uri="{FF2B5EF4-FFF2-40B4-BE49-F238E27FC236}">
-                <a16:creationId xmlns="" xmlns:a16="http://schemas.microsoft.com/office/drawing/2014/main" id="{69BCEF57-A076-073F-884E-C5C051001828}"/>
+                <a16:creationId xmlns:a16="http://schemas.microsoft.com/office/drawing/2014/main" id="{69BCEF57-A076-073F-884E-C5C051001828}"/>
               </a:ext>
             </a:extLst>
           </p:cNvPr>
@@ -13911,7 +13819,7 @@
           <p:cNvPr id="23" name="Rectangle: Folded Corner 22">
             <a:extLst>
               <a:ext uri="{FF2B5EF4-FFF2-40B4-BE49-F238E27FC236}">
-                <a16:creationId xmlns="" xmlns:a16="http://schemas.microsoft.com/office/drawing/2014/main" id="{1E5EAF53-9622-2FBC-4E9B-2439733A581F}"/>
+                <a16:creationId xmlns:a16="http://schemas.microsoft.com/office/drawing/2014/main" id="{1E5EAF53-9622-2FBC-4E9B-2439733A581F}"/>
               </a:ext>
             </a:extLst>
           </p:cNvPr>
@@ -13957,7 +13865,7 @@
           <p:cNvPr id="24" name="TextBox 23">
             <a:extLst>
               <a:ext uri="{FF2B5EF4-FFF2-40B4-BE49-F238E27FC236}">
-                <a16:creationId xmlns="" xmlns:a16="http://schemas.microsoft.com/office/drawing/2014/main" id="{4C3BC6B5-8624-35D8-233F-1A9F0AB353EE}"/>
+                <a16:creationId xmlns:a16="http://schemas.microsoft.com/office/drawing/2014/main" id="{4C3BC6B5-8624-35D8-233F-1A9F0AB353EE}"/>
               </a:ext>
             </a:extLst>
           </p:cNvPr>
@@ -13996,7 +13904,7 @@
           <p:cNvPr id="25" name="TextBox 24">
             <a:extLst>
               <a:ext uri="{FF2B5EF4-FFF2-40B4-BE49-F238E27FC236}">
-                <a16:creationId xmlns="" xmlns:a16="http://schemas.microsoft.com/office/drawing/2014/main" id="{F4320286-2A9B-558C-0188-5AB836823991}"/>
+                <a16:creationId xmlns:a16="http://schemas.microsoft.com/office/drawing/2014/main" id="{F4320286-2A9B-558C-0188-5AB836823991}"/>
               </a:ext>
             </a:extLst>
           </p:cNvPr>
@@ -14069,26 +13977,14 @@
           <a:p>
             <a:r>
               <a:rPr lang="en-US" dirty="0"/>
-              <a:t>Find in Open methods / Find in All </a:t>
-            </a:r>
-            <a:r>
-              <a:rPr lang="en-US" dirty="0" smtClean="0"/>
-              <a:t>methods</a:t>
+              <a:t>Find in Open methods / Find in All methods</a:t>
             </a:r>
             <a:br>
-              <a:rPr lang="en-US" dirty="0" smtClean="0"/>
+              <a:rPr lang="en-US" dirty="0"/>
             </a:br>
             <a:r>
               <a:rPr lang="en-US" dirty="0"/>
-              <a:t>Find results displayed in Find and </a:t>
-            </a:r>
-            <a:r>
-              <a:rPr lang="en-US" dirty="0" smtClean="0"/>
-              <a:t>replace </a:t>
-            </a:r>
-            <a:r>
-              <a:rPr lang="en-US" dirty="0"/>
-              <a:t>tab are calling </a:t>
+              <a:t>Find results displayed in Find and replace tab are calling </a:t>
             </a:r>
             <a:r>
               <a:rPr lang="en-US" dirty="0" err="1"/>
@@ -14121,7 +14017,7 @@
           <p:cNvPr id="28" name="TextBox 27">
             <a:extLst>
               <a:ext uri="{FF2B5EF4-FFF2-40B4-BE49-F238E27FC236}">
-                <a16:creationId xmlns="" xmlns:a16="http://schemas.microsoft.com/office/drawing/2014/main" id="{4244749F-60E4-461E-2F71-C4E314E47C84}"/>
+                <a16:creationId xmlns:a16="http://schemas.microsoft.com/office/drawing/2014/main" id="{4244749F-60E4-461E-2F71-C4E314E47C84}"/>
               </a:ext>
             </a:extLst>
           </p:cNvPr>
@@ -14158,13 +14054,8 @@
           <a:p>
             <a:r>
               <a:rPr lang="en-US" noProof="1"/>
-              <a:t>Ctrl-F popup is managed in CtrlrLuaMethodCodeEditor.cpp in UIComponents – CtrlrLua – </a:t>
-            </a:r>
-            <a:r>
-              <a:rPr lang="en-US" noProof="1" smtClean="0"/>
-              <a:t>MethodEditor (similar code but not exactly the same)</a:t>
-            </a:r>
-            <a:endParaRPr lang="en-US" noProof="1"/>
+              <a:t>Ctrl-F popup is managed in CtrlrLuaMethodCodeEditor.cpp in UIComponents – CtrlrLua – MethodEditor (similar code but not exactly the same)</a:t>
+            </a:r>
           </a:p>
         </p:txBody>
       </p:sp>
@@ -14299,7 +14190,7 @@
           <a:lstStyle/>
           <a:p>
             <a:r>
-              <a:rPr lang="en-US" sz="1100" b="1" dirty="0" smtClean="0">
+              <a:rPr lang="en-US" sz="1100" b="1" dirty="0">
                 <a:solidFill>
                   <a:schemeClr val="tx1">
                     <a:lumMod val="75000"/>
@@ -14309,14 +14200,6 @@
               </a:rPr>
               <a:t>Keep methods opened after a match</a:t>
             </a:r>
-            <a:endParaRPr lang="en-US" sz="1100" b="1" dirty="0">
-              <a:solidFill>
-                <a:schemeClr val="tx1">
-                  <a:lumMod val="75000"/>
-                  <a:lumOff val="25000"/>
-                </a:schemeClr>
-              </a:solidFill>
-            </a:endParaRPr>
           </a:p>
         </p:txBody>
       </p:sp>
@@ -14355,7 +14238,7 @@
           <p:cNvPr id="2" name="TextBox 1">
             <a:extLst>
               <a:ext uri="{FF2B5EF4-FFF2-40B4-BE49-F238E27FC236}">
-                <a16:creationId xmlns="" xmlns:a16="http://schemas.microsoft.com/office/drawing/2014/main" id="{1CD60342-2F70-F14D-21F6-C2F8D6092854}"/>
+                <a16:creationId xmlns:a16="http://schemas.microsoft.com/office/drawing/2014/main" id="{1CD60342-2F70-F14D-21F6-C2F8D6092854}"/>
               </a:ext>
             </a:extLst>
           </p:cNvPr>
@@ -14390,7 +14273,7 @@
           <p:cNvPr id="10" name="Rectangle: Folded Corner 9">
             <a:extLst>
               <a:ext uri="{FF2B5EF4-FFF2-40B4-BE49-F238E27FC236}">
-                <a16:creationId xmlns="" xmlns:a16="http://schemas.microsoft.com/office/drawing/2014/main" id="{9148A524-080A-3589-25B5-31670D1E1AF2}"/>
+                <a16:creationId xmlns:a16="http://schemas.microsoft.com/office/drawing/2014/main" id="{9148A524-080A-3589-25B5-31670D1E1AF2}"/>
               </a:ext>
             </a:extLst>
           </p:cNvPr>
@@ -14436,7 +14319,7 @@
           <p:cNvPr id="3" name="TextBox 2">
             <a:extLst>
               <a:ext uri="{FF2B5EF4-FFF2-40B4-BE49-F238E27FC236}">
-                <a16:creationId xmlns="" xmlns:a16="http://schemas.microsoft.com/office/drawing/2014/main" id="{65E89568-8B59-A13A-BEF3-399C5B85182D}"/>
+                <a16:creationId xmlns:a16="http://schemas.microsoft.com/office/drawing/2014/main" id="{65E89568-8B59-A13A-BEF3-399C5B85182D}"/>
               </a:ext>
             </a:extLst>
           </p:cNvPr>
@@ -14475,7 +14358,7 @@
           <p:cNvPr id="4" name="TextBox 3">
             <a:extLst>
               <a:ext uri="{FF2B5EF4-FFF2-40B4-BE49-F238E27FC236}">
-                <a16:creationId xmlns="" xmlns:a16="http://schemas.microsoft.com/office/drawing/2014/main" id="{21A6B996-259A-7A5C-E9FA-AC3FE6E4DB1E}"/>
+                <a16:creationId xmlns:a16="http://schemas.microsoft.com/office/drawing/2014/main" id="{21A6B996-259A-7A5C-E9FA-AC3FE6E4DB1E}"/>
               </a:ext>
             </a:extLst>
           </p:cNvPr>
@@ -14515,7 +14398,7 @@
           <p:cNvPr id="6" name="Picture 5">
             <a:extLst>
               <a:ext uri="{FF2B5EF4-FFF2-40B4-BE49-F238E27FC236}">
-                <a16:creationId xmlns="" xmlns:a16="http://schemas.microsoft.com/office/drawing/2014/main" id="{74CAFF97-DA50-1058-6845-340335E14C35}"/>
+                <a16:creationId xmlns:a16="http://schemas.microsoft.com/office/drawing/2014/main" id="{74CAFF97-DA50-1058-6845-340335E14C35}"/>
               </a:ext>
             </a:extLst>
           </p:cNvPr>
@@ -14545,7 +14428,7 @@
           <p:cNvPr id="7" name="Rectangle: Folded Corner 6">
             <a:extLst>
               <a:ext uri="{FF2B5EF4-FFF2-40B4-BE49-F238E27FC236}">
-                <a16:creationId xmlns="" xmlns:a16="http://schemas.microsoft.com/office/drawing/2014/main" id="{599BF657-8601-1E97-CCD2-9DD5EDC0C30F}"/>
+                <a16:creationId xmlns:a16="http://schemas.microsoft.com/office/drawing/2014/main" id="{599BF657-8601-1E97-CCD2-9DD5EDC0C30F}"/>
               </a:ext>
             </a:extLst>
           </p:cNvPr>
@@ -14591,7 +14474,7 @@
           <p:cNvPr id="8" name="TextBox 7">
             <a:extLst>
               <a:ext uri="{FF2B5EF4-FFF2-40B4-BE49-F238E27FC236}">
-                <a16:creationId xmlns="" xmlns:a16="http://schemas.microsoft.com/office/drawing/2014/main" id="{611D8B30-A039-E23A-5760-CD521ECBB35F}"/>
+                <a16:creationId xmlns:a16="http://schemas.microsoft.com/office/drawing/2014/main" id="{611D8B30-A039-E23A-5760-CD521ECBB35F}"/>
               </a:ext>
             </a:extLst>
           </p:cNvPr>
@@ -14630,7 +14513,7 @@
           <p:cNvPr id="11" name="TextBox 10">
             <a:extLst>
               <a:ext uri="{FF2B5EF4-FFF2-40B4-BE49-F238E27FC236}">
-                <a16:creationId xmlns="" xmlns:a16="http://schemas.microsoft.com/office/drawing/2014/main" id="{58EF5191-7D88-6249-2C9F-3CF9358D5741}"/>
+                <a16:creationId xmlns:a16="http://schemas.microsoft.com/office/drawing/2014/main" id="{58EF5191-7D88-6249-2C9F-3CF9358D5741}"/>
               </a:ext>
             </a:extLst>
           </p:cNvPr>
@@ -14670,7 +14553,7 @@
           <p:cNvPr id="5" name="Rectangle: Folded Corner 4">
             <a:extLst>
               <a:ext uri="{FF2B5EF4-FFF2-40B4-BE49-F238E27FC236}">
-                <a16:creationId xmlns="" xmlns:a16="http://schemas.microsoft.com/office/drawing/2014/main" id="{E6337545-D488-87FE-03BA-9812957AF536}"/>
+                <a16:creationId xmlns:a16="http://schemas.microsoft.com/office/drawing/2014/main" id="{E6337545-D488-87FE-03BA-9812957AF536}"/>
               </a:ext>
             </a:extLst>
           </p:cNvPr>
@@ -14716,7 +14599,7 @@
           <p:cNvPr id="9" name="TextBox 8">
             <a:extLst>
               <a:ext uri="{FF2B5EF4-FFF2-40B4-BE49-F238E27FC236}">
-                <a16:creationId xmlns="" xmlns:a16="http://schemas.microsoft.com/office/drawing/2014/main" id="{5DC8856F-9621-57B5-F900-5EAD86F07F2B}"/>
+                <a16:creationId xmlns:a16="http://schemas.microsoft.com/office/drawing/2014/main" id="{5DC8856F-9621-57B5-F900-5EAD86F07F2B}"/>
               </a:ext>
             </a:extLst>
           </p:cNvPr>
@@ -14755,7 +14638,7 @@
           <p:cNvPr id="13" name="Picture 12" descr="A screenshot of a computer&#10;&#10;Description automatically generated">
             <a:extLst>
               <a:ext uri="{FF2B5EF4-FFF2-40B4-BE49-F238E27FC236}">
-                <a16:creationId xmlns="" xmlns:a16="http://schemas.microsoft.com/office/drawing/2014/main" id="{1E278D4B-2AAF-2763-46ED-2D457CF46DD7}"/>
+                <a16:creationId xmlns:a16="http://schemas.microsoft.com/office/drawing/2014/main" id="{1E278D4B-2AAF-2763-46ED-2D457CF46DD7}"/>
               </a:ext>
             </a:extLst>
           </p:cNvPr>
@@ -14791,7 +14674,7 @@
           <p:cNvPr id="14" name="Arrow: Down 13">
             <a:extLst>
               <a:ext uri="{FF2B5EF4-FFF2-40B4-BE49-F238E27FC236}">
-                <a16:creationId xmlns="" xmlns:a16="http://schemas.microsoft.com/office/drawing/2014/main" id="{94061C9E-CBF6-5575-B048-A50F677BAC5D}"/>
+                <a16:creationId xmlns:a16="http://schemas.microsoft.com/office/drawing/2014/main" id="{94061C9E-CBF6-5575-B048-A50F677BAC5D}"/>
               </a:ext>
             </a:extLst>
           </p:cNvPr>
@@ -14837,7 +14720,7 @@
           <p:cNvPr id="12" name="TextBox 11">
             <a:extLst>
               <a:ext uri="{FF2B5EF4-FFF2-40B4-BE49-F238E27FC236}">
-                <a16:creationId xmlns="" xmlns:a16="http://schemas.microsoft.com/office/drawing/2014/main" id="{F62B3492-BEA9-5797-EE2C-0CE580D69E7C}"/>
+                <a16:creationId xmlns:a16="http://schemas.microsoft.com/office/drawing/2014/main" id="{F62B3492-BEA9-5797-EE2C-0CE580D69E7C}"/>
               </a:ext>
             </a:extLst>
           </p:cNvPr>
@@ -14876,7 +14759,7 @@
           <p:cNvPr id="15" name="TextBox 14">
             <a:extLst>
               <a:ext uri="{FF2B5EF4-FFF2-40B4-BE49-F238E27FC236}">
-                <a16:creationId xmlns="" xmlns:a16="http://schemas.microsoft.com/office/drawing/2014/main" id="{51A252D2-830C-C7EE-1048-0DE8F031C28D}"/>
+                <a16:creationId xmlns:a16="http://schemas.microsoft.com/office/drawing/2014/main" id="{51A252D2-830C-C7EE-1048-0DE8F031C28D}"/>
               </a:ext>
             </a:extLst>
           </p:cNvPr>
@@ -14924,7 +14807,7 @@
           <p:cNvPr id="16" name="Rectangle: Folded Corner 15">
             <a:extLst>
               <a:ext uri="{FF2B5EF4-FFF2-40B4-BE49-F238E27FC236}">
-                <a16:creationId xmlns="" xmlns:a16="http://schemas.microsoft.com/office/drawing/2014/main" id="{6C2FF4BC-5892-E236-6846-62EF97A1796D}"/>
+                <a16:creationId xmlns:a16="http://schemas.microsoft.com/office/drawing/2014/main" id="{6C2FF4BC-5892-E236-6846-62EF97A1796D}"/>
               </a:ext>
             </a:extLst>
           </p:cNvPr>
@@ -14970,7 +14853,7 @@
           <p:cNvPr id="18" name="TextBox 17">
             <a:extLst>
               <a:ext uri="{FF2B5EF4-FFF2-40B4-BE49-F238E27FC236}">
-                <a16:creationId xmlns="" xmlns:a16="http://schemas.microsoft.com/office/drawing/2014/main" id="{B82615D7-D404-6564-D351-6E0889F45C12}"/>
+                <a16:creationId xmlns:a16="http://schemas.microsoft.com/office/drawing/2014/main" id="{B82615D7-D404-6564-D351-6E0889F45C12}"/>
               </a:ext>
             </a:extLst>
           </p:cNvPr>
@@ -15235,7 +15118,7 @@
           <p:cNvPr id="2" name="TextBox 1">
             <a:extLst>
               <a:ext uri="{FF2B5EF4-FFF2-40B4-BE49-F238E27FC236}">
-                <a16:creationId xmlns="" xmlns:a16="http://schemas.microsoft.com/office/drawing/2014/main" id="{1CD60342-2F70-F14D-21F6-C2F8D6092854}"/>
+                <a16:creationId xmlns:a16="http://schemas.microsoft.com/office/drawing/2014/main" id="{1CD60342-2F70-F14D-21F6-C2F8D6092854}"/>
               </a:ext>
             </a:extLst>
           </p:cNvPr>
@@ -15260,13 +15143,8 @@
           <a:p>
             <a:r>
               <a:rPr lang="en-US" dirty="0"/>
-              <a:t>Lua editor </a:t>
-            </a:r>
-            <a:r>
-              <a:rPr lang="en-US" dirty="0" smtClean="0"/>
-              <a:t>– Code editor</a:t>
-            </a:r>
-            <a:endParaRPr lang="en-US" dirty="0"/>
+              <a:t>Lua editor – Code editor</a:t>
+            </a:r>
           </a:p>
         </p:txBody>
       </p:sp>
@@ -15275,7 +15153,7 @@
           <p:cNvPr id="10" name="Rectangle: Folded Corner 9">
             <a:extLst>
               <a:ext uri="{FF2B5EF4-FFF2-40B4-BE49-F238E27FC236}">
-                <a16:creationId xmlns="" xmlns:a16="http://schemas.microsoft.com/office/drawing/2014/main" id="{9148A524-080A-3589-25B5-31670D1E1AF2}"/>
+                <a16:creationId xmlns:a16="http://schemas.microsoft.com/office/drawing/2014/main" id="{9148A524-080A-3589-25B5-31670D1E1AF2}"/>
               </a:ext>
             </a:extLst>
           </p:cNvPr>
@@ -15321,7 +15199,7 @@
           <p:cNvPr id="3" name="TextBox 2">
             <a:extLst>
               <a:ext uri="{FF2B5EF4-FFF2-40B4-BE49-F238E27FC236}">
-                <a16:creationId xmlns="" xmlns:a16="http://schemas.microsoft.com/office/drawing/2014/main" id="{65E89568-8B59-A13A-BEF3-399C5B85182D}"/>
+                <a16:creationId xmlns:a16="http://schemas.microsoft.com/office/drawing/2014/main" id="{65E89568-8B59-A13A-BEF3-399C5B85182D}"/>
               </a:ext>
             </a:extLst>
           </p:cNvPr>
@@ -15360,7 +15238,7 @@
           <p:cNvPr id="4" name="TextBox 3">
             <a:extLst>
               <a:ext uri="{FF2B5EF4-FFF2-40B4-BE49-F238E27FC236}">
-                <a16:creationId xmlns="" xmlns:a16="http://schemas.microsoft.com/office/drawing/2014/main" id="{21A6B996-259A-7A5C-E9FA-AC3FE6E4DB1E}"/>
+                <a16:creationId xmlns:a16="http://schemas.microsoft.com/office/drawing/2014/main" id="{21A6B996-259A-7A5C-E9FA-AC3FE6E4DB1E}"/>
               </a:ext>
             </a:extLst>
           </p:cNvPr>
@@ -15389,23 +15267,22 @@
           <a:lstStyle/>
           <a:p>
             <a:r>
-              <a:rPr lang="en-US" sz="1100" noProof="1" smtClean="0"/>
+              <a:rPr lang="en-US" sz="1100" noProof="1"/>
               <a:t>All actions occuring in the code editor</a:t>
             </a:r>
           </a:p>
           <a:p>
             <a:r>
-              <a:rPr lang="en-US" sz="1100" noProof="1" smtClean="0"/>
+              <a:rPr lang="en-US" sz="1100" noProof="1"/>
               <a:t>So, also contains the Ctrl-F, Ctrl-G code</a:t>
             </a:r>
             <a:br>
-              <a:rPr lang="en-US" sz="1100" noProof="1" smtClean="0"/>
+              <a:rPr lang="en-US" sz="1100" noProof="1"/>
             </a:br>
             <a:r>
-              <a:rPr lang="en-US" sz="1100" noProof="1" smtClean="0"/>
+              <a:rPr lang="en-US" sz="1100" noProof="1"/>
               <a:t>The Find code is repeated from the Find and Replace tab but here applied to the Find popup.</a:t>
             </a:r>
-            <a:endParaRPr lang="en-US" sz="1100" noProof="1"/>
           </a:p>
         </p:txBody>
       </p:sp>
@@ -15444,7 +15321,7 @@
           <p:cNvPr id="2" name="TextBox 1">
             <a:extLst>
               <a:ext uri="{FF2B5EF4-FFF2-40B4-BE49-F238E27FC236}">
-                <a16:creationId xmlns="" xmlns:a16="http://schemas.microsoft.com/office/drawing/2014/main" id="{1CD60342-2F70-F14D-21F6-C2F8D6092854}"/>
+                <a16:creationId xmlns:a16="http://schemas.microsoft.com/office/drawing/2014/main" id="{1CD60342-2F70-F14D-21F6-C2F8D6092854}"/>
               </a:ext>
             </a:extLst>
           </p:cNvPr>
@@ -15479,7 +15356,7 @@
           <p:cNvPr id="3" name="Rectangle: Folded Corner 2">
             <a:extLst>
               <a:ext uri="{FF2B5EF4-FFF2-40B4-BE49-F238E27FC236}">
-                <a16:creationId xmlns="" xmlns:a16="http://schemas.microsoft.com/office/drawing/2014/main" id="{71489425-E604-DED0-0EC3-234871AA7B66}"/>
+                <a16:creationId xmlns:a16="http://schemas.microsoft.com/office/drawing/2014/main" id="{71489425-E604-DED0-0EC3-234871AA7B66}"/>
               </a:ext>
             </a:extLst>
           </p:cNvPr>
@@ -15525,7 +15402,7 @@
           <p:cNvPr id="4" name="TextBox 3">
             <a:extLst>
               <a:ext uri="{FF2B5EF4-FFF2-40B4-BE49-F238E27FC236}">
-                <a16:creationId xmlns="" xmlns:a16="http://schemas.microsoft.com/office/drawing/2014/main" id="{7E88EFD6-127A-381B-555B-327C19DC289B}"/>
+                <a16:creationId xmlns:a16="http://schemas.microsoft.com/office/drawing/2014/main" id="{7E88EFD6-127A-381B-555B-327C19DC289B}"/>
               </a:ext>
             </a:extLst>
           </p:cNvPr>
@@ -15564,7 +15441,7 @@
           <p:cNvPr id="5" name="Rectangle: Folded Corner 4">
             <a:extLst>
               <a:ext uri="{FF2B5EF4-FFF2-40B4-BE49-F238E27FC236}">
-                <a16:creationId xmlns="" xmlns:a16="http://schemas.microsoft.com/office/drawing/2014/main" id="{4914F5C6-EBFC-CE22-D774-C1421C8246EA}"/>
+                <a16:creationId xmlns:a16="http://schemas.microsoft.com/office/drawing/2014/main" id="{4914F5C6-EBFC-CE22-D774-C1421C8246EA}"/>
               </a:ext>
             </a:extLst>
           </p:cNvPr>
@@ -15610,7 +15487,7 @@
           <p:cNvPr id="6" name="TextBox 5">
             <a:extLst>
               <a:ext uri="{FF2B5EF4-FFF2-40B4-BE49-F238E27FC236}">
-                <a16:creationId xmlns="" xmlns:a16="http://schemas.microsoft.com/office/drawing/2014/main" id="{C65147B6-9927-3FBC-0ACF-10B922E35875}"/>
+                <a16:creationId xmlns:a16="http://schemas.microsoft.com/office/drawing/2014/main" id="{C65147B6-9927-3FBC-0ACF-10B922E35875}"/>
               </a:ext>
             </a:extLst>
           </p:cNvPr>
@@ -15649,7 +15526,7 @@
           <p:cNvPr id="7" name="TextBox 6">
             <a:extLst>
               <a:ext uri="{FF2B5EF4-FFF2-40B4-BE49-F238E27FC236}">
-                <a16:creationId xmlns="" xmlns:a16="http://schemas.microsoft.com/office/drawing/2014/main" id="{1146AE3F-9B4E-C420-3546-B82209736C42}"/>
+                <a16:creationId xmlns:a16="http://schemas.microsoft.com/office/drawing/2014/main" id="{1146AE3F-9B4E-C420-3546-B82209736C42}"/>
               </a:ext>
             </a:extLst>
           </p:cNvPr>
@@ -15823,7 +15700,7 @@
           <p:cNvPr id="2" name="TextBox 1">
             <a:extLst>
               <a:ext uri="{FF2B5EF4-FFF2-40B4-BE49-F238E27FC236}">
-                <a16:creationId xmlns="" xmlns:a16="http://schemas.microsoft.com/office/drawing/2014/main" id="{D36CBA16-62F4-09F7-01DC-CF73E21DC78C}"/>
+                <a16:creationId xmlns:a16="http://schemas.microsoft.com/office/drawing/2014/main" id="{D36CBA16-62F4-09F7-01DC-CF73E21DC78C}"/>
               </a:ext>
             </a:extLst>
           </p:cNvPr>
@@ -15858,7 +15735,7 @@
           <p:cNvPr id="11" name="TextBox 10">
             <a:extLst>
               <a:ext uri="{FF2B5EF4-FFF2-40B4-BE49-F238E27FC236}">
-                <a16:creationId xmlns="" xmlns:a16="http://schemas.microsoft.com/office/drawing/2014/main" id="{C32AE7AC-F2A5-ED40-EA4C-87259BD82E0E}"/>
+                <a16:creationId xmlns:a16="http://schemas.microsoft.com/office/drawing/2014/main" id="{C32AE7AC-F2A5-ED40-EA4C-87259BD82E0E}"/>
               </a:ext>
             </a:extLst>
           </p:cNvPr>
@@ -15953,7 +15830,7 @@
           <p:cNvPr id="14" name="TextBox 13">
             <a:extLst>
               <a:ext uri="{FF2B5EF4-FFF2-40B4-BE49-F238E27FC236}">
-                <a16:creationId xmlns="" xmlns:a16="http://schemas.microsoft.com/office/drawing/2014/main" id="{E0D4D905-2B2A-D8FE-7506-76121A22C4EA}"/>
+                <a16:creationId xmlns:a16="http://schemas.microsoft.com/office/drawing/2014/main" id="{E0D4D905-2B2A-D8FE-7506-76121A22C4EA}"/>
               </a:ext>
             </a:extLst>
           </p:cNvPr>
@@ -16017,7 +15894,7 @@
           <p:cNvPr id="15" name="Arrow: Down 14">
             <a:extLst>
               <a:ext uri="{FF2B5EF4-FFF2-40B4-BE49-F238E27FC236}">
-                <a16:creationId xmlns="" xmlns:a16="http://schemas.microsoft.com/office/drawing/2014/main" id="{F5B1087F-81C9-BD1C-77BA-378141F76502}"/>
+                <a16:creationId xmlns:a16="http://schemas.microsoft.com/office/drawing/2014/main" id="{F5B1087F-81C9-BD1C-77BA-378141F76502}"/>
               </a:ext>
             </a:extLst>
           </p:cNvPr>
@@ -16063,7 +15940,7 @@
           <p:cNvPr id="17" name="TextBox 16">
             <a:extLst>
               <a:ext uri="{FF2B5EF4-FFF2-40B4-BE49-F238E27FC236}">
-                <a16:creationId xmlns="" xmlns:a16="http://schemas.microsoft.com/office/drawing/2014/main" id="{7EF78761-8CB2-D6DA-8545-995D453FFF97}"/>
+                <a16:creationId xmlns:a16="http://schemas.microsoft.com/office/drawing/2014/main" id="{7EF78761-8CB2-D6DA-8545-995D453FFF97}"/>
               </a:ext>
             </a:extLst>
           </p:cNvPr>
@@ -16110,7 +15987,7 @@
           <p:cNvPr id="4" name="Picture 3">
             <a:extLst>
               <a:ext uri="{FF2B5EF4-FFF2-40B4-BE49-F238E27FC236}">
-                <a16:creationId xmlns="" xmlns:a16="http://schemas.microsoft.com/office/drawing/2014/main" id="{D92292B9-6ADD-18F6-65D2-A48CDAAFF68C}"/>
+                <a16:creationId xmlns:a16="http://schemas.microsoft.com/office/drawing/2014/main" id="{D92292B9-6ADD-18F6-65D2-A48CDAAFF68C}"/>
               </a:ext>
             </a:extLst>
           </p:cNvPr>
@@ -16147,7 +16024,7 @@
           <p:cNvPr id="7" name="TextBox 6">
             <a:extLst>
               <a:ext uri="{FF2B5EF4-FFF2-40B4-BE49-F238E27FC236}">
-                <a16:creationId xmlns="" xmlns:a16="http://schemas.microsoft.com/office/drawing/2014/main" id="{95ABD958-6B0A-FC2E-DA91-31A4FA1BB385}"/>
+                <a16:creationId xmlns:a16="http://schemas.microsoft.com/office/drawing/2014/main" id="{95ABD958-6B0A-FC2E-DA91-31A4FA1BB385}"/>
               </a:ext>
             </a:extLst>
           </p:cNvPr>
@@ -16187,7 +16064,7 @@
           <p:cNvPr id="8" name="TextBox 7">
             <a:extLst>
               <a:ext uri="{FF2B5EF4-FFF2-40B4-BE49-F238E27FC236}">
-                <a16:creationId xmlns="" xmlns:a16="http://schemas.microsoft.com/office/drawing/2014/main" id="{1E6F13E6-CE1F-9777-9C88-BACFAB64B4A1}"/>
+                <a16:creationId xmlns:a16="http://schemas.microsoft.com/office/drawing/2014/main" id="{1E6F13E6-CE1F-9777-9C88-BACFAB64B4A1}"/>
               </a:ext>
             </a:extLst>
           </p:cNvPr>
@@ -16227,7 +16104,7 @@
           <p:cNvPr id="10" name="Picture 9">
             <a:extLst>
               <a:ext uri="{FF2B5EF4-FFF2-40B4-BE49-F238E27FC236}">
-                <a16:creationId xmlns="" xmlns:a16="http://schemas.microsoft.com/office/drawing/2014/main" id="{856316BC-9F36-5D14-FA42-9099478B4817}"/>
+                <a16:creationId xmlns:a16="http://schemas.microsoft.com/office/drawing/2014/main" id="{856316BC-9F36-5D14-FA42-9099478B4817}"/>
               </a:ext>
             </a:extLst>
           </p:cNvPr>
@@ -16294,7 +16171,7 @@
           <p:cNvPr id="2" name="TextBox 1">
             <a:extLst>
               <a:ext uri="{FF2B5EF4-FFF2-40B4-BE49-F238E27FC236}">
-                <a16:creationId xmlns="" xmlns:a16="http://schemas.microsoft.com/office/drawing/2014/main" id="{1CD60342-2F70-F14D-21F6-C2F8D6092854}"/>
+                <a16:creationId xmlns:a16="http://schemas.microsoft.com/office/drawing/2014/main" id="{1CD60342-2F70-F14D-21F6-C2F8D6092854}"/>
               </a:ext>
             </a:extLst>
           </p:cNvPr>
@@ -16304,7 +16181,7 @@
         <p:spPr>
           <a:xfrm>
             <a:off x="550506" y="335902"/>
-            <a:ext cx="1831592" cy="369332"/>
+            <a:ext cx="2963632" cy="369332"/>
           </a:xfrm>
           <a:prstGeom prst="rect">
             <a:avLst/>
@@ -16319,7 +16196,7 @@
           <a:p>
             <a:r>
               <a:rPr lang="en-US" dirty="0"/>
-              <a:t>Open questions...</a:t>
+              <a:t>Exporting and saving panels...</a:t>
             </a:r>
           </a:p>
         </p:txBody>
@@ -16329,7 +16206,7 @@
           <p:cNvPr id="3" name="Rectangle: Folded Corner 2">
             <a:extLst>
               <a:ext uri="{FF2B5EF4-FFF2-40B4-BE49-F238E27FC236}">
-                <a16:creationId xmlns="" xmlns:a16="http://schemas.microsoft.com/office/drawing/2014/main" id="{71489425-E604-DED0-0EC3-234871AA7B66}"/>
+                <a16:creationId xmlns:a16="http://schemas.microsoft.com/office/drawing/2014/main" id="{71489425-E604-DED0-0EC3-234871AA7B66}"/>
               </a:ext>
             </a:extLst>
           </p:cNvPr>
@@ -16375,7 +16252,7 @@
           <p:cNvPr id="4" name="TextBox 3">
             <a:extLst>
               <a:ext uri="{FF2B5EF4-FFF2-40B4-BE49-F238E27FC236}">
-                <a16:creationId xmlns="" xmlns:a16="http://schemas.microsoft.com/office/drawing/2014/main" id="{7E88EFD6-127A-381B-555B-327C19DC289B}"/>
+                <a16:creationId xmlns:a16="http://schemas.microsoft.com/office/drawing/2014/main" id="{7E88EFD6-127A-381B-555B-327C19DC289B}"/>
               </a:ext>
             </a:extLst>
           </p:cNvPr>
@@ -16385,7 +16262,7 @@
         <p:spPr>
           <a:xfrm>
             <a:off x="858416" y="895562"/>
-            <a:ext cx="2610010" cy="261610"/>
+            <a:ext cx="2999539" cy="261610"/>
           </a:xfrm>
           <a:prstGeom prst="rect">
             <a:avLst/>
@@ -16400,15 +16277,15 @@
           <a:p>
             <a:r>
               <a:rPr lang="en-US" sz="1100" i="1" dirty="0"/>
-              <a:t>CtrlrValueTreeEditor.cpp </a:t>
+              <a:t>CtrlrPanelFileOperations.cpp </a:t>
             </a:r>
             <a:r>
               <a:rPr lang="en-US" sz="1100" dirty="0"/>
-              <a:t>in </a:t>
+              <a:t>in Core - </a:t>
             </a:r>
             <a:r>
               <a:rPr lang="en-US" sz="1100" dirty="0" err="1"/>
-              <a:t>UIComponents</a:t>
+              <a:t>CtrlrPanel</a:t>
             </a:r>
             <a:endParaRPr lang="en-US" sz="1100" dirty="0"/>
           </a:p>
@@ -16419,7 +16296,7 @@
           <p:cNvPr id="5" name="Rectangle: Folded Corner 4">
             <a:extLst>
               <a:ext uri="{FF2B5EF4-FFF2-40B4-BE49-F238E27FC236}">
-                <a16:creationId xmlns="" xmlns:a16="http://schemas.microsoft.com/office/drawing/2014/main" id="{4914F5C6-EBFC-CE22-D774-C1421C8246EA}"/>
+                <a16:creationId xmlns:a16="http://schemas.microsoft.com/office/drawing/2014/main" id="{4914F5C6-EBFC-CE22-D774-C1421C8246EA}"/>
               </a:ext>
             </a:extLst>
           </p:cNvPr>
@@ -16465,7 +16342,7 @@
           <p:cNvPr id="6" name="TextBox 5">
             <a:extLst>
               <a:ext uri="{FF2B5EF4-FFF2-40B4-BE49-F238E27FC236}">
-                <a16:creationId xmlns="" xmlns:a16="http://schemas.microsoft.com/office/drawing/2014/main" id="{C65147B6-9927-3FBC-0ACF-10B922E35875}"/>
+                <a16:creationId xmlns:a16="http://schemas.microsoft.com/office/drawing/2014/main" id="{C65147B6-9927-3FBC-0ACF-10B922E35875}"/>
               </a:ext>
             </a:extLst>
           </p:cNvPr>
@@ -16475,7 +16352,7 @@
         <p:spPr>
           <a:xfrm>
             <a:off x="858416" y="1505162"/>
-            <a:ext cx="643125" cy="261610"/>
+            <a:ext cx="2608406" cy="261610"/>
           </a:xfrm>
           <a:prstGeom prst="rect">
             <a:avLst/>
@@ -16490,6 +16367,1732 @@
           <a:p>
             <a:r>
               <a:rPr lang="en-US" sz="1100" i="1" dirty="0"/>
+              <a:t>Different destinations for exports </a:t>
+            </a:r>
+            <a:r>
+              <a:rPr lang="en-US" sz="1100" dirty="0"/>
+              <a:t>in Native</a:t>
+            </a:r>
+          </a:p>
+        </p:txBody>
+      </p:sp>
+      <p:sp>
+        <p:nvSpPr>
+          <p:cNvPr id="9" name="TextBox 10">
+            <a:extLst>
+              <a:ext uri="{FF2B5EF4-FFF2-40B4-BE49-F238E27FC236}">
+                <a16:creationId xmlns:a16="http://schemas.microsoft.com/office/drawing/2014/main" id="{D5F77DB5-A908-5B9B-6ED5-DA9FC642CB43}"/>
+              </a:ext>
+            </a:extLst>
+          </p:cNvPr>
+          <p:cNvSpPr txBox="1"/>
+          <p:nvPr/>
+        </p:nvSpPr>
+        <p:spPr>
+          <a:xfrm>
+            <a:off x="3857955" y="1496008"/>
+            <a:ext cx="4010348" cy="261610"/>
+          </a:xfrm>
+          <a:prstGeom prst="rect">
+            <a:avLst/>
+          </a:prstGeom>
+          <a:solidFill>
+            <a:schemeClr val="accent6">
+              <a:lumMod val="40000"/>
+              <a:lumOff val="60000"/>
+            </a:schemeClr>
+          </a:solidFill>
+        </p:spPr>
+        <p:txBody>
+          <a:bodyPr wrap="none" rtlCol="0">
+            <a:spAutoFit/>
+          </a:bodyPr>
+          <a:lstStyle>
+            <a:defPPr>
+              <a:defRPr lang="en-US"/>
+            </a:defPPr>
+            <a:lvl1pPr>
+              <a:defRPr sz="1100"/>
+            </a:lvl1pPr>
+          </a:lstStyle>
+          <a:p>
+            <a:r>
+              <a:rPr lang="en-US" noProof="1"/>
+              <a:t>VST3, AU</a:t>
+            </a:r>
+          </a:p>
+        </p:txBody>
+      </p:sp>
+      <p:sp>
+        <p:nvSpPr>
+          <p:cNvPr id="11" name="TextBox 7">
+            <a:extLst>
+              <a:ext uri="{FF2B5EF4-FFF2-40B4-BE49-F238E27FC236}">
+                <a16:creationId xmlns:a16="http://schemas.microsoft.com/office/drawing/2014/main" id="{D350051E-514E-F660-AC0E-8C1E6EAA173E}"/>
+              </a:ext>
+            </a:extLst>
+          </p:cNvPr>
+          <p:cNvSpPr txBox="1"/>
+          <p:nvPr/>
+        </p:nvSpPr>
+        <p:spPr>
+          <a:xfrm>
+            <a:off x="858416" y="1970327"/>
+            <a:ext cx="718466" cy="600164"/>
+          </a:xfrm>
+          <a:prstGeom prst="rect">
+            <a:avLst/>
+          </a:prstGeom>
+          <a:noFill/>
+        </p:spPr>
+        <p:txBody>
+          <a:bodyPr wrap="none" rtlCol="0">
+            <a:spAutoFit/>
+          </a:bodyPr>
+          <a:lstStyle/>
+          <a:p>
+            <a:r>
+              <a:rPr lang="en-US" sz="1100" noProof="1"/>
+              <a:t>Windows</a:t>
+            </a:r>
+          </a:p>
+          <a:p>
+            <a:r>
+              <a:rPr lang="en-US" sz="1100" noProof="1"/>
+              <a:t>Mac</a:t>
+            </a:r>
+          </a:p>
+          <a:p>
+            <a:r>
+              <a:rPr lang="en-US" sz="1100" noProof="1"/>
+              <a:t>Linux</a:t>
+            </a:r>
+          </a:p>
+        </p:txBody>
+      </p:sp>
+      <p:sp>
+        <p:nvSpPr>
+          <p:cNvPr id="15" name="TextBox 10">
+            <a:extLst>
+              <a:ext uri="{FF2B5EF4-FFF2-40B4-BE49-F238E27FC236}">
+                <a16:creationId xmlns:a16="http://schemas.microsoft.com/office/drawing/2014/main" id="{70A15C1B-1DA9-D3B3-A281-10784580A8BD}"/>
+              </a:ext>
+            </a:extLst>
+          </p:cNvPr>
+          <p:cNvSpPr txBox="1"/>
+          <p:nvPr/>
+        </p:nvSpPr>
+        <p:spPr>
+          <a:xfrm>
+            <a:off x="1811115" y="1970327"/>
+            <a:ext cx="4010348" cy="600164"/>
+          </a:xfrm>
+          <a:prstGeom prst="rect">
+            <a:avLst/>
+          </a:prstGeom>
+          <a:solidFill>
+            <a:schemeClr val="accent1">
+              <a:lumMod val="40000"/>
+              <a:lumOff val="60000"/>
+            </a:schemeClr>
+          </a:solidFill>
+        </p:spPr>
+        <p:txBody>
+          <a:bodyPr wrap="square" rtlCol="0">
+            <a:spAutoFit/>
+          </a:bodyPr>
+          <a:lstStyle/>
+          <a:p>
+            <a:r>
+              <a:rPr lang="en-US" sz="1100" noProof="1"/>
+              <a:t>The current CtrlrX VST3 has its properties coming from Projucer</a:t>
+            </a:r>
+          </a:p>
+          <a:p>
+            <a:r>
+              <a:rPr lang="en-US" sz="1100" noProof="1"/>
+              <a:t>Export a VST3 based on the current VST3 plugin version of CtrlrX</a:t>
+            </a:r>
+          </a:p>
+          <a:p>
+            <a:r>
+              <a:rPr lang="en-US" sz="1100" noProof="1"/>
+              <a:t>Replace key properties by the one of the current panel</a:t>
+            </a:r>
+          </a:p>
+        </p:txBody>
+      </p:sp>
+      <p:sp>
+        <p:nvSpPr>
+          <p:cNvPr id="19" name="ZoneTexte 18">
+            <a:extLst>
+              <a:ext uri="{FF2B5EF4-FFF2-40B4-BE49-F238E27FC236}">
+                <a16:creationId xmlns:a16="http://schemas.microsoft.com/office/drawing/2014/main" id="{2DC3CBBB-E59A-CD44-C750-5AD770B6A881}"/>
+              </a:ext>
+            </a:extLst>
+          </p:cNvPr>
+          <p:cNvSpPr txBox="1"/>
+          <p:nvPr/>
+        </p:nvSpPr>
+        <p:spPr>
+          <a:xfrm>
+            <a:off x="189234" y="2962778"/>
+            <a:ext cx="6094638" cy="3308598"/>
+          </a:xfrm>
+          <a:prstGeom prst="rect">
+            <a:avLst/>
+          </a:prstGeom>
+        </p:spPr>
+        <p:txBody>
+          <a:bodyPr wrap="square">
+            <a:spAutoFit/>
+          </a:bodyPr>
+          <a:lstStyle>
+            <a:defPPr>
+              <a:defRPr lang="en-US"/>
+            </a:defPPr>
+            <a:lvl1pPr>
+              <a:defRPr sz="1100"/>
+            </a:lvl1pPr>
+          </a:lstStyle>
+          <a:p>
+            <a:r>
+              <a:rPr lang="fr-BE" dirty="0"/>
+              <a:t>String </a:t>
+            </a:r>
+            <a:r>
+              <a:rPr lang="fr-BE" dirty="0" err="1"/>
+              <a:t>pluginName</a:t>
+            </a:r>
+            <a:r>
+              <a:rPr lang="fr-BE" dirty="0"/>
+              <a:t> = </a:t>
+            </a:r>
+            <a:r>
+              <a:rPr lang="fr-BE" dirty="0" err="1"/>
+              <a:t>panelToWrite</a:t>
+            </a:r>
+            <a:r>
+              <a:rPr lang="fr-BE" dirty="0"/>
+              <a:t>-&gt;</a:t>
+            </a:r>
+            <a:r>
+              <a:rPr lang="fr-BE" dirty="0" err="1"/>
+              <a:t>getProperty</a:t>
+            </a:r>
+            <a:r>
+              <a:rPr lang="fr-BE" dirty="0"/>
+              <a:t>(</a:t>
+            </a:r>
+            <a:r>
+              <a:rPr lang="fr-BE" dirty="0" err="1"/>
+              <a:t>Ids</a:t>
+            </a:r>
+            <a:r>
+              <a:rPr lang="fr-BE" dirty="0"/>
+              <a:t>::</a:t>
+            </a:r>
+            <a:r>
+              <a:rPr lang="fr-BE" dirty="0" err="1"/>
+              <a:t>name</a:t>
+            </a:r>
+            <a:r>
+              <a:rPr lang="fr-BE" dirty="0"/>
+              <a:t>).</a:t>
+            </a:r>
+            <a:r>
+              <a:rPr lang="fr-BE" dirty="0" err="1"/>
+              <a:t>toString</a:t>
+            </a:r>
+            <a:r>
+              <a:rPr lang="fr-BE" dirty="0"/>
+              <a:t>();</a:t>
+            </a:r>
+          </a:p>
+          <a:p>
+            <a:r>
+              <a:rPr lang="fr-BE" dirty="0"/>
+              <a:t>String </a:t>
+            </a:r>
+            <a:r>
+              <a:rPr lang="fr-BE" dirty="0" err="1"/>
+              <a:t>pluginCode</a:t>
+            </a:r>
+            <a:r>
+              <a:rPr lang="fr-BE" dirty="0"/>
+              <a:t> = </a:t>
+            </a:r>
+            <a:r>
+              <a:rPr lang="fr-BE" dirty="0" err="1"/>
+              <a:t>panelToWrite</a:t>
+            </a:r>
+            <a:r>
+              <a:rPr lang="fr-BE" dirty="0"/>
+              <a:t>-&gt;</a:t>
+            </a:r>
+            <a:r>
+              <a:rPr lang="fr-BE" dirty="0" err="1"/>
+              <a:t>getProperty</a:t>
+            </a:r>
+            <a:r>
+              <a:rPr lang="fr-BE" dirty="0"/>
+              <a:t>(</a:t>
+            </a:r>
+            <a:r>
+              <a:rPr lang="fr-BE" dirty="0" err="1"/>
+              <a:t>Ids</a:t>
+            </a:r>
+            <a:r>
+              <a:rPr lang="fr-BE" dirty="0"/>
+              <a:t>::</a:t>
+            </a:r>
+            <a:r>
+              <a:rPr lang="fr-BE" dirty="0" err="1"/>
+              <a:t>panelInstanceUID</a:t>
+            </a:r>
+            <a:r>
+              <a:rPr lang="fr-BE" dirty="0"/>
+              <a:t>).</a:t>
+            </a:r>
+            <a:r>
+              <a:rPr lang="fr-BE" dirty="0" err="1"/>
+              <a:t>toString</a:t>
+            </a:r>
+            <a:r>
+              <a:rPr lang="fr-BE" dirty="0"/>
+              <a:t>();</a:t>
+            </a:r>
+          </a:p>
+          <a:p>
+            <a:r>
+              <a:rPr lang="fr-BE" dirty="0"/>
+              <a:t>String </a:t>
+            </a:r>
+            <a:r>
+              <a:rPr lang="fr-BE" dirty="0" err="1"/>
+              <a:t>manufacturerName</a:t>
+            </a:r>
+            <a:r>
+              <a:rPr lang="fr-BE" dirty="0"/>
+              <a:t> = </a:t>
+            </a:r>
+            <a:r>
+              <a:rPr lang="fr-BE" dirty="0" err="1"/>
+              <a:t>panelToWrite</a:t>
+            </a:r>
+            <a:r>
+              <a:rPr lang="fr-BE" dirty="0"/>
+              <a:t>-&gt;</a:t>
+            </a:r>
+            <a:r>
+              <a:rPr lang="fr-BE" dirty="0" err="1"/>
+              <a:t>getProperty</a:t>
+            </a:r>
+            <a:r>
+              <a:rPr lang="fr-BE" dirty="0"/>
+              <a:t>(</a:t>
+            </a:r>
+            <a:r>
+              <a:rPr lang="fr-BE" dirty="0" err="1"/>
+              <a:t>Ids</a:t>
+            </a:r>
+            <a:r>
+              <a:rPr lang="fr-BE" dirty="0"/>
+              <a:t>::</a:t>
+            </a:r>
+            <a:r>
+              <a:rPr lang="fr-BE" dirty="0" err="1"/>
+              <a:t>panelAuthorName</a:t>
+            </a:r>
+            <a:r>
+              <a:rPr lang="fr-BE" dirty="0"/>
+              <a:t>).</a:t>
+            </a:r>
+            <a:r>
+              <a:rPr lang="fr-BE" dirty="0" err="1"/>
+              <a:t>toString</a:t>
+            </a:r>
+            <a:r>
+              <a:rPr lang="fr-BE" dirty="0"/>
+              <a:t>();</a:t>
+            </a:r>
+          </a:p>
+          <a:p>
+            <a:r>
+              <a:rPr lang="fr-BE" dirty="0"/>
+              <a:t>String </a:t>
+            </a:r>
+            <a:r>
+              <a:rPr lang="fr-BE" dirty="0" err="1"/>
+              <a:t>manufacturerCode</a:t>
+            </a:r>
+            <a:r>
+              <a:rPr lang="fr-BE" dirty="0"/>
+              <a:t> = </a:t>
+            </a:r>
+            <a:r>
+              <a:rPr lang="fr-BE" dirty="0" err="1"/>
+              <a:t>panelToWrite</a:t>
+            </a:r>
+            <a:r>
+              <a:rPr lang="fr-BE" dirty="0"/>
+              <a:t>-&gt;</a:t>
+            </a:r>
+            <a:r>
+              <a:rPr lang="fr-BE" dirty="0" err="1"/>
+              <a:t>getProperty</a:t>
+            </a:r>
+            <a:r>
+              <a:rPr lang="fr-BE" dirty="0"/>
+              <a:t>(</a:t>
+            </a:r>
+            <a:r>
+              <a:rPr lang="fr-BE" dirty="0" err="1"/>
+              <a:t>Ids</a:t>
+            </a:r>
+            <a:r>
+              <a:rPr lang="fr-BE" dirty="0"/>
+              <a:t>::</a:t>
+            </a:r>
+            <a:r>
+              <a:rPr lang="fr-BE" dirty="0" err="1"/>
+              <a:t>panelInstanceManufacturerID</a:t>
+            </a:r>
+            <a:r>
+              <a:rPr lang="fr-BE" dirty="0"/>
+              <a:t>).</a:t>
+            </a:r>
+            <a:r>
+              <a:rPr lang="fr-BE" dirty="0" err="1"/>
+              <a:t>toString</a:t>
+            </a:r>
+            <a:r>
+              <a:rPr lang="fr-BE" dirty="0"/>
+              <a:t>();</a:t>
+            </a:r>
+          </a:p>
+          <a:p>
+            <a:r>
+              <a:rPr lang="fr-BE" dirty="0"/>
+              <a:t>String </a:t>
+            </a:r>
+            <a:r>
+              <a:rPr lang="fr-BE" dirty="0" err="1"/>
+              <a:t>manufacturerEmail</a:t>
+            </a:r>
+            <a:r>
+              <a:rPr lang="fr-BE" dirty="0"/>
+              <a:t> = </a:t>
+            </a:r>
+            <a:r>
+              <a:rPr lang="fr-BE" dirty="0" err="1"/>
+              <a:t>panelToWrite</a:t>
+            </a:r>
+            <a:r>
+              <a:rPr lang="fr-BE" dirty="0"/>
+              <a:t>-&gt;</a:t>
+            </a:r>
+            <a:r>
+              <a:rPr lang="fr-BE" dirty="0" err="1"/>
+              <a:t>getProperty</a:t>
+            </a:r>
+            <a:r>
+              <a:rPr lang="fr-BE" dirty="0"/>
+              <a:t>(</a:t>
+            </a:r>
+            <a:r>
+              <a:rPr lang="fr-BE" dirty="0" err="1"/>
+              <a:t>Ids</a:t>
+            </a:r>
+            <a:r>
+              <a:rPr lang="fr-BE" dirty="0"/>
+              <a:t>::</a:t>
+            </a:r>
+            <a:r>
+              <a:rPr lang="fr-BE" dirty="0" err="1"/>
+              <a:t>panelAuthorEmail</a:t>
+            </a:r>
+            <a:r>
+              <a:rPr lang="fr-BE" dirty="0"/>
+              <a:t>).</a:t>
+            </a:r>
+            <a:r>
+              <a:rPr lang="fr-BE" dirty="0" err="1"/>
+              <a:t>toString</a:t>
+            </a:r>
+            <a:r>
+              <a:rPr lang="fr-BE" dirty="0"/>
+              <a:t>();</a:t>
+            </a:r>
+          </a:p>
+          <a:p>
+            <a:r>
+              <a:rPr lang="fr-BE" dirty="0"/>
+              <a:t>String </a:t>
+            </a:r>
+            <a:r>
+              <a:rPr lang="fr-BE" dirty="0" err="1"/>
+              <a:t>manufacturerUrl</a:t>
+            </a:r>
+            <a:r>
+              <a:rPr lang="fr-BE" dirty="0"/>
+              <a:t> = </a:t>
+            </a:r>
+            <a:r>
+              <a:rPr lang="fr-BE" dirty="0" err="1"/>
+              <a:t>panelToWrite</a:t>
+            </a:r>
+            <a:r>
+              <a:rPr lang="fr-BE" dirty="0"/>
+              <a:t>-&gt;</a:t>
+            </a:r>
+            <a:r>
+              <a:rPr lang="fr-BE" dirty="0" err="1"/>
+              <a:t>getProperty</a:t>
+            </a:r>
+            <a:r>
+              <a:rPr lang="fr-BE" dirty="0"/>
+              <a:t>(</a:t>
+            </a:r>
+            <a:r>
+              <a:rPr lang="fr-BE" dirty="0" err="1"/>
+              <a:t>Ids</a:t>
+            </a:r>
+            <a:r>
+              <a:rPr lang="fr-BE" dirty="0"/>
+              <a:t>::</a:t>
+            </a:r>
+            <a:r>
+              <a:rPr lang="fr-BE" dirty="0" err="1"/>
+              <a:t>panelAuthorUrl</a:t>
+            </a:r>
+            <a:r>
+              <a:rPr lang="fr-BE" dirty="0"/>
+              <a:t>).</a:t>
+            </a:r>
+            <a:r>
+              <a:rPr lang="fr-BE" dirty="0" err="1"/>
+              <a:t>toString</a:t>
+            </a:r>
+            <a:r>
+              <a:rPr lang="fr-BE" dirty="0"/>
+              <a:t>();</a:t>
+            </a:r>
+          </a:p>
+          <a:p>
+            <a:r>
+              <a:rPr lang="fr-BE" dirty="0"/>
+              <a:t>String </a:t>
+            </a:r>
+            <a:r>
+              <a:rPr lang="fr-BE" dirty="0" err="1"/>
+              <a:t>versionMajor</a:t>
+            </a:r>
+            <a:r>
+              <a:rPr lang="fr-BE" dirty="0"/>
+              <a:t> = </a:t>
+            </a:r>
+            <a:r>
+              <a:rPr lang="fr-BE" dirty="0" err="1"/>
+              <a:t>panelToWrite</a:t>
+            </a:r>
+            <a:r>
+              <a:rPr lang="fr-BE" dirty="0"/>
+              <a:t>-&gt;</a:t>
+            </a:r>
+            <a:r>
+              <a:rPr lang="fr-BE" dirty="0" err="1"/>
+              <a:t>getProperty</a:t>
+            </a:r>
+            <a:r>
+              <a:rPr lang="fr-BE" dirty="0"/>
+              <a:t>(</a:t>
+            </a:r>
+            <a:r>
+              <a:rPr lang="fr-BE" dirty="0" err="1"/>
+              <a:t>Ids</a:t>
+            </a:r>
+            <a:r>
+              <a:rPr lang="fr-BE" dirty="0"/>
+              <a:t>::</a:t>
+            </a:r>
+            <a:r>
+              <a:rPr lang="fr-BE" dirty="0" err="1"/>
+              <a:t>panelVersionMajor</a:t>
+            </a:r>
+            <a:r>
+              <a:rPr lang="fr-BE" dirty="0"/>
+              <a:t>).</a:t>
+            </a:r>
+            <a:r>
+              <a:rPr lang="fr-BE" dirty="0" err="1"/>
+              <a:t>toString</a:t>
+            </a:r>
+            <a:r>
+              <a:rPr lang="fr-BE" dirty="0"/>
+              <a:t>();</a:t>
+            </a:r>
+          </a:p>
+          <a:p>
+            <a:r>
+              <a:rPr lang="fr-BE" dirty="0"/>
+              <a:t>String </a:t>
+            </a:r>
+            <a:r>
+              <a:rPr lang="fr-BE" dirty="0" err="1"/>
+              <a:t>versionMinor</a:t>
+            </a:r>
+            <a:r>
+              <a:rPr lang="fr-BE" dirty="0"/>
+              <a:t> = </a:t>
+            </a:r>
+            <a:r>
+              <a:rPr lang="fr-BE" dirty="0" err="1"/>
+              <a:t>panelToWrite</a:t>
+            </a:r>
+            <a:r>
+              <a:rPr lang="fr-BE" dirty="0"/>
+              <a:t>-&gt;</a:t>
+            </a:r>
+            <a:r>
+              <a:rPr lang="fr-BE" dirty="0" err="1"/>
+              <a:t>getProperty</a:t>
+            </a:r>
+            <a:r>
+              <a:rPr lang="fr-BE" dirty="0"/>
+              <a:t>(</a:t>
+            </a:r>
+            <a:r>
+              <a:rPr lang="fr-BE" dirty="0" err="1"/>
+              <a:t>Ids</a:t>
+            </a:r>
+            <a:r>
+              <a:rPr lang="fr-BE" dirty="0"/>
+              <a:t>::</a:t>
+            </a:r>
+            <a:r>
+              <a:rPr lang="fr-BE" dirty="0" err="1"/>
+              <a:t>panelVersionMinor</a:t>
+            </a:r>
+            <a:r>
+              <a:rPr lang="fr-BE" dirty="0"/>
+              <a:t>).</a:t>
+            </a:r>
+            <a:r>
+              <a:rPr lang="fr-BE" dirty="0" err="1"/>
+              <a:t>toString</a:t>
+            </a:r>
+            <a:r>
+              <a:rPr lang="fr-BE" dirty="0"/>
+              <a:t>();</a:t>
+            </a:r>
+          </a:p>
+          <a:p>
+            <a:r>
+              <a:rPr lang="fr-BE" dirty="0"/>
+              <a:t>String </a:t>
+            </a:r>
+            <a:r>
+              <a:rPr lang="fr-BE" dirty="0" err="1"/>
+              <a:t>plugType</a:t>
+            </a:r>
+            <a:r>
+              <a:rPr lang="fr-BE" dirty="0"/>
+              <a:t> = </a:t>
+            </a:r>
+            <a:r>
+              <a:rPr lang="fr-BE" dirty="0" err="1"/>
+              <a:t>panelToWrite</a:t>
+            </a:r>
+            <a:r>
+              <a:rPr lang="fr-BE" dirty="0"/>
+              <a:t>-&gt;</a:t>
+            </a:r>
+            <a:r>
+              <a:rPr lang="fr-BE" dirty="0" err="1"/>
+              <a:t>getProperty</a:t>
+            </a:r>
+            <a:r>
+              <a:rPr lang="fr-BE" dirty="0"/>
+              <a:t>(</a:t>
+            </a:r>
+            <a:r>
+              <a:rPr lang="fr-BE" dirty="0" err="1"/>
+              <a:t>Ids</a:t>
+            </a:r>
+            <a:r>
+              <a:rPr lang="fr-BE" dirty="0"/>
+              <a:t>::</a:t>
+            </a:r>
+            <a:r>
+              <a:rPr lang="fr-BE" dirty="0" err="1"/>
+              <a:t>panelPlugType</a:t>
+            </a:r>
+            <a:r>
+              <a:rPr lang="fr-BE" dirty="0"/>
+              <a:t>).</a:t>
+            </a:r>
+            <a:r>
+              <a:rPr lang="fr-BE" dirty="0" err="1"/>
+              <a:t>toString</a:t>
+            </a:r>
+            <a:r>
+              <a:rPr lang="fr-BE" dirty="0"/>
+              <a:t>();</a:t>
+            </a:r>
+          </a:p>
+          <a:p>
+            <a:endParaRPr lang="fr-BE" dirty="0"/>
+          </a:p>
+          <a:p>
+            <a:r>
+              <a:rPr lang="fr-BE" dirty="0" err="1"/>
+              <a:t>hexStringToBytes</a:t>
+            </a:r>
+            <a:r>
+              <a:rPr lang="fr-BE" dirty="0"/>
+              <a:t>(</a:t>
+            </a:r>
+            <a:r>
+              <a:rPr lang="fr-BE" dirty="0" err="1"/>
+              <a:t>pluginName</a:t>
+            </a:r>
+            <a:r>
+              <a:rPr lang="fr-BE" dirty="0"/>
+              <a:t>, </a:t>
+            </a:r>
+            <a:r>
+              <a:rPr lang="fr-BE" b="1" dirty="0"/>
+              <a:t>24</a:t>
+            </a:r>
+            <a:r>
+              <a:rPr lang="fr-BE" dirty="0"/>
+              <a:t>, </a:t>
+            </a:r>
+            <a:r>
+              <a:rPr lang="fr-BE" dirty="0" err="1"/>
+              <a:t>pluginNameHex</a:t>
+            </a:r>
+            <a:r>
+              <a:rPr lang="fr-BE" dirty="0"/>
+              <a:t>);</a:t>
+            </a:r>
+          </a:p>
+          <a:p>
+            <a:r>
+              <a:rPr lang="fr-BE" dirty="0" err="1"/>
+              <a:t>hexStringToBytes</a:t>
+            </a:r>
+            <a:r>
+              <a:rPr lang="fr-BE" dirty="0"/>
+              <a:t>(</a:t>
+            </a:r>
+            <a:r>
+              <a:rPr lang="fr-BE" dirty="0" err="1"/>
+              <a:t>pluginCode</a:t>
+            </a:r>
+            <a:r>
+              <a:rPr lang="fr-BE" dirty="0"/>
+              <a:t>, </a:t>
+            </a:r>
+            <a:r>
+              <a:rPr lang="fr-BE" b="1" dirty="0"/>
+              <a:t>4</a:t>
+            </a:r>
+            <a:r>
+              <a:rPr lang="fr-BE" dirty="0"/>
+              <a:t>, </a:t>
+            </a:r>
+            <a:r>
+              <a:rPr lang="fr-BE" dirty="0" err="1"/>
+              <a:t>pluginCodeHex</a:t>
+            </a:r>
+            <a:r>
+              <a:rPr lang="fr-BE" dirty="0"/>
+              <a:t>);</a:t>
+            </a:r>
+          </a:p>
+          <a:p>
+            <a:r>
+              <a:rPr lang="fr-BE" dirty="0" err="1"/>
+              <a:t>hexStringToBytes</a:t>
+            </a:r>
+            <a:r>
+              <a:rPr lang="fr-BE" dirty="0"/>
+              <a:t>(</a:t>
+            </a:r>
+            <a:r>
+              <a:rPr lang="fr-BE" dirty="0" err="1"/>
+              <a:t>manufacturerName</a:t>
+            </a:r>
+            <a:r>
+              <a:rPr lang="fr-BE" dirty="0"/>
+              <a:t>, </a:t>
+            </a:r>
+            <a:r>
+              <a:rPr lang="fr-BE" b="1" dirty="0"/>
+              <a:t>32</a:t>
+            </a:r>
+            <a:r>
+              <a:rPr lang="fr-BE" dirty="0"/>
+              <a:t>, </a:t>
+            </a:r>
+            <a:r>
+              <a:rPr lang="fr-BE" dirty="0" err="1"/>
+              <a:t>manufacturerNameHex</a:t>
+            </a:r>
+            <a:r>
+              <a:rPr lang="fr-BE" dirty="0"/>
+              <a:t>);</a:t>
+            </a:r>
+          </a:p>
+          <a:p>
+            <a:r>
+              <a:rPr lang="fr-BE" dirty="0" err="1"/>
+              <a:t>hexStringToBytes</a:t>
+            </a:r>
+            <a:r>
+              <a:rPr lang="fr-BE" dirty="0"/>
+              <a:t>(</a:t>
+            </a:r>
+            <a:r>
+              <a:rPr lang="fr-BE" dirty="0" err="1"/>
+              <a:t>manufacturerCode</a:t>
+            </a:r>
+            <a:r>
+              <a:rPr lang="fr-BE" dirty="0"/>
+              <a:t>, </a:t>
+            </a:r>
+            <a:r>
+              <a:rPr lang="fr-BE" b="1" dirty="0"/>
+              <a:t>4</a:t>
+            </a:r>
+            <a:r>
+              <a:rPr lang="fr-BE" dirty="0"/>
+              <a:t>, </a:t>
+            </a:r>
+            <a:r>
+              <a:rPr lang="fr-BE" dirty="0" err="1"/>
+              <a:t>manufacturerCodeHex</a:t>
+            </a:r>
+            <a:r>
+              <a:rPr lang="fr-BE" dirty="0"/>
+              <a:t>);</a:t>
+            </a:r>
+          </a:p>
+          <a:p>
+            <a:r>
+              <a:rPr lang="fr-BE" dirty="0" err="1"/>
+              <a:t>hexStringToBytes</a:t>
+            </a:r>
+            <a:r>
+              <a:rPr lang="fr-BE" dirty="0"/>
+              <a:t>(</a:t>
+            </a:r>
+            <a:r>
+              <a:rPr lang="fr-BE" dirty="0" err="1"/>
+              <a:t>manufacturerEmail</a:t>
+            </a:r>
+            <a:r>
+              <a:rPr lang="fr-BE" dirty="0"/>
+              <a:t>, </a:t>
+            </a:r>
+            <a:r>
+              <a:rPr lang="fr-BE" b="1" dirty="0"/>
+              <a:t>32</a:t>
+            </a:r>
+            <a:r>
+              <a:rPr lang="fr-BE" dirty="0"/>
+              <a:t>, </a:t>
+            </a:r>
+            <a:r>
+              <a:rPr lang="fr-BE" dirty="0" err="1"/>
+              <a:t>manufacturerEmailHex</a:t>
+            </a:r>
+            <a:r>
+              <a:rPr lang="fr-BE" dirty="0"/>
+              <a:t>);</a:t>
+            </a:r>
+          </a:p>
+          <a:p>
+            <a:r>
+              <a:rPr lang="fr-BE" dirty="0" err="1"/>
+              <a:t>hexStringToBytes</a:t>
+            </a:r>
+            <a:r>
+              <a:rPr lang="fr-BE" dirty="0"/>
+              <a:t>(</a:t>
+            </a:r>
+            <a:r>
+              <a:rPr lang="fr-BE" dirty="0" err="1"/>
+              <a:t>manufacturerUrl</a:t>
+            </a:r>
+            <a:r>
+              <a:rPr lang="fr-BE" dirty="0"/>
+              <a:t>, </a:t>
+            </a:r>
+            <a:r>
+              <a:rPr lang="fr-BE" b="1" dirty="0"/>
+              <a:t>32</a:t>
+            </a:r>
+            <a:r>
+              <a:rPr lang="fr-BE" dirty="0"/>
+              <a:t>, </a:t>
+            </a:r>
+            <a:r>
+              <a:rPr lang="fr-BE" dirty="0" err="1"/>
+              <a:t>manufacturerUrlHex</a:t>
+            </a:r>
+            <a:r>
+              <a:rPr lang="fr-BE" dirty="0"/>
+              <a:t>);</a:t>
+            </a:r>
+          </a:p>
+          <a:p>
+            <a:r>
+              <a:rPr lang="fr-BE" dirty="0" err="1"/>
+              <a:t>hexStringToBytes</a:t>
+            </a:r>
+            <a:r>
+              <a:rPr lang="fr-BE" dirty="0"/>
+              <a:t>(</a:t>
+            </a:r>
+            <a:r>
+              <a:rPr lang="fr-BE" dirty="0" err="1"/>
+              <a:t>versionMajor</a:t>
+            </a:r>
+            <a:r>
+              <a:rPr lang="fr-BE" dirty="0"/>
+              <a:t>, </a:t>
+            </a:r>
+            <a:r>
+              <a:rPr lang="fr-BE" b="1" dirty="0"/>
+              <a:t>2</a:t>
+            </a:r>
+            <a:r>
+              <a:rPr lang="fr-BE" dirty="0"/>
+              <a:t>, </a:t>
+            </a:r>
+            <a:r>
+              <a:rPr lang="fr-BE" dirty="0" err="1"/>
+              <a:t>versionMajorHex</a:t>
+            </a:r>
+            <a:r>
+              <a:rPr lang="fr-BE" dirty="0"/>
+              <a:t>);</a:t>
+            </a:r>
+          </a:p>
+          <a:p>
+            <a:r>
+              <a:rPr lang="fr-BE" dirty="0" err="1"/>
+              <a:t>hexStringToBytes</a:t>
+            </a:r>
+            <a:r>
+              <a:rPr lang="fr-BE" dirty="0"/>
+              <a:t>(</a:t>
+            </a:r>
+            <a:r>
+              <a:rPr lang="fr-BE" dirty="0" err="1"/>
+              <a:t>versionMinor</a:t>
+            </a:r>
+            <a:r>
+              <a:rPr lang="fr-BE" dirty="0"/>
+              <a:t>, </a:t>
+            </a:r>
+            <a:r>
+              <a:rPr lang="fr-BE" b="1" dirty="0"/>
+              <a:t>2</a:t>
+            </a:r>
+            <a:r>
+              <a:rPr lang="fr-BE" dirty="0"/>
+              <a:t>, </a:t>
+            </a:r>
+            <a:r>
+              <a:rPr lang="fr-BE" dirty="0" err="1"/>
+              <a:t>versionMinorHex</a:t>
+            </a:r>
+            <a:r>
+              <a:rPr lang="fr-BE" dirty="0"/>
+              <a:t>);</a:t>
+            </a:r>
+          </a:p>
+          <a:p>
+            <a:r>
+              <a:rPr lang="fr-BE" dirty="0" err="1"/>
+              <a:t>hexStringToBytes</a:t>
+            </a:r>
+            <a:r>
+              <a:rPr lang="fr-BE" dirty="0"/>
+              <a:t>(</a:t>
+            </a:r>
+            <a:r>
+              <a:rPr lang="fr-BE" dirty="0" err="1"/>
+              <a:t>plugType</a:t>
+            </a:r>
+            <a:r>
+              <a:rPr lang="fr-BE" dirty="0"/>
+              <a:t>, </a:t>
+            </a:r>
+            <a:r>
+              <a:rPr lang="fr-BE" b="1" dirty="0"/>
+              <a:t>16</a:t>
+            </a:r>
+            <a:r>
+              <a:rPr lang="fr-BE" dirty="0"/>
+              <a:t>, </a:t>
+            </a:r>
+            <a:r>
+              <a:rPr lang="fr-BE" dirty="0" err="1"/>
+              <a:t>plugTypeHex</a:t>
+            </a:r>
+            <a:r>
+              <a:rPr lang="fr-BE" dirty="0"/>
+              <a:t>);</a:t>
+            </a:r>
+          </a:p>
+        </p:txBody>
+      </p:sp>
+      <p:sp>
+        <p:nvSpPr>
+          <p:cNvPr id="21" name="ZoneTexte 20">
+            <a:extLst>
+              <a:ext uri="{FF2B5EF4-FFF2-40B4-BE49-F238E27FC236}">
+                <a16:creationId xmlns:a16="http://schemas.microsoft.com/office/drawing/2014/main" id="{3C9D184A-A999-1C00-5065-B6EA6985B761}"/>
+              </a:ext>
+            </a:extLst>
+          </p:cNvPr>
+          <p:cNvSpPr txBox="1"/>
+          <p:nvPr/>
+        </p:nvSpPr>
+        <p:spPr>
+          <a:xfrm>
+            <a:off x="6097362" y="1635967"/>
+            <a:ext cx="6094638" cy="4832092"/>
+          </a:xfrm>
+          <a:prstGeom prst="rect">
+            <a:avLst/>
+          </a:prstGeom>
+        </p:spPr>
+        <p:txBody>
+          <a:bodyPr wrap="square">
+            <a:spAutoFit/>
+          </a:bodyPr>
+          <a:lstStyle>
+            <a:defPPr>
+              <a:defRPr lang="en-US"/>
+            </a:defPPr>
+            <a:lvl1pPr>
+              <a:defRPr sz="1100"/>
+            </a:lvl1pPr>
+          </a:lstStyle>
+          <a:p>
+            <a:r>
+              <a:rPr lang="en-US" dirty="0">
+                <a:solidFill>
+                  <a:schemeClr val="accent6">
+                    <a:lumMod val="75000"/>
+                  </a:schemeClr>
+                </a:solidFill>
+              </a:rPr>
+              <a:t>// Replace plugin name "CtrlrX - Sunny Synths" by the one of the panel to export (21 bytes so will be extended to 24 bytes in the vst3 file)</a:t>
+            </a:r>
+          </a:p>
+          <a:p>
+            <a:r>
+              <a:rPr lang="en-US" dirty="0" err="1"/>
+              <a:t>hexStringToBytes</a:t>
+            </a:r>
+            <a:r>
+              <a:rPr lang="en-US" dirty="0"/>
+              <a:t>("43 74 72 6C 72 58 20 2D 20 53 75 6E </a:t>
+            </a:r>
+            <a:r>
+              <a:rPr lang="en-US" dirty="0" err="1"/>
+              <a:t>6E</a:t>
+            </a:r>
+            <a:r>
+              <a:rPr lang="en-US" dirty="0"/>
+              <a:t> 79 20 53 79 6E 74 68 73 00 00 00", </a:t>
+            </a:r>
+            <a:r>
+              <a:rPr lang="en-US" dirty="0" err="1"/>
+              <a:t>searchPluginNameHex</a:t>
+            </a:r>
+            <a:r>
+              <a:rPr lang="en-US" dirty="0"/>
+              <a:t>);</a:t>
+            </a:r>
+          </a:p>
+          <a:p>
+            <a:r>
+              <a:rPr lang="en-US" dirty="0">
+                <a:solidFill>
+                  <a:schemeClr val="accent6">
+                    <a:lumMod val="75000"/>
+                  </a:schemeClr>
+                </a:solidFill>
+              </a:rPr>
+              <a:t>// Replace plugin code "</a:t>
+            </a:r>
+            <a:r>
+              <a:rPr lang="en-US" dirty="0" err="1">
+                <a:solidFill>
+                  <a:schemeClr val="accent6">
+                    <a:lumMod val="75000"/>
+                  </a:schemeClr>
+                </a:solidFill>
+              </a:rPr>
+              <a:t>cTrX</a:t>
+            </a:r>
+            <a:r>
+              <a:rPr lang="en-US" dirty="0">
+                <a:solidFill>
+                  <a:schemeClr val="accent6">
+                    <a:lumMod val="75000"/>
+                  </a:schemeClr>
+                </a:solidFill>
+              </a:rPr>
+              <a:t>" by the one of the panel to export</a:t>
+            </a:r>
+          </a:p>
+          <a:p>
+            <a:r>
+              <a:rPr lang="en-US" dirty="0" err="1"/>
+              <a:t>hexStringToBytes</a:t>
+            </a:r>
+            <a:r>
+              <a:rPr lang="en-US" dirty="0"/>
+              <a:t>("63 54 72 58", </a:t>
+            </a:r>
+            <a:r>
+              <a:rPr lang="en-US" dirty="0" err="1"/>
+              <a:t>searchPluginCodeHex</a:t>
+            </a:r>
+            <a:r>
+              <a:rPr lang="en-US" dirty="0"/>
+              <a:t>);</a:t>
+            </a:r>
+          </a:p>
+          <a:p>
+            <a:r>
+              <a:rPr lang="en-US" dirty="0">
+                <a:solidFill>
+                  <a:schemeClr val="accent6">
+                    <a:lumMod val="75000"/>
+                  </a:schemeClr>
+                </a:solidFill>
+              </a:rPr>
+              <a:t>// Replace plugin manufacturer name "Sunny Synths - </a:t>
+            </a:r>
+            <a:r>
+              <a:rPr lang="en-US" dirty="0" err="1">
+                <a:solidFill>
+                  <a:schemeClr val="accent6">
+                    <a:lumMod val="75000"/>
+                  </a:schemeClr>
+                </a:solidFill>
+              </a:rPr>
+              <a:t>D.Bontemps</a:t>
+            </a:r>
+            <a:r>
+              <a:rPr lang="en-US" dirty="0">
+                <a:solidFill>
+                  <a:schemeClr val="accent6">
+                    <a:lumMod val="75000"/>
+                  </a:schemeClr>
+                </a:solidFill>
+              </a:rPr>
+              <a:t>" by the one of the panel to export (25 bytes so will be extended to 32 bytes in the vst3 file)</a:t>
+            </a:r>
+          </a:p>
+          <a:p>
+            <a:r>
+              <a:rPr lang="en-US" dirty="0" err="1"/>
+              <a:t>hexStringToBytes</a:t>
+            </a:r>
+            <a:r>
+              <a:rPr lang="en-US" dirty="0"/>
+              <a:t>("53 75 6E </a:t>
+            </a:r>
+            <a:r>
+              <a:rPr lang="en-US" dirty="0" err="1"/>
+              <a:t>6E</a:t>
+            </a:r>
+            <a:r>
+              <a:rPr lang="en-US" dirty="0"/>
+              <a:t> 79 20 53 79 6E 74 68 73 20 2D 20 44 2E 42 6F 6E 74 65 6D 70 73 00 00 00 00 00 00 00", </a:t>
+            </a:r>
+            <a:r>
+              <a:rPr lang="en-US" dirty="0" err="1"/>
+              <a:t>searchManufacturerNameHex</a:t>
+            </a:r>
+            <a:r>
+              <a:rPr lang="en-US" dirty="0"/>
+              <a:t>);</a:t>
+            </a:r>
+          </a:p>
+          <a:p>
+            <a:r>
+              <a:rPr lang="en-US" dirty="0">
+                <a:solidFill>
+                  <a:schemeClr val="accent6">
+                    <a:lumMod val="75000"/>
+                  </a:schemeClr>
+                </a:solidFill>
+              </a:rPr>
+              <a:t>// Replace plugin manufacturer code "</a:t>
+            </a:r>
+            <a:r>
+              <a:rPr lang="en-US" dirty="0" err="1">
+                <a:solidFill>
+                  <a:schemeClr val="accent6">
+                    <a:lumMod val="75000"/>
+                  </a:schemeClr>
+                </a:solidFill>
+              </a:rPr>
+              <a:t>SuSy</a:t>
+            </a:r>
+            <a:r>
+              <a:rPr lang="en-US" dirty="0">
+                <a:solidFill>
+                  <a:schemeClr val="accent6">
+                    <a:lumMod val="75000"/>
+                  </a:schemeClr>
+                </a:solidFill>
+              </a:rPr>
+              <a:t>" by the one of the panel to export</a:t>
+            </a:r>
+          </a:p>
+          <a:p>
+            <a:r>
+              <a:rPr lang="en-US" dirty="0" err="1"/>
+              <a:t>hexStringToBytes</a:t>
+            </a:r>
+            <a:r>
+              <a:rPr lang="en-US" dirty="0"/>
+              <a:t>("53 75 53 79", </a:t>
+            </a:r>
+            <a:r>
+              <a:rPr lang="en-US" dirty="0" err="1"/>
+              <a:t>searchManufacturerCodeHex</a:t>
+            </a:r>
+            <a:r>
+              <a:rPr lang="en-US" dirty="0"/>
+              <a:t>);</a:t>
+            </a:r>
+          </a:p>
+          <a:p>
+            <a:r>
+              <a:rPr lang="en-US" dirty="0">
+                <a:solidFill>
+                  <a:schemeClr val="accent6">
+                    <a:lumMod val="75000"/>
+                  </a:schemeClr>
+                </a:solidFill>
+              </a:rPr>
+              <a:t>// Replace plugin manufacturer email "sunny.synths@gmail.com   " by the one of the panel to export (written on 25 bytes with spaces to get 32 bytes in the vst3 file)</a:t>
+            </a:r>
+          </a:p>
+          <a:p>
+            <a:r>
+              <a:rPr lang="en-US" dirty="0" err="1"/>
+              <a:t>hexStringToBytes</a:t>
+            </a:r>
+            <a:r>
+              <a:rPr lang="en-US" dirty="0"/>
+              <a:t>("73 75 6E </a:t>
+            </a:r>
+            <a:r>
+              <a:rPr lang="en-US" dirty="0" err="1"/>
+              <a:t>6E</a:t>
+            </a:r>
+            <a:r>
+              <a:rPr lang="en-US" dirty="0"/>
+              <a:t> 79 2E 73 79 6E 74 68 73 40 67 6D 61 69 6C 2E 63 6F 6D 20 20 20 00 00 00 00 00 00 00", </a:t>
+            </a:r>
+            <a:r>
+              <a:rPr lang="en-US" dirty="0" err="1"/>
+              <a:t>searchManufacturerEmailHex</a:t>
+            </a:r>
+            <a:r>
+              <a:rPr lang="en-US" dirty="0"/>
+              <a:t>);</a:t>
+            </a:r>
+          </a:p>
+          <a:p>
+            <a:r>
+              <a:rPr lang="en-US" dirty="0">
+                <a:solidFill>
+                  <a:schemeClr val="accent6">
+                    <a:lumMod val="75000"/>
+                  </a:schemeClr>
+                </a:solidFill>
+              </a:rPr>
+              <a:t>// Replace plugin manufacturer URL "www.sunnysynths.com      " by the one of the panel to export (written on 25 bytes with spaces to get 32 bytes in the vst3 file)</a:t>
+            </a:r>
+          </a:p>
+          <a:p>
+            <a:r>
+              <a:rPr lang="en-US" dirty="0" err="1"/>
+              <a:t>hexStringToBytes</a:t>
+            </a:r>
+            <a:r>
+              <a:rPr lang="en-US" dirty="0"/>
+              <a:t>("77 77 77 2E 73 75 6E </a:t>
+            </a:r>
+            <a:r>
+              <a:rPr lang="en-US" dirty="0" err="1"/>
+              <a:t>6E</a:t>
+            </a:r>
+            <a:r>
+              <a:rPr lang="en-US" dirty="0"/>
+              <a:t> 79 73 79 6E 74 68 73 2E 63 6F 6D 20 20 20 20 20 20 00 00 00 00 00 00 00", </a:t>
+            </a:r>
+            <a:r>
+              <a:rPr lang="en-US" dirty="0" err="1"/>
+              <a:t>searchManufacturerUrlHex</a:t>
+            </a:r>
+            <a:r>
+              <a:rPr lang="en-US" dirty="0"/>
+              <a:t>);</a:t>
+            </a:r>
+          </a:p>
+          <a:p>
+            <a:r>
+              <a:rPr lang="en-US" dirty="0">
+                <a:solidFill>
+                  <a:schemeClr val="accent6">
+                    <a:lumMod val="75000"/>
+                  </a:schemeClr>
+                </a:solidFill>
+              </a:rPr>
+              <a:t>// Replace plugin type "</a:t>
+            </a:r>
+            <a:r>
+              <a:rPr lang="en-US" dirty="0" err="1">
+                <a:solidFill>
+                  <a:schemeClr val="accent6">
+                    <a:lumMod val="75000"/>
+                  </a:schemeClr>
+                </a:solidFill>
+              </a:rPr>
+              <a:t>Instrument|Tools</a:t>
+            </a:r>
+            <a:r>
+              <a:rPr lang="en-US" dirty="0">
+                <a:solidFill>
+                  <a:schemeClr val="accent6">
+                    <a:lumMod val="75000"/>
+                  </a:schemeClr>
+                </a:solidFill>
+              </a:rPr>
+              <a:t>" by the one of the panel to export</a:t>
+            </a:r>
+          </a:p>
+          <a:p>
+            <a:r>
+              <a:rPr lang="en-US" dirty="0" err="1"/>
+              <a:t>hexStringToBytes</a:t>
+            </a:r>
+            <a:r>
+              <a:rPr lang="en-US" dirty="0"/>
+              <a:t>("49 6E 73 74 72 75 6D 65 6E 74 7C 54 6F </a:t>
+            </a:r>
+            <a:r>
+              <a:rPr lang="en-US" dirty="0" err="1"/>
+              <a:t>6F</a:t>
+            </a:r>
+            <a:r>
+              <a:rPr lang="en-US" dirty="0"/>
+              <a:t> 6C 73", </a:t>
+            </a:r>
+            <a:r>
+              <a:rPr lang="en-US" dirty="0" err="1"/>
+              <a:t>searchPlugTypeHex</a:t>
+            </a:r>
+            <a:r>
+              <a:rPr lang="en-US" dirty="0"/>
+              <a:t>);</a:t>
+            </a:r>
+          </a:p>
+          <a:p>
+            <a:endParaRPr lang="en-US" dirty="0"/>
+          </a:p>
+          <a:p>
+            <a:r>
+              <a:rPr lang="en-US" dirty="0">
+                <a:solidFill>
+                  <a:schemeClr val="accent6">
+                    <a:lumMod val="75000"/>
+                  </a:schemeClr>
+                </a:solidFill>
+              </a:rPr>
+              <a:t>// Keeping the version of CtrlrX in the panel export in order to know which CtrlrX version was used to export the panel. </a:t>
+            </a:r>
+          </a:p>
+          <a:p>
+            <a:r>
+              <a:rPr lang="en-US" dirty="0">
+                <a:solidFill>
+                  <a:schemeClr val="accent6">
+                    <a:lumMod val="75000"/>
+                  </a:schemeClr>
+                </a:solidFill>
+              </a:rPr>
+              <a:t>// This is useful for debugging and support purposes.</a:t>
+            </a:r>
+          </a:p>
+          <a:p>
+            <a:r>
+              <a:rPr lang="en-US" dirty="0">
+                <a:solidFill>
+                  <a:schemeClr val="accent6">
+                    <a:lumMod val="75000"/>
+                  </a:schemeClr>
+                </a:solidFill>
+              </a:rPr>
+              <a:t>// The panel version can be displayed in the About panel of the plugin, or in the plugin's GUI, or in the plugin's settings.</a:t>
+            </a:r>
+            <a:endParaRPr lang="fr-BE" dirty="0">
+              <a:solidFill>
+                <a:schemeClr val="accent6">
+                  <a:lumMod val="75000"/>
+                </a:schemeClr>
+              </a:solidFill>
+            </a:endParaRPr>
+          </a:p>
+        </p:txBody>
+      </p:sp>
+      <p:sp>
+        <p:nvSpPr>
+          <p:cNvPr id="23" name="TextBox 10">
+            <a:extLst>
+              <a:ext uri="{FF2B5EF4-FFF2-40B4-BE49-F238E27FC236}">
+                <a16:creationId xmlns:a16="http://schemas.microsoft.com/office/drawing/2014/main" id="{5C450A76-C3CA-D42A-970F-3DFD993E0897}"/>
+              </a:ext>
+            </a:extLst>
+          </p:cNvPr>
+          <p:cNvSpPr txBox="1"/>
+          <p:nvPr/>
+        </p:nvSpPr>
+        <p:spPr>
+          <a:xfrm>
+            <a:off x="6095999" y="566163"/>
+            <a:ext cx="4044043" cy="769441"/>
+          </a:xfrm>
+          <a:prstGeom prst="rect">
+            <a:avLst/>
+          </a:prstGeom>
+          <a:solidFill>
+            <a:schemeClr val="accent1">
+              <a:lumMod val="40000"/>
+              <a:lumOff val="60000"/>
+            </a:schemeClr>
+          </a:solidFill>
+        </p:spPr>
+        <p:txBody>
+          <a:bodyPr wrap="square" rtlCol="0">
+            <a:spAutoFit/>
+          </a:bodyPr>
+          <a:lstStyle/>
+          <a:p>
+            <a:r>
+              <a:rPr lang="en-US" sz="1100" noProof="1"/>
+              <a:t>The Projucer property value has a number of bytes. The VST3 wrapper is extending it to a multiple of 8 bytes and fills with 0x00</a:t>
+            </a:r>
+          </a:p>
+          <a:p>
+            <a:r>
+              <a:rPr lang="en-US" sz="1100" noProof="1"/>
+              <a:t>It is thus needed to artificially extend some properties with spaces 0x20 in order to reach the next extension of 8 bytes</a:t>
+            </a:r>
+          </a:p>
+        </p:txBody>
+      </p:sp>
+      <p:sp>
+        <p:nvSpPr>
+          <p:cNvPr id="25" name="TextBox 10">
+            <a:extLst>
+              <a:ext uri="{FF2B5EF4-FFF2-40B4-BE49-F238E27FC236}">
+                <a16:creationId xmlns:a16="http://schemas.microsoft.com/office/drawing/2014/main" id="{0DF6E04B-9328-3F49-4049-DE73C63F4A1F}"/>
+              </a:ext>
+            </a:extLst>
+          </p:cNvPr>
+          <p:cNvSpPr txBox="1"/>
+          <p:nvPr/>
+        </p:nvSpPr>
+        <p:spPr>
+          <a:xfrm>
+            <a:off x="3857955" y="904716"/>
+            <a:ext cx="1415772" cy="261610"/>
+          </a:xfrm>
+          <a:prstGeom prst="rect">
+            <a:avLst/>
+          </a:prstGeom>
+          <a:solidFill>
+            <a:schemeClr val="accent6">
+              <a:lumMod val="40000"/>
+              <a:lumOff val="60000"/>
+            </a:schemeClr>
+          </a:solidFill>
+        </p:spPr>
+        <p:txBody>
+          <a:bodyPr wrap="none" rtlCol="0">
+            <a:spAutoFit/>
+          </a:bodyPr>
+          <a:lstStyle>
+            <a:defPPr>
+              <a:defRPr lang="en-US"/>
+            </a:defPPr>
+            <a:lvl1pPr>
+              <a:defRPr sz="1100"/>
+            </a:lvl1pPr>
+          </a:lstStyle>
+          <a:p>
+            <a:r>
+              <a:rPr lang="en-US" noProof="1"/>
+              <a:t>Save, SaveAs, Exports</a:t>
+            </a:r>
+          </a:p>
+        </p:txBody>
+      </p:sp>
+    </p:spTree>
+    <p:extLst>
+      <p:ext uri="{BB962C8B-B14F-4D97-AF65-F5344CB8AC3E}">
+        <p14:creationId xmlns:p14="http://schemas.microsoft.com/office/powerpoint/2010/main" val="4059436092"/>
+      </p:ext>
+    </p:extLst>
+  </p:cSld>
+  <p:clrMapOvr>
+    <a:masterClrMapping/>
+  </p:clrMapOvr>
+</p:sld>
+</file>
+
+<file path=ppt/slides/slide21.xml><?xml version="1.0" encoding="utf-8"?>
+<p:sld xmlns:a="http://schemas.openxmlformats.org/drawingml/2006/main" xmlns:r="http://schemas.openxmlformats.org/officeDocument/2006/relationships" xmlns:p="http://schemas.openxmlformats.org/presentationml/2006/main">
+  <p:cSld>
+    <p:spTree>
+      <p:nvGrpSpPr>
+        <p:cNvPr id="1" name="">
+          <a:extLst>
+            <a:ext uri="{FF2B5EF4-FFF2-40B4-BE49-F238E27FC236}">
+              <a16:creationId xmlns:a16="http://schemas.microsoft.com/office/drawing/2014/main" id="{41EA54A1-98EE-C385-881A-EC52E6A9D88A}"/>
+            </a:ext>
+          </a:extLst>
+        </p:cNvPr>
+        <p:cNvGrpSpPr/>
+        <p:nvPr/>
+      </p:nvGrpSpPr>
+      <p:grpSpPr>
+        <a:xfrm>
+          <a:off x="0" y="0"/>
+          <a:ext cx="0" cy="0"/>
+          <a:chOff x="0" y="0"/>
+          <a:chExt cx="0" cy="0"/>
+        </a:xfrm>
+      </p:grpSpPr>
+      <p:sp>
+        <p:nvSpPr>
+          <p:cNvPr id="2" name="TextBox 1">
+            <a:extLst>
+              <a:ext uri="{FF2B5EF4-FFF2-40B4-BE49-F238E27FC236}">
+                <a16:creationId xmlns:a16="http://schemas.microsoft.com/office/drawing/2014/main" id="{872EF472-C7F8-5B72-3898-D8349C880830}"/>
+              </a:ext>
+            </a:extLst>
+          </p:cNvPr>
+          <p:cNvSpPr txBox="1"/>
+          <p:nvPr/>
+        </p:nvSpPr>
+        <p:spPr>
+          <a:xfrm>
+            <a:off x="550506" y="335902"/>
+            <a:ext cx="1831592" cy="369332"/>
+          </a:xfrm>
+          <a:prstGeom prst="rect">
+            <a:avLst/>
+          </a:prstGeom>
+          <a:noFill/>
+        </p:spPr>
+        <p:txBody>
+          <a:bodyPr wrap="none" rtlCol="0">
+            <a:spAutoFit/>
+          </a:bodyPr>
+          <a:lstStyle/>
+          <a:p>
+            <a:r>
+              <a:rPr lang="en-US" dirty="0"/>
+              <a:t>Open questions...</a:t>
+            </a:r>
+          </a:p>
+        </p:txBody>
+      </p:sp>
+      <p:sp>
+        <p:nvSpPr>
+          <p:cNvPr id="3" name="Rectangle: Folded Corner 2">
+            <a:extLst>
+              <a:ext uri="{FF2B5EF4-FFF2-40B4-BE49-F238E27FC236}">
+                <a16:creationId xmlns:a16="http://schemas.microsoft.com/office/drawing/2014/main" id="{2FE39EBF-C01A-E9B9-060E-712DF349639E}"/>
+              </a:ext>
+            </a:extLst>
+          </p:cNvPr>
+          <p:cNvSpPr/>
+          <p:nvPr/>
+        </p:nvSpPr>
+        <p:spPr>
+          <a:xfrm>
+            <a:off x="643812" y="886408"/>
+            <a:ext cx="214604" cy="279919"/>
+          </a:xfrm>
+          <a:prstGeom prst="foldedCorner">
+            <a:avLst/>
+          </a:prstGeom>
+        </p:spPr>
+        <p:style>
+          <a:lnRef idx="2">
+            <a:schemeClr val="accent3">
+              <a:shade val="15000"/>
+            </a:schemeClr>
+          </a:lnRef>
+          <a:fillRef idx="1">
+            <a:schemeClr val="accent3"/>
+          </a:fillRef>
+          <a:effectRef idx="0">
+            <a:schemeClr val="accent3"/>
+          </a:effectRef>
+          <a:fontRef idx="minor">
+            <a:schemeClr val="lt1"/>
+          </a:fontRef>
+        </p:style>
+        <p:txBody>
+          <a:bodyPr rtlCol="0" anchor="ctr"/>
+          <a:lstStyle/>
+          <a:p>
+            <a:pPr algn="ctr"/>
+            <a:endParaRPr lang="en-US"/>
+          </a:p>
+        </p:txBody>
+      </p:sp>
+      <p:sp>
+        <p:nvSpPr>
+          <p:cNvPr id="4" name="TextBox 3">
+            <a:extLst>
+              <a:ext uri="{FF2B5EF4-FFF2-40B4-BE49-F238E27FC236}">
+                <a16:creationId xmlns:a16="http://schemas.microsoft.com/office/drawing/2014/main" id="{3310D397-D57F-4A86-BBD1-65616E4DDF85}"/>
+              </a:ext>
+            </a:extLst>
+          </p:cNvPr>
+          <p:cNvSpPr txBox="1"/>
+          <p:nvPr/>
+        </p:nvSpPr>
+        <p:spPr>
+          <a:xfrm>
+            <a:off x="858416" y="895562"/>
+            <a:ext cx="2610010" cy="261610"/>
+          </a:xfrm>
+          <a:prstGeom prst="rect">
+            <a:avLst/>
+          </a:prstGeom>
+          <a:noFill/>
+        </p:spPr>
+        <p:txBody>
+          <a:bodyPr wrap="none" rtlCol="0">
+            <a:spAutoFit/>
+          </a:bodyPr>
+          <a:lstStyle/>
+          <a:p>
+            <a:r>
+              <a:rPr lang="en-US" sz="1100" i="1" dirty="0"/>
+              <a:t>CtrlrValueTreeEditor.cpp </a:t>
+            </a:r>
+            <a:r>
+              <a:rPr lang="en-US" sz="1100" dirty="0"/>
+              <a:t>in </a:t>
+            </a:r>
+            <a:r>
+              <a:rPr lang="en-US" sz="1100" dirty="0" err="1"/>
+              <a:t>UIComponents</a:t>
+            </a:r>
+            <a:endParaRPr lang="en-US" sz="1100" dirty="0"/>
+          </a:p>
+        </p:txBody>
+      </p:sp>
+      <p:sp>
+        <p:nvSpPr>
+          <p:cNvPr id="5" name="Rectangle: Folded Corner 4">
+            <a:extLst>
+              <a:ext uri="{FF2B5EF4-FFF2-40B4-BE49-F238E27FC236}">
+                <a16:creationId xmlns:a16="http://schemas.microsoft.com/office/drawing/2014/main" id="{E0F0221F-E4B1-5C49-012F-2441D416A5E9}"/>
+              </a:ext>
+            </a:extLst>
+          </p:cNvPr>
+          <p:cNvSpPr/>
+          <p:nvPr/>
+        </p:nvSpPr>
+        <p:spPr>
+          <a:xfrm>
+            <a:off x="643812" y="1496008"/>
+            <a:ext cx="214604" cy="279919"/>
+          </a:xfrm>
+          <a:prstGeom prst="foldedCorner">
+            <a:avLst/>
+          </a:prstGeom>
+        </p:spPr>
+        <p:style>
+          <a:lnRef idx="2">
+            <a:schemeClr val="accent3">
+              <a:shade val="15000"/>
+            </a:schemeClr>
+          </a:lnRef>
+          <a:fillRef idx="1">
+            <a:schemeClr val="accent3"/>
+          </a:fillRef>
+          <a:effectRef idx="0">
+            <a:schemeClr val="accent3"/>
+          </a:effectRef>
+          <a:fontRef idx="minor">
+            <a:schemeClr val="lt1"/>
+          </a:fontRef>
+        </p:style>
+        <p:txBody>
+          <a:bodyPr rtlCol="0" anchor="ctr"/>
+          <a:lstStyle/>
+          <a:p>
+            <a:pPr algn="ctr"/>
+            <a:endParaRPr lang="en-US"/>
+          </a:p>
+        </p:txBody>
+      </p:sp>
+      <p:sp>
+        <p:nvSpPr>
+          <p:cNvPr id="6" name="TextBox 5">
+            <a:extLst>
+              <a:ext uri="{FF2B5EF4-FFF2-40B4-BE49-F238E27FC236}">
+                <a16:creationId xmlns:a16="http://schemas.microsoft.com/office/drawing/2014/main" id="{F8340356-1EC9-2224-A3FA-4D94333F257E}"/>
+              </a:ext>
+            </a:extLst>
+          </p:cNvPr>
+          <p:cNvSpPr txBox="1"/>
+          <p:nvPr/>
+        </p:nvSpPr>
+        <p:spPr>
+          <a:xfrm>
+            <a:off x="858416" y="1505162"/>
+            <a:ext cx="643125" cy="261610"/>
+          </a:xfrm>
+          <a:prstGeom prst="rect">
+            <a:avLst/>
+          </a:prstGeom>
+          <a:noFill/>
+        </p:spPr>
+        <p:txBody>
+          <a:bodyPr wrap="none" rtlCol="0">
+            <a:spAutoFit/>
+          </a:bodyPr>
+          <a:lstStyle/>
+          <a:p>
+            <a:r>
+              <a:rPr lang="en-US" sz="1100" i="1" dirty="0"/>
               <a:t>... </a:t>
             </a:r>
             <a:r>
@@ -16504,7 +18107,7 @@
           <p:cNvPr id="7" name="TextBox 6">
             <a:extLst>
               <a:ext uri="{FF2B5EF4-FFF2-40B4-BE49-F238E27FC236}">
-                <a16:creationId xmlns="" xmlns:a16="http://schemas.microsoft.com/office/drawing/2014/main" id="{1146AE3F-9B4E-C420-3546-B82209736C42}"/>
+                <a16:creationId xmlns:a16="http://schemas.microsoft.com/office/drawing/2014/main" id="{0E7E84B2-113A-1986-977F-8BB4E57307F8}"/>
               </a:ext>
             </a:extLst>
           </p:cNvPr>
@@ -16572,7 +18175,7 @@
     </p:spTree>
     <p:extLst>
       <p:ext uri="{BB962C8B-B14F-4D97-AF65-F5344CB8AC3E}">
-        <p14:creationId xmlns:p14="http://schemas.microsoft.com/office/powerpoint/2010/main" val="4059436092"/>
+        <p14:creationId xmlns:p14="http://schemas.microsoft.com/office/powerpoint/2010/main" val="4258663219"/>
       </p:ext>
     </p:extLst>
   </p:cSld>
@@ -16590,7 +18193,7 @@
         <p:cNvPr id="1" name="">
           <a:extLst>
             <a:ext uri="{FF2B5EF4-FFF2-40B4-BE49-F238E27FC236}">
-              <a16:creationId xmlns="" xmlns:a16="http://schemas.microsoft.com/office/drawing/2014/main" id="{8B0526A2-5EF8-50FA-8279-4AC88F9A19D2}"/>
+              <a16:creationId xmlns:a16="http://schemas.microsoft.com/office/drawing/2014/main" id="{8B0526A2-5EF8-50FA-8279-4AC88F9A19D2}"/>
             </a:ext>
           </a:extLst>
         </p:cNvPr>
@@ -16610,7 +18213,7 @@
           <p:cNvPr id="2" name="TextBox 1">
             <a:extLst>
               <a:ext uri="{FF2B5EF4-FFF2-40B4-BE49-F238E27FC236}">
-                <a16:creationId xmlns="" xmlns:a16="http://schemas.microsoft.com/office/drawing/2014/main" id="{E4244FDC-9EF2-844E-8D48-D90C523EEAE2}"/>
+                <a16:creationId xmlns:a16="http://schemas.microsoft.com/office/drawing/2014/main" id="{E4244FDC-9EF2-844E-8D48-D90C523EEAE2}"/>
               </a:ext>
             </a:extLst>
           </p:cNvPr>
@@ -16645,7 +18248,7 @@
           <p:cNvPr id="18" name="TextBox 17">
             <a:extLst>
               <a:ext uri="{FF2B5EF4-FFF2-40B4-BE49-F238E27FC236}">
-                <a16:creationId xmlns="" xmlns:a16="http://schemas.microsoft.com/office/drawing/2014/main" id="{1C46CD40-4A0A-607F-273B-2BBEE19413B9}"/>
+                <a16:creationId xmlns:a16="http://schemas.microsoft.com/office/drawing/2014/main" id="{1C46CD40-4A0A-607F-273B-2BBEE19413B9}"/>
               </a:ext>
             </a:extLst>
           </p:cNvPr>
@@ -16737,7 +18340,7 @@
           <p:cNvPr id="20" name="Arrow: Down 19">
             <a:extLst>
               <a:ext uri="{FF2B5EF4-FFF2-40B4-BE49-F238E27FC236}">
-                <a16:creationId xmlns="" xmlns:a16="http://schemas.microsoft.com/office/drawing/2014/main" id="{63E5D7BA-2297-0468-54E7-7639844D006B}"/>
+                <a16:creationId xmlns:a16="http://schemas.microsoft.com/office/drawing/2014/main" id="{63E5D7BA-2297-0468-54E7-7639844D006B}"/>
               </a:ext>
             </a:extLst>
           </p:cNvPr>
@@ -16783,7 +18386,7 @@
           <p:cNvPr id="21" name="TextBox 20">
             <a:extLst>
               <a:ext uri="{FF2B5EF4-FFF2-40B4-BE49-F238E27FC236}">
-                <a16:creationId xmlns="" xmlns:a16="http://schemas.microsoft.com/office/drawing/2014/main" id="{14BD6259-9BF3-83FA-E60B-3EC59BA1D4CB}"/>
+                <a16:creationId xmlns:a16="http://schemas.microsoft.com/office/drawing/2014/main" id="{14BD6259-9BF3-83FA-E60B-3EC59BA1D4CB}"/>
               </a:ext>
             </a:extLst>
           </p:cNvPr>
@@ -16837,7 +18440,7 @@
           <p:cNvPr id="22" name="Arrow: Down 21">
             <a:extLst>
               <a:ext uri="{FF2B5EF4-FFF2-40B4-BE49-F238E27FC236}">
-                <a16:creationId xmlns="" xmlns:a16="http://schemas.microsoft.com/office/drawing/2014/main" id="{3E05BC4B-1463-7D59-985D-8FC21F97A844}"/>
+                <a16:creationId xmlns:a16="http://schemas.microsoft.com/office/drawing/2014/main" id="{3E05BC4B-1463-7D59-985D-8FC21F97A844}"/>
               </a:ext>
             </a:extLst>
           </p:cNvPr>
@@ -16883,7 +18486,7 @@
           <p:cNvPr id="23" name="TextBox 22">
             <a:extLst>
               <a:ext uri="{FF2B5EF4-FFF2-40B4-BE49-F238E27FC236}">
-                <a16:creationId xmlns="" xmlns:a16="http://schemas.microsoft.com/office/drawing/2014/main" id="{AE69929C-B8A8-4DB8-6B3B-26B6C38C50EE}"/>
+                <a16:creationId xmlns:a16="http://schemas.microsoft.com/office/drawing/2014/main" id="{AE69929C-B8A8-4DB8-6B3B-26B6C38C50EE}"/>
               </a:ext>
             </a:extLst>
           </p:cNvPr>
@@ -16942,7 +18545,7 @@
           <p:cNvPr id="24" name="Table 23">
             <a:extLst>
               <a:ext uri="{FF2B5EF4-FFF2-40B4-BE49-F238E27FC236}">
-                <a16:creationId xmlns="" xmlns:a16="http://schemas.microsoft.com/office/drawing/2014/main" id="{57D296A4-B6BF-E06F-71F5-E895AD2C5FB7}"/>
+                <a16:creationId xmlns:a16="http://schemas.microsoft.com/office/drawing/2014/main" id="{57D296A4-B6BF-E06F-71F5-E895AD2C5FB7}"/>
               </a:ext>
             </a:extLst>
           </p:cNvPr>
@@ -16971,14 +18574,14 @@
                 <a:gridCol w="912813">
                   <a:extLst>
                     <a:ext uri="{9D8B030D-6E8A-4147-A177-3AD203B41FA5}">
-                      <a16:colId xmlns="" xmlns:a16="http://schemas.microsoft.com/office/drawing/2014/main" val="1950313516"/>
+                      <a16:colId xmlns:a16="http://schemas.microsoft.com/office/drawing/2014/main" val="1950313516"/>
                     </a:ext>
                   </a:extLst>
                 </a:gridCol>
                 <a:gridCol w="912813">
                   <a:extLst>
                     <a:ext uri="{9D8B030D-6E8A-4147-A177-3AD203B41FA5}">
-                      <a16:colId xmlns="" xmlns:a16="http://schemas.microsoft.com/office/drawing/2014/main" val="4089444380"/>
+                      <a16:colId xmlns:a16="http://schemas.microsoft.com/office/drawing/2014/main" val="4089444380"/>
                     </a:ext>
                   </a:extLst>
                 </a:gridCol>
@@ -17014,7 +18617,7 @@
                 </a:tc>
                 <a:extLst>
                   <a:ext uri="{0D108BD9-81ED-4DB2-BD59-A6C34878D82A}">
-                    <a16:rowId xmlns="" xmlns:a16="http://schemas.microsoft.com/office/drawing/2014/main" val="2501065406"/>
+                    <a16:rowId xmlns:a16="http://schemas.microsoft.com/office/drawing/2014/main" val="2501065406"/>
                   </a:ext>
                 </a:extLst>
               </a:tr>
@@ -17041,7 +18644,7 @@
                 </a:tc>
                 <a:extLst>
                   <a:ext uri="{0D108BD9-81ED-4DB2-BD59-A6C34878D82A}">
-                    <a16:rowId xmlns="" xmlns:a16="http://schemas.microsoft.com/office/drawing/2014/main" val="1679574170"/>
+                    <a16:rowId xmlns:a16="http://schemas.microsoft.com/office/drawing/2014/main" val="1679574170"/>
                   </a:ext>
                 </a:extLst>
               </a:tr>
@@ -17068,7 +18671,7 @@
                 </a:tc>
                 <a:extLst>
                   <a:ext uri="{0D108BD9-81ED-4DB2-BD59-A6C34878D82A}">
-                    <a16:rowId xmlns="" xmlns:a16="http://schemas.microsoft.com/office/drawing/2014/main" val="1839524193"/>
+                    <a16:rowId xmlns:a16="http://schemas.microsoft.com/office/drawing/2014/main" val="1839524193"/>
                   </a:ext>
                 </a:extLst>
               </a:tr>
@@ -17095,7 +18698,7 @@
                 </a:tc>
                 <a:extLst>
                   <a:ext uri="{0D108BD9-81ED-4DB2-BD59-A6C34878D82A}">
-                    <a16:rowId xmlns="" xmlns:a16="http://schemas.microsoft.com/office/drawing/2014/main" val="3889031928"/>
+                    <a16:rowId xmlns:a16="http://schemas.microsoft.com/office/drawing/2014/main" val="3889031928"/>
                   </a:ext>
                 </a:extLst>
               </a:tr>
@@ -17108,7 +18711,7 @@
           <p:cNvPr id="25" name="TextBox 24">
             <a:extLst>
               <a:ext uri="{FF2B5EF4-FFF2-40B4-BE49-F238E27FC236}">
-                <a16:creationId xmlns="" xmlns:a16="http://schemas.microsoft.com/office/drawing/2014/main" id="{0A50552F-353D-F69E-FD2D-7EC32DC25D85}"/>
+                <a16:creationId xmlns:a16="http://schemas.microsoft.com/office/drawing/2014/main" id="{0A50552F-353D-F69E-FD2D-7EC32DC25D85}"/>
               </a:ext>
             </a:extLst>
           </p:cNvPr>
@@ -17148,7 +18751,7 @@
           <p:cNvPr id="27" name="Straight Connector 26">
             <a:extLst>
               <a:ext uri="{FF2B5EF4-FFF2-40B4-BE49-F238E27FC236}">
-                <a16:creationId xmlns="" xmlns:a16="http://schemas.microsoft.com/office/drawing/2014/main" id="{82CFD632-D7DE-2426-A9E0-0FC87719E0D0}"/>
+                <a16:creationId xmlns:a16="http://schemas.microsoft.com/office/drawing/2014/main" id="{82CFD632-D7DE-2426-A9E0-0FC87719E0D0}"/>
               </a:ext>
             </a:extLst>
           </p:cNvPr>
@@ -17200,7 +18803,7 @@
         <p:cNvPr id="1" name="">
           <a:extLst>
             <a:ext uri="{FF2B5EF4-FFF2-40B4-BE49-F238E27FC236}">
-              <a16:creationId xmlns="" xmlns:a16="http://schemas.microsoft.com/office/drawing/2014/main" id="{AD1BF733-96B2-D025-B943-4503BCB1596B}"/>
+              <a16:creationId xmlns:a16="http://schemas.microsoft.com/office/drawing/2014/main" id="{AD1BF733-96B2-D025-B943-4503BCB1596B}"/>
             </a:ext>
           </a:extLst>
         </p:cNvPr>
@@ -17220,7 +18823,7 @@
           <p:cNvPr id="2" name="TextBox 1">
             <a:extLst>
               <a:ext uri="{FF2B5EF4-FFF2-40B4-BE49-F238E27FC236}">
-                <a16:creationId xmlns="" xmlns:a16="http://schemas.microsoft.com/office/drawing/2014/main" id="{79A17946-3560-4E64-30A7-636E11F700CC}"/>
+                <a16:creationId xmlns:a16="http://schemas.microsoft.com/office/drawing/2014/main" id="{79A17946-3560-4E64-30A7-636E11F700CC}"/>
               </a:ext>
             </a:extLst>
           </p:cNvPr>
@@ -17255,7 +18858,7 @@
           <p:cNvPr id="3" name="Rectangle: Folded Corner 2">
             <a:extLst>
               <a:ext uri="{FF2B5EF4-FFF2-40B4-BE49-F238E27FC236}">
-                <a16:creationId xmlns="" xmlns:a16="http://schemas.microsoft.com/office/drawing/2014/main" id="{52EBC1B3-A6EE-3933-AF67-467ACF942355}"/>
+                <a16:creationId xmlns:a16="http://schemas.microsoft.com/office/drawing/2014/main" id="{52EBC1B3-A6EE-3933-AF67-467ACF942355}"/>
               </a:ext>
             </a:extLst>
           </p:cNvPr>
@@ -17301,7 +18904,7 @@
           <p:cNvPr id="4" name="TextBox 3">
             <a:extLst>
               <a:ext uri="{FF2B5EF4-FFF2-40B4-BE49-F238E27FC236}">
-                <a16:creationId xmlns="" xmlns:a16="http://schemas.microsoft.com/office/drawing/2014/main" id="{F8BCB8C7-314A-570B-0AB4-DCA7C4B7B160}"/>
+                <a16:creationId xmlns:a16="http://schemas.microsoft.com/office/drawing/2014/main" id="{F8BCB8C7-314A-570B-0AB4-DCA7C4B7B160}"/>
               </a:ext>
             </a:extLst>
           </p:cNvPr>
@@ -17340,7 +18943,7 @@
           <p:cNvPr id="5" name="Rectangle: Folded Corner 4">
             <a:extLst>
               <a:ext uri="{FF2B5EF4-FFF2-40B4-BE49-F238E27FC236}">
-                <a16:creationId xmlns="" xmlns:a16="http://schemas.microsoft.com/office/drawing/2014/main" id="{36A9EF15-47B6-B542-B231-318DC84C4EE4}"/>
+                <a16:creationId xmlns:a16="http://schemas.microsoft.com/office/drawing/2014/main" id="{36A9EF15-47B6-B542-B231-318DC84C4EE4}"/>
               </a:ext>
             </a:extLst>
           </p:cNvPr>
@@ -17386,7 +18989,7 @@
           <p:cNvPr id="6" name="TextBox 5">
             <a:extLst>
               <a:ext uri="{FF2B5EF4-FFF2-40B4-BE49-F238E27FC236}">
-                <a16:creationId xmlns="" xmlns:a16="http://schemas.microsoft.com/office/drawing/2014/main" id="{BC0B62D1-7DD4-4424-2EC9-699F6879FAF0}"/>
+                <a16:creationId xmlns:a16="http://schemas.microsoft.com/office/drawing/2014/main" id="{BC0B62D1-7DD4-4424-2EC9-699F6879FAF0}"/>
               </a:ext>
             </a:extLst>
           </p:cNvPr>
@@ -17422,7 +19025,7 @@
           <p:cNvPr id="7" name="Rectangle: Folded Corner 6">
             <a:extLst>
               <a:ext uri="{FF2B5EF4-FFF2-40B4-BE49-F238E27FC236}">
-                <a16:creationId xmlns="" xmlns:a16="http://schemas.microsoft.com/office/drawing/2014/main" id="{63E590AC-5C77-636A-012C-D00892CB0E0D}"/>
+                <a16:creationId xmlns:a16="http://schemas.microsoft.com/office/drawing/2014/main" id="{63E590AC-5C77-636A-012C-D00892CB0E0D}"/>
               </a:ext>
             </a:extLst>
           </p:cNvPr>
@@ -17468,7 +19071,7 @@
           <p:cNvPr id="8" name="TextBox 7">
             <a:extLst>
               <a:ext uri="{FF2B5EF4-FFF2-40B4-BE49-F238E27FC236}">
-                <a16:creationId xmlns="" xmlns:a16="http://schemas.microsoft.com/office/drawing/2014/main" id="{A3C7C308-FDDC-7701-0D5C-4C817E8C60D7}"/>
+                <a16:creationId xmlns:a16="http://schemas.microsoft.com/office/drawing/2014/main" id="{A3C7C308-FDDC-7701-0D5C-4C817E8C60D7}"/>
               </a:ext>
             </a:extLst>
           </p:cNvPr>
@@ -17492,19 +19095,15 @@
           <a:lstStyle/>
           <a:p>
             <a:r>
-              <a:rPr lang="en-US" sz="1100" i="1" dirty="0" smtClean="0"/>
+              <a:rPr lang="en-US" sz="1100" i="1" dirty="0"/>
               <a:t>CtrlrAbout.cpp </a:t>
             </a:r>
             <a:r>
-              <a:rPr lang="en-US" sz="1100" dirty="0" smtClean="0"/>
-              <a:t>in </a:t>
-            </a:r>
-            <a:r>
               <a:rPr lang="en-US" sz="1100" dirty="0"/>
-              <a:t>Source – </a:t>
-            </a:r>
-            <a:r>
-              <a:rPr lang="en-US" sz="1100" dirty="0" err="1" smtClean="0"/>
+              <a:t>in Source – </a:t>
+            </a:r>
+            <a:r>
+              <a:rPr lang="en-US" sz="1100" dirty="0" err="1"/>
               <a:t>UIComponents</a:t>
             </a:r>
             <a:endParaRPr lang="en-US" sz="1100" dirty="0"/>
@@ -17516,7 +19115,7 @@
           <p:cNvPr id="9" name="Rectangle: Folded Corner 8">
             <a:extLst>
               <a:ext uri="{FF2B5EF4-FFF2-40B4-BE49-F238E27FC236}">
-                <a16:creationId xmlns="" xmlns:a16="http://schemas.microsoft.com/office/drawing/2014/main" id="{2A3085DE-04EF-583D-D32A-ABD289582E68}"/>
+                <a16:creationId xmlns:a16="http://schemas.microsoft.com/office/drawing/2014/main" id="{2A3085DE-04EF-583D-D32A-ABD289582E68}"/>
               </a:ext>
             </a:extLst>
           </p:cNvPr>
@@ -17562,7 +19161,7 @@
           <p:cNvPr id="12" name="Straight Arrow Connector 11">
             <a:extLst>
               <a:ext uri="{FF2B5EF4-FFF2-40B4-BE49-F238E27FC236}">
-                <a16:creationId xmlns="" xmlns:a16="http://schemas.microsoft.com/office/drawing/2014/main" id="{BC9A2CC4-B749-9F04-65EB-162B6943BDA4}"/>
+                <a16:creationId xmlns:a16="http://schemas.microsoft.com/office/drawing/2014/main" id="{BC9A2CC4-B749-9F04-65EB-162B6943BDA4}"/>
               </a:ext>
             </a:extLst>
           </p:cNvPr>
@@ -17601,7 +19200,7 @@
           <p:cNvPr id="13" name="Straight Arrow Connector 12">
             <a:extLst>
               <a:ext uri="{FF2B5EF4-FFF2-40B4-BE49-F238E27FC236}">
-                <a16:creationId xmlns="" xmlns:a16="http://schemas.microsoft.com/office/drawing/2014/main" id="{78C04754-4783-995F-518C-0058DD519F49}"/>
+                <a16:creationId xmlns:a16="http://schemas.microsoft.com/office/drawing/2014/main" id="{78C04754-4783-995F-518C-0058DD519F49}"/>
               </a:ext>
             </a:extLst>
           </p:cNvPr>
@@ -17642,7 +19241,7 @@
           <p:cNvPr id="16" name="Straight Arrow Connector 15">
             <a:extLst>
               <a:ext uri="{FF2B5EF4-FFF2-40B4-BE49-F238E27FC236}">
-                <a16:creationId xmlns="" xmlns:a16="http://schemas.microsoft.com/office/drawing/2014/main" id="{3289ED94-AB7D-1B50-1BEE-82236925A3DE}"/>
+                <a16:creationId xmlns:a16="http://schemas.microsoft.com/office/drawing/2014/main" id="{3289ED94-AB7D-1B50-1BEE-82236925A3DE}"/>
               </a:ext>
             </a:extLst>
           </p:cNvPr>
@@ -17683,7 +19282,7 @@
           <p:cNvPr id="15" name="TextBox 14">
             <a:extLst>
               <a:ext uri="{FF2B5EF4-FFF2-40B4-BE49-F238E27FC236}">
-                <a16:creationId xmlns="" xmlns:a16="http://schemas.microsoft.com/office/drawing/2014/main" id="{F8BCB8C7-314A-570B-0AB4-DCA7C4B7B160}"/>
+                <a16:creationId xmlns:a16="http://schemas.microsoft.com/office/drawing/2014/main" id="{F8BCB8C7-314A-570B-0AB4-DCA7C4B7B160}"/>
               </a:ext>
             </a:extLst>
           </p:cNvPr>
@@ -17707,27 +19306,23 @@
           <a:lstStyle/>
           <a:p>
             <a:r>
-              <a:rPr lang="en-US" sz="1100" i="1" dirty="0" smtClean="0"/>
+              <a:rPr lang="en-US" sz="1100" i="1" dirty="0"/>
               <a:t>CtrlrEditor.cpp </a:t>
             </a:r>
             <a:r>
               <a:rPr lang="en-US" sz="1100" dirty="0"/>
-              <a:t>in </a:t>
-            </a:r>
-            <a:r>
-              <a:rPr lang="en-US" sz="1100" dirty="0" smtClean="0"/>
-              <a:t>Source – </a:t>
-            </a:r>
-            <a:r>
-              <a:rPr lang="en-US" sz="1100" dirty="0" err="1" smtClean="0"/>
+              <a:t>in Source – </a:t>
+            </a:r>
+            <a:r>
+              <a:rPr lang="en-US" sz="1100" dirty="0" err="1"/>
               <a:t>UIComponents</a:t>
             </a:r>
             <a:r>
-              <a:rPr lang="en-US" sz="1100" dirty="0" smtClean="0"/>
+              <a:rPr lang="en-US" sz="1100" dirty="0"/>
               <a:t> – </a:t>
             </a:r>
             <a:r>
-              <a:rPr lang="en-US" sz="1100" dirty="0" err="1" smtClean="0"/>
+              <a:rPr lang="en-US" sz="1100" dirty="0" err="1"/>
               <a:t>CtrlrApplicationWindow</a:t>
             </a:r>
             <a:endParaRPr lang="en-US" sz="1100" dirty="0"/>
@@ -17739,7 +19334,7 @@
           <p:cNvPr id="17" name="Arrow: Down 11">
             <a:extLst>
               <a:ext uri="{FF2B5EF4-FFF2-40B4-BE49-F238E27FC236}">
-                <a16:creationId xmlns="" xmlns:a16="http://schemas.microsoft.com/office/drawing/2014/main" id="{1193628C-2325-9596-DC74-198D9364B4DF}"/>
+                <a16:creationId xmlns:a16="http://schemas.microsoft.com/office/drawing/2014/main" id="{1193628C-2325-9596-DC74-198D9364B4DF}"/>
               </a:ext>
             </a:extLst>
           </p:cNvPr>
@@ -17802,69 +19397,68 @@
           <a:lstStyle/>
           <a:p>
             <a:r>
-              <a:rPr lang="en-US" dirty="0" smtClean="0"/>
+              <a:rPr lang="en-US" dirty="0"/>
               <a:t>Creates a </a:t>
             </a:r>
             <a:r>
-              <a:rPr lang="en-US" dirty="0" err="1" smtClean="0"/>
+              <a:rPr lang="en-US" dirty="0" err="1"/>
               <a:t>CtrlrEditor</a:t>
             </a:r>
             <a:r>
-              <a:rPr lang="en-US" dirty="0" smtClean="0"/>
+              <a:rPr lang="en-US" dirty="0"/>
               <a:t> object with </a:t>
             </a:r>
           </a:p>
           <a:p>
             <a:r>
-              <a:rPr lang="en-US" dirty="0" err="1" smtClean="0"/>
+              <a:rPr lang="en-US" dirty="0" err="1"/>
               <a:t>MenuBarComponent</a:t>
             </a:r>
-            <a:endParaRPr lang="en-US" dirty="0" smtClean="0"/>
-          </a:p>
-          <a:p>
-            <a:r>
-              <a:rPr lang="en-US" dirty="0" err="1" smtClean="0"/>
+            <a:endParaRPr lang="en-US" dirty="0"/>
+          </a:p>
+          <a:p>
+            <a:r>
+              <a:rPr lang="en-US" dirty="0" err="1"/>
               <a:t>CommandManager</a:t>
             </a:r>
-            <a:endParaRPr lang="en-US" dirty="0" smtClean="0"/>
-          </a:p>
-          <a:p>
-            <a:r>
-              <a:rPr lang="en-US" dirty="0" err="1" smtClean="0"/>
+            <a:endParaRPr lang="en-US" dirty="0"/>
+          </a:p>
+          <a:p>
+            <a:r>
+              <a:rPr lang="en-US" dirty="0" err="1"/>
               <a:t>CtrlrDocumentpanel</a:t>
             </a:r>
-            <a:endParaRPr lang="en-US" dirty="0" smtClean="0"/>
-          </a:p>
-          <a:p>
-            <a:r>
-              <a:rPr lang="en-US" dirty="0" smtClean="0"/>
+            <a:endParaRPr lang="en-US" dirty="0"/>
+          </a:p>
+          <a:p>
+            <a:r>
+              <a:rPr lang="en-US" dirty="0"/>
               <a:t>Resizer (only for plugin non restricted instances)</a:t>
             </a:r>
           </a:p>
           <a:p>
             <a:r>
-              <a:rPr lang="en-US" dirty="0" err="1" smtClean="0"/>
+              <a:rPr lang="en-US" dirty="0" err="1"/>
               <a:t>getActivePanel</a:t>
             </a:r>
             <a:r>
-              <a:rPr lang="en-US" dirty="0" smtClean="0"/>
+              <a:rPr lang="en-US" dirty="0"/>
               <a:t>() returns true if any</a:t>
             </a:r>
           </a:p>
           <a:p>
             <a:r>
-              <a:rPr lang="en-US" dirty="0" smtClean="0"/>
+              <a:rPr lang="en-US" dirty="0"/>
               <a:t>Set </a:t>
             </a:r>
             <a:r>
-              <a:rPr lang="en-US" dirty="0" err="1" smtClean="0"/>
+              <a:rPr lang="en-US" dirty="0" err="1"/>
               <a:t>LnF</a:t>
             </a:r>
             <a:r>
-              <a:rPr lang="en-US" dirty="0" smtClean="0"/>
+              <a:rPr lang="en-US" dirty="0"/>
               <a:t> to v3 if Legacy mode is ON otherwise, v4</a:t>
             </a:r>
-            <a:endParaRPr lang="en-US" dirty="0"/>
           </a:p>
           <a:p>
             <a:endParaRPr lang="en-US" dirty="0"/>
@@ -17894,37 +19488,36 @@
           <a:lstStyle/>
           <a:p>
             <a:r>
-              <a:rPr lang="en-US" dirty="0" smtClean="0"/>
+              <a:rPr lang="en-US" dirty="0"/>
               <a:t>Each active panel has its window manager.</a:t>
             </a:r>
           </a:p>
           <a:p>
             <a:r>
-              <a:rPr lang="en-US" dirty="0" err="1" smtClean="0"/>
+              <a:rPr lang="en-US" dirty="0" err="1"/>
               <a:t>CtrlrEditorApplicationCommandsHandler</a:t>
             </a:r>
             <a:r>
-              <a:rPr lang="en-US" dirty="0" smtClean="0"/>
+              <a:rPr lang="en-US" dirty="0"/>
               <a:t> contains the actions to perform for each command associated to a Ctrlr menu item (defined in CtrlrEditorApplicationCommandMenus.cpp)</a:t>
             </a:r>
           </a:p>
           <a:p>
-            <a:endParaRPr lang="en-US" dirty="0" smtClean="0"/>
-          </a:p>
-          <a:p>
-            <a:r>
-              <a:rPr lang="en-US" dirty="0" smtClean="0"/>
+            <a:endParaRPr lang="en-US" dirty="0"/>
+          </a:p>
+          <a:p>
+            <a:r>
+              <a:rPr lang="en-US" dirty="0"/>
               <a:t>Check what </a:t>
             </a:r>
             <a:r>
-              <a:rPr lang="en-US" dirty="0" err="1" smtClean="0"/>
+              <a:rPr lang="en-US" dirty="0" err="1"/>
               <a:t>getCommandInfo</a:t>
             </a:r>
             <a:r>
-              <a:rPr lang="en-US" dirty="0" smtClean="0"/>
+              <a:rPr lang="en-US" dirty="0"/>
               <a:t> is doing</a:t>
             </a:r>
-            <a:endParaRPr lang="en-US" dirty="0"/>
           </a:p>
         </p:txBody>
       </p:sp>
@@ -17970,7 +19563,7 @@
           <p:cNvPr id="20" name="Rectangle: Folded Corner 4">
             <a:extLst>
               <a:ext uri="{FF2B5EF4-FFF2-40B4-BE49-F238E27FC236}">
-                <a16:creationId xmlns="" xmlns:a16="http://schemas.microsoft.com/office/drawing/2014/main" id="{36A9EF15-47B6-B542-B231-318DC84C4EE4}"/>
+                <a16:creationId xmlns:a16="http://schemas.microsoft.com/office/drawing/2014/main" id="{36A9EF15-47B6-B542-B231-318DC84C4EE4}"/>
               </a:ext>
             </a:extLst>
           </p:cNvPr>
@@ -18016,7 +19609,7 @@
           <p:cNvPr id="21" name="TextBox 20">
             <a:extLst>
               <a:ext uri="{FF2B5EF4-FFF2-40B4-BE49-F238E27FC236}">
-                <a16:creationId xmlns="" xmlns:a16="http://schemas.microsoft.com/office/drawing/2014/main" id="{BC0B62D1-7DD4-4424-2EC9-699F6879FAF0}"/>
+                <a16:creationId xmlns:a16="http://schemas.microsoft.com/office/drawing/2014/main" id="{BC0B62D1-7DD4-4424-2EC9-699F6879FAF0}"/>
               </a:ext>
             </a:extLst>
           </p:cNvPr>
@@ -18040,7 +19633,7 @@
           <a:lstStyle/>
           <a:p>
             <a:r>
-              <a:rPr lang="en-US" sz="1100" dirty="0" err="1" smtClean="0"/>
+              <a:rPr lang="en-US" sz="1100" dirty="0" err="1"/>
               <a:t>ctrlrWindowManager</a:t>
             </a:r>
             <a:endParaRPr lang="en-US" sz="1100" dirty="0"/>
@@ -18052,7 +19645,7 @@
           <p:cNvPr id="22" name="TextBox 21">
             <a:extLst>
               <a:ext uri="{FF2B5EF4-FFF2-40B4-BE49-F238E27FC236}">
-                <a16:creationId xmlns="" xmlns:a16="http://schemas.microsoft.com/office/drawing/2014/main" id="{BC0B62D1-7DD4-4424-2EC9-699F6879FAF0}"/>
+                <a16:creationId xmlns:a16="http://schemas.microsoft.com/office/drawing/2014/main" id="{BC0B62D1-7DD4-4424-2EC9-699F6879FAF0}"/>
               </a:ext>
             </a:extLst>
           </p:cNvPr>
@@ -18076,26 +19669,25 @@
           <a:lstStyle/>
           <a:p>
             <a:r>
-              <a:rPr lang="en-US" sz="1100" dirty="0" smtClean="0"/>
+              <a:rPr lang="en-US" sz="1100" dirty="0"/>
               <a:t>5,3,201: </a:t>
             </a:r>
             <a:r>
-              <a:rPr lang="en-US" sz="1100" dirty="0" err="1" smtClean="0"/>
+              <a:rPr lang="en-US" sz="1100" dirty="0" err="1"/>
               <a:t>setDefaults</a:t>
             </a:r>
             <a:r>
-              <a:rPr lang="en-US" sz="1100" dirty="0" smtClean="0"/>
+              <a:rPr lang="en-US" sz="1100" dirty="0"/>
               <a:t> (</a:t>
             </a:r>
             <a:r>
-              <a:rPr lang="en-US" sz="1100" dirty="0" err="1" smtClean="0"/>
+              <a:rPr lang="en-US" sz="1100" dirty="0" err="1"/>
               <a:t>CtrlrProperties</a:t>
             </a:r>
             <a:r>
-              <a:rPr lang="en-US" sz="1100" dirty="0" smtClean="0"/>
+              <a:rPr lang="en-US" sz="1100" dirty="0"/>
               <a:t>)</a:t>
             </a:r>
-            <a:endParaRPr lang="en-US" sz="1100" dirty="0"/>
           </a:p>
         </p:txBody>
       </p:sp>
@@ -18104,7 +19696,7 @@
           <p:cNvPr id="24" name="TextBox 23">
             <a:extLst>
               <a:ext uri="{FF2B5EF4-FFF2-40B4-BE49-F238E27FC236}">
-                <a16:creationId xmlns="" xmlns:a16="http://schemas.microsoft.com/office/drawing/2014/main" id="{E1A455F8-7F94-5011-264C-D2123CEA2B7D}"/>
+                <a16:creationId xmlns:a16="http://schemas.microsoft.com/office/drawing/2014/main" id="{E1A455F8-7F94-5011-264C-D2123CEA2B7D}"/>
               </a:ext>
             </a:extLst>
           </p:cNvPr>
@@ -18128,7 +19720,7 @@
           <a:lstStyle/>
           <a:p>
             <a:r>
-              <a:rPr lang="en-US" sz="800" dirty="0" smtClean="0"/>
+              <a:rPr lang="en-US" sz="800" dirty="0"/>
               <a:t>case </a:t>
             </a:r>
             <a:r>
@@ -18195,7 +19787,7 @@
           <p:cNvPr id="25" name="Arrow: Down 11">
             <a:extLst>
               <a:ext uri="{FF2B5EF4-FFF2-40B4-BE49-F238E27FC236}">
-                <a16:creationId xmlns="" xmlns:a16="http://schemas.microsoft.com/office/drawing/2014/main" id="{1193628C-2325-9596-DC74-198D9364B4DF}"/>
+                <a16:creationId xmlns:a16="http://schemas.microsoft.com/office/drawing/2014/main" id="{1193628C-2325-9596-DC74-198D9364B4DF}"/>
               </a:ext>
             </a:extLst>
           </p:cNvPr>
@@ -18241,7 +19833,7 @@
           <p:cNvPr id="26" name="TextBox 25">
             <a:extLst>
               <a:ext uri="{FF2B5EF4-FFF2-40B4-BE49-F238E27FC236}">
-                <a16:creationId xmlns="" xmlns:a16="http://schemas.microsoft.com/office/drawing/2014/main" id="{BC0B62D1-7DD4-4424-2EC9-699F6879FAF0}"/>
+                <a16:creationId xmlns:a16="http://schemas.microsoft.com/office/drawing/2014/main" id="{BC0B62D1-7DD4-4424-2EC9-699F6879FAF0}"/>
               </a:ext>
             </a:extLst>
           </p:cNvPr>
@@ -18265,26 +19857,25 @@
           <a:lstStyle/>
           <a:p>
             <a:r>
-              <a:rPr lang="en-US" sz="1100" dirty="0" smtClean="0"/>
+              <a:rPr lang="en-US" sz="1100" dirty="0"/>
               <a:t>new </a:t>
             </a:r>
             <a:r>
-              <a:rPr lang="en-US" sz="1100" dirty="0" err="1" smtClean="0"/>
+              <a:rPr lang="en-US" sz="1100" dirty="0" err="1"/>
               <a:t>CtrlrAbout</a:t>
             </a:r>
             <a:r>
-              <a:rPr lang="en-US" sz="1100" dirty="0" smtClean="0"/>
+              <a:rPr lang="en-US" sz="1100" dirty="0"/>
               <a:t> component (defined in </a:t>
             </a:r>
             <a:r>
-              <a:rPr lang="en-US" sz="1100" dirty="0" err="1" smtClean="0"/>
+              <a:rPr lang="en-US" sz="1100" dirty="0" err="1"/>
               <a:t>CtrlrAbout.h</a:t>
             </a:r>
             <a:r>
-              <a:rPr lang="en-US" sz="1100" dirty="0" smtClean="0"/>
+              <a:rPr lang="en-US" sz="1100" dirty="0"/>
               <a:t> which is included in CtrlrEditorApplicationCommandsHandler.cpp </a:t>
             </a:r>
-            <a:endParaRPr lang="en-US" sz="1100" dirty="0"/>
           </a:p>
         </p:txBody>
       </p:sp>
@@ -18293,7 +19884,7 @@
           <p:cNvPr id="27" name="Straight Arrow Connector 26">
             <a:extLst>
               <a:ext uri="{FF2B5EF4-FFF2-40B4-BE49-F238E27FC236}">
-                <a16:creationId xmlns="" xmlns:a16="http://schemas.microsoft.com/office/drawing/2014/main" id="{78C04754-4783-995F-518C-0058DD519F49}"/>
+                <a16:creationId xmlns:a16="http://schemas.microsoft.com/office/drawing/2014/main" id="{78C04754-4783-995F-518C-0058DD519F49}"/>
               </a:ext>
             </a:extLst>
           </p:cNvPr>
@@ -18494,7 +20085,7 @@
           <p:cNvPr id="29" name="Straight Arrow Connector 28">
             <a:extLst>
               <a:ext uri="{FF2B5EF4-FFF2-40B4-BE49-F238E27FC236}">
-                <a16:creationId xmlns="" xmlns:a16="http://schemas.microsoft.com/office/drawing/2014/main" id="{3289ED94-AB7D-1B50-1BEE-82236925A3DE}"/>
+                <a16:creationId xmlns:a16="http://schemas.microsoft.com/office/drawing/2014/main" id="{3289ED94-AB7D-1B50-1BEE-82236925A3DE}"/>
               </a:ext>
             </a:extLst>
           </p:cNvPr>
@@ -18536,7 +20127,7 @@
           <p:cNvPr id="32" name="Rectangle: Folded Corner 4">
             <a:extLst>
               <a:ext uri="{FF2B5EF4-FFF2-40B4-BE49-F238E27FC236}">
-                <a16:creationId xmlns="" xmlns:a16="http://schemas.microsoft.com/office/drawing/2014/main" id="{36A9EF15-47B6-B542-B231-318DC84C4EE4}"/>
+                <a16:creationId xmlns:a16="http://schemas.microsoft.com/office/drawing/2014/main" id="{36A9EF15-47B6-B542-B231-318DC84C4EE4}"/>
               </a:ext>
             </a:extLst>
           </p:cNvPr>
@@ -18582,7 +20173,7 @@
           <p:cNvPr id="33" name="TextBox 32">
             <a:extLst>
               <a:ext uri="{FF2B5EF4-FFF2-40B4-BE49-F238E27FC236}">
-                <a16:creationId xmlns="" xmlns:a16="http://schemas.microsoft.com/office/drawing/2014/main" id="{BC0B62D1-7DD4-4424-2EC9-699F6879FAF0}"/>
+                <a16:creationId xmlns:a16="http://schemas.microsoft.com/office/drawing/2014/main" id="{BC0B62D1-7DD4-4424-2EC9-699F6879FAF0}"/>
               </a:ext>
             </a:extLst>
           </p:cNvPr>
@@ -18606,7 +20197,7 @@
           <a:lstStyle/>
           <a:p>
             <a:r>
-              <a:rPr lang="en-US" sz="1100" dirty="0" err="1" smtClean="0"/>
+              <a:rPr lang="en-US" sz="1100" dirty="0" err="1"/>
               <a:t>ctrlrDocumentPanel</a:t>
             </a:r>
             <a:endParaRPr lang="en-US" sz="1100" dirty="0"/>
@@ -18647,7 +20238,7 @@
           <p:cNvPr id="35" name="Straight Arrow Connector 34">
             <a:extLst>
               <a:ext uri="{FF2B5EF4-FFF2-40B4-BE49-F238E27FC236}">
-                <a16:creationId xmlns="" xmlns:a16="http://schemas.microsoft.com/office/drawing/2014/main" id="{BC9A2CC4-B749-9F04-65EB-162B6943BDA4}"/>
+                <a16:creationId xmlns:a16="http://schemas.microsoft.com/office/drawing/2014/main" id="{BC9A2CC4-B749-9F04-65EB-162B6943BDA4}"/>
               </a:ext>
             </a:extLst>
           </p:cNvPr>
@@ -18686,7 +20277,7 @@
           <p:cNvPr id="36" name="Rectangle: Folded Corner 13">
             <a:extLst>
               <a:ext uri="{FF2B5EF4-FFF2-40B4-BE49-F238E27FC236}">
-                <a16:creationId xmlns="" xmlns:a16="http://schemas.microsoft.com/office/drawing/2014/main" id="{BE75F13C-EE95-C1B9-172D-77A52EB80836}"/>
+                <a16:creationId xmlns:a16="http://schemas.microsoft.com/office/drawing/2014/main" id="{BE75F13C-EE95-C1B9-172D-77A52EB80836}"/>
               </a:ext>
             </a:extLst>
           </p:cNvPr>
@@ -18732,7 +20323,7 @@
           <p:cNvPr id="37" name="TextBox 36">
             <a:extLst>
               <a:ext uri="{FF2B5EF4-FFF2-40B4-BE49-F238E27FC236}">
-                <a16:creationId xmlns="" xmlns:a16="http://schemas.microsoft.com/office/drawing/2014/main" id="{2DD4BD2E-13F7-A68E-718A-D953DC7D4298}"/>
+                <a16:creationId xmlns:a16="http://schemas.microsoft.com/office/drawing/2014/main" id="{2DD4BD2E-13F7-A68E-718A-D953DC7D4298}"/>
               </a:ext>
             </a:extLst>
           </p:cNvPr>
@@ -18771,7 +20362,7 @@
           <p:cNvPr id="38" name="Straight Arrow Connector 37">
             <a:extLst>
               <a:ext uri="{FF2B5EF4-FFF2-40B4-BE49-F238E27FC236}">
-                <a16:creationId xmlns="" xmlns:a16="http://schemas.microsoft.com/office/drawing/2014/main" id="{BC9A2CC4-B749-9F04-65EB-162B6943BDA4}"/>
+                <a16:creationId xmlns:a16="http://schemas.microsoft.com/office/drawing/2014/main" id="{BC9A2CC4-B749-9F04-65EB-162B6943BDA4}"/>
               </a:ext>
             </a:extLst>
           </p:cNvPr>
@@ -18810,7 +20401,7 @@
           <p:cNvPr id="39" name="Straight Arrow Connector 38">
             <a:extLst>
               <a:ext uri="{FF2B5EF4-FFF2-40B4-BE49-F238E27FC236}">
-                <a16:creationId xmlns="" xmlns:a16="http://schemas.microsoft.com/office/drawing/2014/main" id="{3289ED94-AB7D-1B50-1BEE-82236925A3DE}"/>
+                <a16:creationId xmlns:a16="http://schemas.microsoft.com/office/drawing/2014/main" id="{3289ED94-AB7D-1B50-1BEE-82236925A3DE}"/>
               </a:ext>
             </a:extLst>
           </p:cNvPr>
@@ -18882,7 +20473,7 @@
           <p:cNvPr id="2" name="TextBox 1">
             <a:extLst>
               <a:ext uri="{FF2B5EF4-FFF2-40B4-BE49-F238E27FC236}">
-                <a16:creationId xmlns="" xmlns:a16="http://schemas.microsoft.com/office/drawing/2014/main" id="{1CD60342-2F70-F14D-21F6-C2F8D6092854}"/>
+                <a16:creationId xmlns:a16="http://schemas.microsoft.com/office/drawing/2014/main" id="{1CD60342-2F70-F14D-21F6-C2F8D6092854}"/>
               </a:ext>
             </a:extLst>
           </p:cNvPr>
@@ -18906,10 +20497,9 @@
           <a:lstStyle/>
           <a:p>
             <a:r>
-              <a:rPr lang="en-US" dirty="0" smtClean="0"/>
+              <a:rPr lang="en-US" dirty="0"/>
               <a:t>Application structure</a:t>
             </a:r>
-            <a:endParaRPr lang="en-US" dirty="0"/>
           </a:p>
         </p:txBody>
       </p:sp>
@@ -18959,7 +20549,7 @@
           <p:cNvPr id="4" name="TextBox 3">
             <a:extLst>
               <a:ext uri="{FF2B5EF4-FFF2-40B4-BE49-F238E27FC236}">
-                <a16:creationId xmlns="" xmlns:a16="http://schemas.microsoft.com/office/drawing/2014/main" id="{0DCD37EA-FC92-54AD-88FC-B290BC6D9174}"/>
+                <a16:creationId xmlns:a16="http://schemas.microsoft.com/office/drawing/2014/main" id="{0DCD37EA-FC92-54AD-88FC-B290BC6D9174}"/>
               </a:ext>
             </a:extLst>
           </p:cNvPr>
@@ -18983,7 +20573,7 @@
           <a:lstStyle/>
           <a:p>
             <a:r>
-              <a:rPr lang="en-US" dirty="0" smtClean="0">
+              <a:rPr lang="en-US" dirty="0">
                 <a:solidFill>
                   <a:srgbClr val="C00000"/>
                 </a:solidFill>
@@ -18991,7 +20581,7 @@
               <a:t>Picture from Damien. I think that </a:t>
             </a:r>
             <a:r>
-              <a:rPr lang="en-US" dirty="0" err="1" smtClean="0">
+              <a:rPr lang="en-US" dirty="0" err="1">
                 <a:solidFill>
                   <a:srgbClr val="C00000"/>
                 </a:solidFill>
@@ -18999,7 +20589,7 @@
               <a:t>CtrlrEditor</a:t>
             </a:r>
             <a:r>
-              <a:rPr lang="en-US" dirty="0" smtClean="0">
+              <a:rPr lang="en-US" dirty="0">
                 <a:solidFill>
                   <a:srgbClr val="C00000"/>
                 </a:solidFill>
@@ -19007,7 +20597,7 @@
               <a:t> and </a:t>
             </a:r>
             <a:r>
-              <a:rPr lang="en-US" dirty="0" err="1" smtClean="0">
+              <a:rPr lang="en-US" dirty="0" err="1">
                 <a:solidFill>
                   <a:srgbClr val="C00000"/>
                 </a:solidFill>
@@ -19015,18 +20605,13 @@
               <a:t>CtrlrDocumentPanel</a:t>
             </a:r>
             <a:r>
-              <a:rPr lang="en-US" dirty="0" smtClean="0">
+              <a:rPr lang="en-US" dirty="0">
                 <a:solidFill>
                   <a:srgbClr val="C00000"/>
                 </a:solidFill>
               </a:rPr>
               <a:t> are inverted. TBC</a:t>
             </a:r>
-            <a:endParaRPr lang="en-US" dirty="0">
-              <a:solidFill>
-                <a:srgbClr val="C00000"/>
-              </a:solidFill>
-            </a:endParaRPr>
           </a:p>
         </p:txBody>
       </p:sp>
@@ -19065,7 +20650,7 @@
           <p:cNvPr id="2" name="TextBox 1">
             <a:extLst>
               <a:ext uri="{FF2B5EF4-FFF2-40B4-BE49-F238E27FC236}">
-                <a16:creationId xmlns="" xmlns:a16="http://schemas.microsoft.com/office/drawing/2014/main" id="{1CD60342-2F70-F14D-21F6-C2F8D6092854}"/>
+                <a16:creationId xmlns:a16="http://schemas.microsoft.com/office/drawing/2014/main" id="{1CD60342-2F70-F14D-21F6-C2F8D6092854}"/>
               </a:ext>
             </a:extLst>
           </p:cNvPr>
@@ -19089,12 +20674,8 @@
           <a:lstStyle/>
           <a:p>
             <a:r>
-              <a:rPr lang="en-US" dirty="0" smtClean="0"/>
-              <a:t>Ctrlr application </a:t>
-            </a:r>
-            <a:r>
               <a:rPr lang="en-US" dirty="0"/>
-              <a:t>properties</a:t>
+              <a:t>Ctrlr application properties</a:t>
             </a:r>
           </a:p>
         </p:txBody>
@@ -19104,7 +20685,7 @@
           <p:cNvPr id="3" name="Rectangle: Folded Corner 2">
             <a:extLst>
               <a:ext uri="{FF2B5EF4-FFF2-40B4-BE49-F238E27FC236}">
-                <a16:creationId xmlns="" xmlns:a16="http://schemas.microsoft.com/office/drawing/2014/main" id="{71489425-E604-DED0-0EC3-234871AA7B66}"/>
+                <a16:creationId xmlns:a16="http://schemas.microsoft.com/office/drawing/2014/main" id="{71489425-E604-DED0-0EC3-234871AA7B66}"/>
               </a:ext>
             </a:extLst>
           </p:cNvPr>
@@ -19150,7 +20731,7 @@
           <p:cNvPr id="4" name="TextBox 3">
             <a:extLst>
               <a:ext uri="{FF2B5EF4-FFF2-40B4-BE49-F238E27FC236}">
-                <a16:creationId xmlns="" xmlns:a16="http://schemas.microsoft.com/office/drawing/2014/main" id="{7E88EFD6-127A-381B-555B-327C19DC289B}"/>
+                <a16:creationId xmlns:a16="http://schemas.microsoft.com/office/drawing/2014/main" id="{7E88EFD6-127A-381B-555B-327C19DC289B}"/>
               </a:ext>
             </a:extLst>
           </p:cNvPr>
@@ -19189,7 +20770,7 @@
           <p:cNvPr id="5" name="Rectangle: Folded Corner 4">
             <a:extLst>
               <a:ext uri="{FF2B5EF4-FFF2-40B4-BE49-F238E27FC236}">
-                <a16:creationId xmlns="" xmlns:a16="http://schemas.microsoft.com/office/drawing/2014/main" id="{4914F5C6-EBFC-CE22-D774-C1421C8246EA}"/>
+                <a16:creationId xmlns:a16="http://schemas.microsoft.com/office/drawing/2014/main" id="{4914F5C6-EBFC-CE22-D774-C1421C8246EA}"/>
               </a:ext>
             </a:extLst>
           </p:cNvPr>
@@ -19235,7 +20816,7 @@
           <p:cNvPr id="6" name="TextBox 5">
             <a:extLst>
               <a:ext uri="{FF2B5EF4-FFF2-40B4-BE49-F238E27FC236}">
-                <a16:creationId xmlns="" xmlns:a16="http://schemas.microsoft.com/office/drawing/2014/main" id="{C65147B6-9927-3FBC-0ACF-10B922E35875}"/>
+                <a16:creationId xmlns:a16="http://schemas.microsoft.com/office/drawing/2014/main" id="{C65147B6-9927-3FBC-0ACF-10B922E35875}"/>
               </a:ext>
             </a:extLst>
           </p:cNvPr>
@@ -19274,7 +20855,7 @@
           <p:cNvPr id="7" name="TextBox 6">
             <a:extLst>
               <a:ext uri="{FF2B5EF4-FFF2-40B4-BE49-F238E27FC236}">
-                <a16:creationId xmlns="" xmlns:a16="http://schemas.microsoft.com/office/drawing/2014/main" id="{EDAFD43C-2A38-D9DE-8FEE-C747E1A61C7A}"/>
+                <a16:creationId xmlns:a16="http://schemas.microsoft.com/office/drawing/2014/main" id="{EDAFD43C-2A38-D9DE-8FEE-C747E1A61C7A}"/>
               </a:ext>
             </a:extLst>
           </p:cNvPr>
@@ -19344,7 +20925,7 @@
           <p:cNvPr id="2" name="TextBox 1">
             <a:extLst>
               <a:ext uri="{FF2B5EF4-FFF2-40B4-BE49-F238E27FC236}">
-                <a16:creationId xmlns="" xmlns:a16="http://schemas.microsoft.com/office/drawing/2014/main" id="{1CD60342-2F70-F14D-21F6-C2F8D6092854}"/>
+                <a16:creationId xmlns:a16="http://schemas.microsoft.com/office/drawing/2014/main" id="{1CD60342-2F70-F14D-21F6-C2F8D6092854}"/>
               </a:ext>
             </a:extLst>
           </p:cNvPr>
@@ -19368,10 +20949,9 @@
           <a:lstStyle/>
           <a:p>
             <a:r>
-              <a:rPr lang="en-US" dirty="0" smtClean="0"/>
+              <a:rPr lang="en-US" dirty="0"/>
               <a:t>About</a:t>
             </a:r>
-            <a:endParaRPr lang="en-US" dirty="0"/>
           </a:p>
         </p:txBody>
       </p:sp>
@@ -19380,7 +20960,7 @@
           <p:cNvPr id="3" name="Rectangle: Folded Corner 2">
             <a:extLst>
               <a:ext uri="{FF2B5EF4-FFF2-40B4-BE49-F238E27FC236}">
-                <a16:creationId xmlns="" xmlns:a16="http://schemas.microsoft.com/office/drawing/2014/main" id="{71489425-E604-DED0-0EC3-234871AA7B66}"/>
+                <a16:creationId xmlns:a16="http://schemas.microsoft.com/office/drawing/2014/main" id="{71489425-E604-DED0-0EC3-234871AA7B66}"/>
               </a:ext>
             </a:extLst>
           </p:cNvPr>
@@ -19426,7 +21006,7 @@
           <p:cNvPr id="4" name="TextBox 3">
             <a:extLst>
               <a:ext uri="{FF2B5EF4-FFF2-40B4-BE49-F238E27FC236}">
-                <a16:creationId xmlns="" xmlns:a16="http://schemas.microsoft.com/office/drawing/2014/main" id="{7E88EFD6-127A-381B-555B-327C19DC289B}"/>
+                <a16:creationId xmlns:a16="http://schemas.microsoft.com/office/drawing/2014/main" id="{7E88EFD6-127A-381B-555B-327C19DC289B}"/>
               </a:ext>
             </a:extLst>
           </p:cNvPr>
@@ -19450,11 +21030,11 @@
           <a:lstStyle/>
           <a:p>
             <a:r>
-              <a:rPr lang="en-US" sz="1100" i="1" dirty="0" err="1" smtClean="0"/>
+              <a:rPr lang="en-US" sz="1100" i="1" dirty="0" err="1"/>
               <a:t>CtrlrAbout.h</a:t>
             </a:r>
             <a:r>
-              <a:rPr lang="en-US" sz="1100" i="1" dirty="0" smtClean="0"/>
+              <a:rPr lang="en-US" sz="1100" i="1" dirty="0"/>
               <a:t> </a:t>
             </a:r>
             <a:r>
@@ -19469,7 +21049,7 @@
           <p:cNvPr id="5" name="Rectangle: Folded Corner 4">
             <a:extLst>
               <a:ext uri="{FF2B5EF4-FFF2-40B4-BE49-F238E27FC236}">
-                <a16:creationId xmlns="" xmlns:a16="http://schemas.microsoft.com/office/drawing/2014/main" id="{4914F5C6-EBFC-CE22-D774-C1421C8246EA}"/>
+                <a16:creationId xmlns:a16="http://schemas.microsoft.com/office/drawing/2014/main" id="{4914F5C6-EBFC-CE22-D774-C1421C8246EA}"/>
               </a:ext>
             </a:extLst>
           </p:cNvPr>
@@ -19515,7 +21095,7 @@
           <p:cNvPr id="6" name="TextBox 5">
             <a:extLst>
               <a:ext uri="{FF2B5EF4-FFF2-40B4-BE49-F238E27FC236}">
-                <a16:creationId xmlns="" xmlns:a16="http://schemas.microsoft.com/office/drawing/2014/main" id="{C65147B6-9927-3FBC-0ACF-10B922E35875}"/>
+                <a16:creationId xmlns:a16="http://schemas.microsoft.com/office/drawing/2014/main" id="{C65147B6-9927-3FBC-0ACF-10B922E35875}"/>
               </a:ext>
             </a:extLst>
           </p:cNvPr>
@@ -19539,7 +21119,7 @@
           <a:lstStyle/>
           <a:p>
             <a:r>
-              <a:rPr lang="en-US" sz="1100" i="1" dirty="0" smtClean="0"/>
+              <a:rPr lang="en-US" sz="1100" i="1" dirty="0"/>
               <a:t>CtrlrAbout.cpp </a:t>
             </a:r>
             <a:r>
@@ -19554,7 +21134,7 @@
           <p:cNvPr id="7" name="TextBox 6">
             <a:extLst>
               <a:ext uri="{FF2B5EF4-FFF2-40B4-BE49-F238E27FC236}">
-                <a16:creationId xmlns="" xmlns:a16="http://schemas.microsoft.com/office/drawing/2014/main" id="{EDAFD43C-2A38-D9DE-8FEE-C747E1A61C7A}"/>
+                <a16:creationId xmlns:a16="http://schemas.microsoft.com/office/drawing/2014/main" id="{EDAFD43C-2A38-D9DE-8FEE-C747E1A61C7A}"/>
               </a:ext>
             </a:extLst>
           </p:cNvPr>
@@ -19612,16 +21192,15 @@
           <a:lstStyle/>
           <a:p>
             <a:r>
-              <a:rPr lang="en-US" dirty="0" smtClean="0"/>
+              <a:rPr lang="en-US" dirty="0"/>
               <a:t>!! To check possibility to display some properties from the panel in the About window !!</a:t>
             </a:r>
           </a:p>
           <a:p>
             <a:r>
-              <a:rPr lang="en-US" dirty="0" smtClean="0"/>
+              <a:rPr lang="en-US" dirty="0"/>
               <a:t>This was in 5.3.201 (instance). Still in 5.6.34?</a:t>
             </a:r>
-            <a:endParaRPr lang="en-US" dirty="0"/>
           </a:p>
         </p:txBody>
       </p:sp>
@@ -19660,7 +21239,7 @@
           <p:cNvPr id="2" name="TextBox 1">
             <a:extLst>
               <a:ext uri="{FF2B5EF4-FFF2-40B4-BE49-F238E27FC236}">
-                <a16:creationId xmlns="" xmlns:a16="http://schemas.microsoft.com/office/drawing/2014/main" id="{1CD60342-2F70-F14D-21F6-C2F8D6092854}"/>
+                <a16:creationId xmlns:a16="http://schemas.microsoft.com/office/drawing/2014/main" id="{1CD60342-2F70-F14D-21F6-C2F8D6092854}"/>
               </a:ext>
             </a:extLst>
           </p:cNvPr>
@@ -19695,7 +21274,7 @@
           <p:cNvPr id="3" name="Rectangle: Folded Corner 2">
             <a:extLst>
               <a:ext uri="{FF2B5EF4-FFF2-40B4-BE49-F238E27FC236}">
-                <a16:creationId xmlns="" xmlns:a16="http://schemas.microsoft.com/office/drawing/2014/main" id="{71489425-E604-DED0-0EC3-234871AA7B66}"/>
+                <a16:creationId xmlns:a16="http://schemas.microsoft.com/office/drawing/2014/main" id="{71489425-E604-DED0-0EC3-234871AA7B66}"/>
               </a:ext>
             </a:extLst>
           </p:cNvPr>
@@ -19741,7 +21320,7 @@
           <p:cNvPr id="4" name="TextBox 3">
             <a:extLst>
               <a:ext uri="{FF2B5EF4-FFF2-40B4-BE49-F238E27FC236}">
-                <a16:creationId xmlns="" xmlns:a16="http://schemas.microsoft.com/office/drawing/2014/main" id="{7E88EFD6-127A-381B-555B-327C19DC289B}"/>
+                <a16:creationId xmlns:a16="http://schemas.microsoft.com/office/drawing/2014/main" id="{7E88EFD6-127A-381B-555B-327C19DC289B}"/>
               </a:ext>
             </a:extLst>
           </p:cNvPr>
@@ -19785,7 +21364,7 @@
           <p:cNvPr id="5" name="Rectangle: Folded Corner 4">
             <a:extLst>
               <a:ext uri="{FF2B5EF4-FFF2-40B4-BE49-F238E27FC236}">
-                <a16:creationId xmlns="" xmlns:a16="http://schemas.microsoft.com/office/drawing/2014/main" id="{4914F5C6-EBFC-CE22-D774-C1421C8246EA}"/>
+                <a16:creationId xmlns:a16="http://schemas.microsoft.com/office/drawing/2014/main" id="{4914F5C6-EBFC-CE22-D774-C1421C8246EA}"/>
               </a:ext>
             </a:extLst>
           </p:cNvPr>
@@ -19831,7 +21410,7 @@
           <p:cNvPr id="6" name="TextBox 5">
             <a:extLst>
               <a:ext uri="{FF2B5EF4-FFF2-40B4-BE49-F238E27FC236}">
-                <a16:creationId xmlns="" xmlns:a16="http://schemas.microsoft.com/office/drawing/2014/main" id="{C65147B6-9927-3FBC-0ACF-10B922E35875}"/>
+                <a16:creationId xmlns:a16="http://schemas.microsoft.com/office/drawing/2014/main" id="{C65147B6-9927-3FBC-0ACF-10B922E35875}"/>
               </a:ext>
             </a:extLst>
           </p:cNvPr>
@@ -19875,7 +21454,7 @@
           <p:cNvPr id="7" name="TextBox 6">
             <a:extLst>
               <a:ext uri="{FF2B5EF4-FFF2-40B4-BE49-F238E27FC236}">
-                <a16:creationId xmlns="" xmlns:a16="http://schemas.microsoft.com/office/drawing/2014/main" id="{D3445BE2-AF53-02C8-6E54-185E0DCD9035}"/>
+                <a16:creationId xmlns:a16="http://schemas.microsoft.com/office/drawing/2014/main" id="{D3445BE2-AF53-02C8-6E54-185E0DCD9035}"/>
               </a:ext>
             </a:extLst>
           </p:cNvPr>
@@ -19915,7 +21494,7 @@
           <p:cNvPr id="9" name="Rectangle: Folded Corner 8">
             <a:extLst>
               <a:ext uri="{FF2B5EF4-FFF2-40B4-BE49-F238E27FC236}">
-                <a16:creationId xmlns="" xmlns:a16="http://schemas.microsoft.com/office/drawing/2014/main" id="{4BB6A5F8-C1EE-6935-074D-4B61E614A675}"/>
+                <a16:creationId xmlns:a16="http://schemas.microsoft.com/office/drawing/2014/main" id="{4BB6A5F8-C1EE-6935-074D-4B61E614A675}"/>
               </a:ext>
             </a:extLst>
           </p:cNvPr>
@@ -19961,7 +21540,7 @@
           <p:cNvPr id="10" name="TextBox 9">
             <a:extLst>
               <a:ext uri="{FF2B5EF4-FFF2-40B4-BE49-F238E27FC236}">
-                <a16:creationId xmlns="" xmlns:a16="http://schemas.microsoft.com/office/drawing/2014/main" id="{24B6F3E5-4E23-4794-D7AB-FAC3D63A7B38}"/>
+                <a16:creationId xmlns:a16="http://schemas.microsoft.com/office/drawing/2014/main" id="{24B6F3E5-4E23-4794-D7AB-FAC3D63A7B38}"/>
               </a:ext>
             </a:extLst>
           </p:cNvPr>
@@ -20000,7 +21579,7 @@
           <p:cNvPr id="12" name="Arrow: Down 11">
             <a:extLst>
               <a:ext uri="{FF2B5EF4-FFF2-40B4-BE49-F238E27FC236}">
-                <a16:creationId xmlns="" xmlns:a16="http://schemas.microsoft.com/office/drawing/2014/main" id="{1193628C-2325-9596-DC74-198D9364B4DF}"/>
+                <a16:creationId xmlns:a16="http://schemas.microsoft.com/office/drawing/2014/main" id="{1193628C-2325-9596-DC74-198D9364B4DF}"/>
               </a:ext>
             </a:extLst>
           </p:cNvPr>
@@ -20046,7 +21625,7 @@
           <p:cNvPr id="13" name="TextBox 12">
             <a:extLst>
               <a:ext uri="{FF2B5EF4-FFF2-40B4-BE49-F238E27FC236}">
-                <a16:creationId xmlns="" xmlns:a16="http://schemas.microsoft.com/office/drawing/2014/main" id="{CC2BCA07-60A0-FEB2-6F5D-F5FEACF25CF4}"/>
+                <a16:creationId xmlns:a16="http://schemas.microsoft.com/office/drawing/2014/main" id="{CC2BCA07-60A0-FEB2-6F5D-F5FEACF25CF4}"/>
               </a:ext>
             </a:extLst>
           </p:cNvPr>
@@ -20085,7 +21664,7 @@
           <p:cNvPr id="15" name="TextBox 14">
             <a:extLst>
               <a:ext uri="{FF2B5EF4-FFF2-40B4-BE49-F238E27FC236}">
-                <a16:creationId xmlns="" xmlns:a16="http://schemas.microsoft.com/office/drawing/2014/main" id="{3A5E0D7B-A823-C6AB-32AF-A34CC394CEF7}"/>
+                <a16:creationId xmlns:a16="http://schemas.microsoft.com/office/drawing/2014/main" id="{3A5E0D7B-A823-C6AB-32AF-A34CC394CEF7}"/>
               </a:ext>
             </a:extLst>
           </p:cNvPr>
@@ -21713,7 +23292,7 @@
           <p:cNvPr id="17" name="TextBox 16">
             <a:extLst>
               <a:ext uri="{FF2B5EF4-FFF2-40B4-BE49-F238E27FC236}">
-                <a16:creationId xmlns="" xmlns:a16="http://schemas.microsoft.com/office/drawing/2014/main" id="{64A3BC44-B8DB-0031-B900-2B52EEA4408E}"/>
+                <a16:creationId xmlns:a16="http://schemas.microsoft.com/office/drawing/2014/main" id="{64A3BC44-B8DB-0031-B900-2B52EEA4408E}"/>
               </a:ext>
             </a:extLst>
           </p:cNvPr>
@@ -22318,7 +23897,7 @@
           <p:cNvPr id="18" name="TextBox 17">
             <a:extLst>
               <a:ext uri="{FF2B5EF4-FFF2-40B4-BE49-F238E27FC236}">
-                <a16:creationId xmlns="" xmlns:a16="http://schemas.microsoft.com/office/drawing/2014/main" id="{E3EF8F2F-B63E-DED7-83B5-712FC3845B2C}"/>
+                <a16:creationId xmlns:a16="http://schemas.microsoft.com/office/drawing/2014/main" id="{E3EF8F2F-B63E-DED7-83B5-712FC3845B2C}"/>
               </a:ext>
             </a:extLst>
           </p:cNvPr>
@@ -22357,7 +23936,7 @@
           <p:cNvPr id="20" name="Picture 19">
             <a:extLst>
               <a:ext uri="{FF2B5EF4-FFF2-40B4-BE49-F238E27FC236}">
-                <a16:creationId xmlns="" xmlns:a16="http://schemas.microsoft.com/office/drawing/2014/main" id="{0AA24125-0F37-DDBE-EC6E-EAEBC4497027}"/>
+                <a16:creationId xmlns:a16="http://schemas.microsoft.com/office/drawing/2014/main" id="{0AA24125-0F37-DDBE-EC6E-EAEBC4497027}"/>
               </a:ext>
             </a:extLst>
           </p:cNvPr>
@@ -22387,7 +23966,7 @@
           <p:cNvPr id="21" name="TextBox 20">
             <a:extLst>
               <a:ext uri="{FF2B5EF4-FFF2-40B4-BE49-F238E27FC236}">
-                <a16:creationId xmlns="" xmlns:a16="http://schemas.microsoft.com/office/drawing/2014/main" id="{3B97A7C9-8179-4E3B-452F-84D6AE376DB8}"/>
+                <a16:creationId xmlns:a16="http://schemas.microsoft.com/office/drawing/2014/main" id="{3B97A7C9-8179-4E3B-452F-84D6AE376DB8}"/>
               </a:ext>
             </a:extLst>
           </p:cNvPr>
@@ -22435,7 +24014,7 @@
           <p:cNvPr id="22" name="TextBox 21">
             <a:extLst>
               <a:ext uri="{FF2B5EF4-FFF2-40B4-BE49-F238E27FC236}">
-                <a16:creationId xmlns="" xmlns:a16="http://schemas.microsoft.com/office/drawing/2014/main" id="{B9526594-EA68-19BC-F1EA-9CA869B6BE07}"/>
+                <a16:creationId xmlns:a16="http://schemas.microsoft.com/office/drawing/2014/main" id="{B9526594-EA68-19BC-F1EA-9CA869B6BE07}"/>
               </a:ext>
             </a:extLst>
           </p:cNvPr>
@@ -22488,7 +24067,7 @@
           <p:cNvPr id="23" name="TextBox 22">
             <a:extLst>
               <a:ext uri="{FF2B5EF4-FFF2-40B4-BE49-F238E27FC236}">
-                <a16:creationId xmlns="" xmlns:a16="http://schemas.microsoft.com/office/drawing/2014/main" id="{C1733802-2C23-EE54-D727-13F8837FF0FC}"/>
+                <a16:creationId xmlns:a16="http://schemas.microsoft.com/office/drawing/2014/main" id="{C1733802-2C23-EE54-D727-13F8837FF0FC}"/>
               </a:ext>
             </a:extLst>
           </p:cNvPr>
@@ -22528,7 +24107,7 @@
           <p:cNvPr id="24" name="Rectangle: Folded Corner 23">
             <a:extLst>
               <a:ext uri="{FF2B5EF4-FFF2-40B4-BE49-F238E27FC236}">
-                <a16:creationId xmlns="" xmlns:a16="http://schemas.microsoft.com/office/drawing/2014/main" id="{75F2DB36-ECA0-1FF7-98AD-73DAA8DA27B7}"/>
+                <a16:creationId xmlns:a16="http://schemas.microsoft.com/office/drawing/2014/main" id="{75F2DB36-ECA0-1FF7-98AD-73DAA8DA27B7}"/>
               </a:ext>
             </a:extLst>
           </p:cNvPr>
@@ -22574,7 +24153,7 @@
           <p:cNvPr id="25" name="Arrow: Down 24">
             <a:extLst>
               <a:ext uri="{FF2B5EF4-FFF2-40B4-BE49-F238E27FC236}">
-                <a16:creationId xmlns="" xmlns:a16="http://schemas.microsoft.com/office/drawing/2014/main" id="{76E8CB10-8F9F-331D-6EED-F2FE41BC4F3E}"/>
+                <a16:creationId xmlns:a16="http://schemas.microsoft.com/office/drawing/2014/main" id="{76E8CB10-8F9F-331D-6EED-F2FE41BC4F3E}"/>
               </a:ext>
             </a:extLst>
           </p:cNvPr>
@@ -22620,7 +24199,7 @@
           <p:cNvPr id="27" name="TextBox 26">
             <a:extLst>
               <a:ext uri="{FF2B5EF4-FFF2-40B4-BE49-F238E27FC236}">
-                <a16:creationId xmlns="" xmlns:a16="http://schemas.microsoft.com/office/drawing/2014/main" id="{E1A455F8-7F94-5011-264C-D2123CEA2B7D}"/>
+                <a16:creationId xmlns:a16="http://schemas.microsoft.com/office/drawing/2014/main" id="{E1A455F8-7F94-5011-264C-D2123CEA2B7D}"/>
               </a:ext>
             </a:extLst>
           </p:cNvPr>
@@ -23240,7 +24819,7 @@
           <p:cNvPr id="8" name="TextBox 7">
             <a:extLst>
               <a:ext uri="{FF2B5EF4-FFF2-40B4-BE49-F238E27FC236}">
-                <a16:creationId xmlns="" xmlns:a16="http://schemas.microsoft.com/office/drawing/2014/main" id="{9745C501-7EF7-C032-F4AA-FFF84D8FD1D4}"/>
+                <a16:creationId xmlns:a16="http://schemas.microsoft.com/office/drawing/2014/main" id="{9745C501-7EF7-C032-F4AA-FFF84D8FD1D4}"/>
               </a:ext>
             </a:extLst>
           </p:cNvPr>
@@ -23309,7 +24888,7 @@
           <p:cNvPr id="2" name="TextBox 1">
             <a:extLst>
               <a:ext uri="{FF2B5EF4-FFF2-40B4-BE49-F238E27FC236}">
-                <a16:creationId xmlns="" xmlns:a16="http://schemas.microsoft.com/office/drawing/2014/main" id="{1CD60342-2F70-F14D-21F6-C2F8D6092854}"/>
+                <a16:creationId xmlns:a16="http://schemas.microsoft.com/office/drawing/2014/main" id="{1CD60342-2F70-F14D-21F6-C2F8D6092854}"/>
               </a:ext>
             </a:extLst>
           </p:cNvPr>
@@ -23344,7 +24923,7 @@
           <p:cNvPr id="3" name="Rectangle: Folded Corner 2">
             <a:extLst>
               <a:ext uri="{FF2B5EF4-FFF2-40B4-BE49-F238E27FC236}">
-                <a16:creationId xmlns="" xmlns:a16="http://schemas.microsoft.com/office/drawing/2014/main" id="{71489425-E604-DED0-0EC3-234871AA7B66}"/>
+                <a16:creationId xmlns:a16="http://schemas.microsoft.com/office/drawing/2014/main" id="{71489425-E604-DED0-0EC3-234871AA7B66}"/>
               </a:ext>
             </a:extLst>
           </p:cNvPr>
@@ -23390,7 +24969,7 @@
           <p:cNvPr id="4" name="TextBox 3">
             <a:extLst>
               <a:ext uri="{FF2B5EF4-FFF2-40B4-BE49-F238E27FC236}">
-                <a16:creationId xmlns="" xmlns:a16="http://schemas.microsoft.com/office/drawing/2014/main" id="{7E88EFD6-127A-381B-555B-327C19DC289B}"/>
+                <a16:creationId xmlns:a16="http://schemas.microsoft.com/office/drawing/2014/main" id="{7E88EFD6-127A-381B-555B-327C19DC289B}"/>
               </a:ext>
             </a:extLst>
           </p:cNvPr>
@@ -23442,7 +25021,7 @@
           <p:cNvPr id="5" name="Rectangle: Folded Corner 4">
             <a:extLst>
               <a:ext uri="{FF2B5EF4-FFF2-40B4-BE49-F238E27FC236}">
-                <a16:creationId xmlns="" xmlns:a16="http://schemas.microsoft.com/office/drawing/2014/main" id="{4914F5C6-EBFC-CE22-D774-C1421C8246EA}"/>
+                <a16:creationId xmlns:a16="http://schemas.microsoft.com/office/drawing/2014/main" id="{4914F5C6-EBFC-CE22-D774-C1421C8246EA}"/>
               </a:ext>
             </a:extLst>
           </p:cNvPr>
@@ -23488,7 +25067,7 @@
           <p:cNvPr id="6" name="TextBox 5">
             <a:extLst>
               <a:ext uri="{FF2B5EF4-FFF2-40B4-BE49-F238E27FC236}">
-                <a16:creationId xmlns="" xmlns:a16="http://schemas.microsoft.com/office/drawing/2014/main" id="{C65147B6-9927-3FBC-0ACF-10B922E35875}"/>
+                <a16:creationId xmlns:a16="http://schemas.microsoft.com/office/drawing/2014/main" id="{C65147B6-9927-3FBC-0ACF-10B922E35875}"/>
               </a:ext>
             </a:extLst>
           </p:cNvPr>
@@ -23540,7 +25119,7 @@
           <p:cNvPr id="7" name="TextBox 6">
             <a:extLst>
               <a:ext uri="{FF2B5EF4-FFF2-40B4-BE49-F238E27FC236}">
-                <a16:creationId xmlns="" xmlns:a16="http://schemas.microsoft.com/office/drawing/2014/main" id="{E935D7C8-1B37-DFE7-5F2B-06A01910C1D0}"/>
+                <a16:creationId xmlns:a16="http://schemas.microsoft.com/office/drawing/2014/main" id="{E935D7C8-1B37-DFE7-5F2B-06A01910C1D0}"/>
               </a:ext>
             </a:extLst>
           </p:cNvPr>
@@ -23575,7 +25154,7 @@
           <p:cNvPr id="8" name="Rectangle: Folded Corner 7">
             <a:extLst>
               <a:ext uri="{FF2B5EF4-FFF2-40B4-BE49-F238E27FC236}">
-                <a16:creationId xmlns="" xmlns:a16="http://schemas.microsoft.com/office/drawing/2014/main" id="{308D3B9F-6705-209D-2BC8-E8ED86241852}"/>
+                <a16:creationId xmlns:a16="http://schemas.microsoft.com/office/drawing/2014/main" id="{308D3B9F-6705-209D-2BC8-E8ED86241852}"/>
               </a:ext>
             </a:extLst>
           </p:cNvPr>
@@ -23621,7 +25200,7 @@
           <p:cNvPr id="9" name="TextBox 8">
             <a:extLst>
               <a:ext uri="{FF2B5EF4-FFF2-40B4-BE49-F238E27FC236}">
-                <a16:creationId xmlns="" xmlns:a16="http://schemas.microsoft.com/office/drawing/2014/main" id="{38CA3C62-5FDA-3976-E8E4-3D04BF03B679}"/>
+                <a16:creationId xmlns:a16="http://schemas.microsoft.com/office/drawing/2014/main" id="{38CA3C62-5FDA-3976-E8E4-3D04BF03B679}"/>
               </a:ext>
             </a:extLst>
           </p:cNvPr>
@@ -23673,7 +25252,7 @@
           <p:cNvPr id="10" name="TextBox 9">
             <a:extLst>
               <a:ext uri="{FF2B5EF4-FFF2-40B4-BE49-F238E27FC236}">
-                <a16:creationId xmlns="" xmlns:a16="http://schemas.microsoft.com/office/drawing/2014/main" id="{7B07202A-2A22-D2CB-2C7E-DF8A0B1ABC98}"/>
+                <a16:creationId xmlns:a16="http://schemas.microsoft.com/office/drawing/2014/main" id="{7B07202A-2A22-D2CB-2C7E-DF8A0B1ABC98}"/>
               </a:ext>
             </a:extLst>
           </p:cNvPr>
@@ -23703,13 +25282,8 @@
           <a:p>
             <a:r>
               <a:rPr lang="en-US" sz="1100" noProof="1"/>
-              <a:t>Colours for each V4 </a:t>
-            </a:r>
-            <a:r>
-              <a:rPr lang="en-US" sz="1100" noProof="1" smtClean="0"/>
-              <a:t>ColourSchemes</a:t>
-            </a:r>
-            <a:endParaRPr lang="en-US" sz="1100" noProof="1"/>
+              <a:t>Colours for each V4 ColourSchemes</a:t>
+            </a:r>
           </a:p>
         </p:txBody>
       </p:sp>
@@ -23718,7 +25292,7 @@
           <p:cNvPr id="11" name="TextBox 10">
             <a:extLst>
               <a:ext uri="{FF2B5EF4-FFF2-40B4-BE49-F238E27FC236}">
-                <a16:creationId xmlns="" xmlns:a16="http://schemas.microsoft.com/office/drawing/2014/main" id="{FE544927-34A8-58E7-65B5-4B75DFAB1654}"/>
+                <a16:creationId xmlns:a16="http://schemas.microsoft.com/office/drawing/2014/main" id="{FE544927-34A8-58E7-65B5-4B75DFAB1654}"/>
               </a:ext>
             </a:extLst>
           </p:cNvPr>
@@ -23758,7 +25332,7 @@
           <p:cNvPr id="12" name="TextBox 11">
             <a:extLst>
               <a:ext uri="{FF2B5EF4-FFF2-40B4-BE49-F238E27FC236}">
-                <a16:creationId xmlns="" xmlns:a16="http://schemas.microsoft.com/office/drawing/2014/main" id="{A45EEF99-DF06-6A4A-A218-E4E30D0A2153}"/>
+                <a16:creationId xmlns:a16="http://schemas.microsoft.com/office/drawing/2014/main" id="{A45EEF99-DF06-6A4A-A218-E4E30D0A2153}"/>
               </a:ext>
             </a:extLst>
           </p:cNvPr>
@@ -23971,7 +25545,7 @@
           <p:cNvPr id="13" name="TextBox 12">
             <a:extLst>
               <a:ext uri="{FF2B5EF4-FFF2-40B4-BE49-F238E27FC236}">
-                <a16:creationId xmlns="" xmlns:a16="http://schemas.microsoft.com/office/drawing/2014/main" id="{500B49AD-B99B-3146-73E5-5E63015BB521}"/>
+                <a16:creationId xmlns:a16="http://schemas.microsoft.com/office/drawing/2014/main" id="{500B49AD-B99B-3146-73E5-5E63015BB521}"/>
               </a:ext>
             </a:extLst>
           </p:cNvPr>
@@ -24046,7 +25620,7 @@
           <p:cNvPr id="14" name="Arrow: Down 13">
             <a:extLst>
               <a:ext uri="{FF2B5EF4-FFF2-40B4-BE49-F238E27FC236}">
-                <a16:creationId xmlns="" xmlns:a16="http://schemas.microsoft.com/office/drawing/2014/main" id="{545AEA85-4BF4-D1D8-5778-A012A0C4B0A9}"/>
+                <a16:creationId xmlns:a16="http://schemas.microsoft.com/office/drawing/2014/main" id="{545AEA85-4BF4-D1D8-5778-A012A0C4B0A9}"/>
               </a:ext>
             </a:extLst>
           </p:cNvPr>
@@ -24092,7 +25666,7 @@
           <p:cNvPr id="15" name="Rectangle: Folded Corner 14">
             <a:extLst>
               <a:ext uri="{FF2B5EF4-FFF2-40B4-BE49-F238E27FC236}">
-                <a16:creationId xmlns="" xmlns:a16="http://schemas.microsoft.com/office/drawing/2014/main" id="{AACA3B91-27BC-0E3F-D928-8DFE0AC59E0B}"/>
+                <a16:creationId xmlns:a16="http://schemas.microsoft.com/office/drawing/2014/main" id="{AACA3B91-27BC-0E3F-D928-8DFE0AC59E0B}"/>
               </a:ext>
             </a:extLst>
           </p:cNvPr>
@@ -24138,7 +25712,7 @@
           <p:cNvPr id="16" name="TextBox 15">
             <a:extLst>
               <a:ext uri="{FF2B5EF4-FFF2-40B4-BE49-F238E27FC236}">
-                <a16:creationId xmlns="" xmlns:a16="http://schemas.microsoft.com/office/drawing/2014/main" id="{4B5B6E32-F8C4-C1C8-75E1-858168ECB190}"/>
+                <a16:creationId xmlns:a16="http://schemas.microsoft.com/office/drawing/2014/main" id="{4B5B6E32-F8C4-C1C8-75E1-858168ECB190}"/>
               </a:ext>
             </a:extLst>
           </p:cNvPr>
@@ -24177,7 +25751,7 @@
           <p:cNvPr id="17" name="TextBox 16">
             <a:extLst>
               <a:ext uri="{FF2B5EF4-FFF2-40B4-BE49-F238E27FC236}">
-                <a16:creationId xmlns="" xmlns:a16="http://schemas.microsoft.com/office/drawing/2014/main" id="{CF545F22-A7CB-E104-DE4C-7E7614F153BE}"/>
+                <a16:creationId xmlns:a16="http://schemas.microsoft.com/office/drawing/2014/main" id="{CF545F22-A7CB-E104-DE4C-7E7614F153BE}"/>
               </a:ext>
             </a:extLst>
           </p:cNvPr>
@@ -24217,7 +25791,7 @@
           <p:cNvPr id="18" name="Arrow: Down 17">
             <a:extLst>
               <a:ext uri="{FF2B5EF4-FFF2-40B4-BE49-F238E27FC236}">
-                <a16:creationId xmlns="" xmlns:a16="http://schemas.microsoft.com/office/drawing/2014/main" id="{AECB8382-CC9E-C511-1E6F-86CE1A8E607D}"/>
+                <a16:creationId xmlns:a16="http://schemas.microsoft.com/office/drawing/2014/main" id="{AECB8382-CC9E-C511-1E6F-86CE1A8E607D}"/>
               </a:ext>
             </a:extLst>
           </p:cNvPr>
@@ -24263,7 +25837,7 @@
           <p:cNvPr id="19" name="TextBox 18">
             <a:extLst>
               <a:ext uri="{FF2B5EF4-FFF2-40B4-BE49-F238E27FC236}">
-                <a16:creationId xmlns="" xmlns:a16="http://schemas.microsoft.com/office/drawing/2014/main" id="{BBFFCB8A-1DD8-7AE8-6C5D-18A4AAE91C13}"/>
+                <a16:creationId xmlns:a16="http://schemas.microsoft.com/office/drawing/2014/main" id="{BBFFCB8A-1DD8-7AE8-6C5D-18A4AAE91C13}"/>
               </a:ext>
             </a:extLst>
           </p:cNvPr>
@@ -24310,7 +25884,7 @@
           <p:cNvPr id="21" name="TextBox 20">
             <a:extLst>
               <a:ext uri="{FF2B5EF4-FFF2-40B4-BE49-F238E27FC236}">
-                <a16:creationId xmlns="" xmlns:a16="http://schemas.microsoft.com/office/drawing/2014/main" id="{5751C57A-5879-F9B9-6C9F-B20470ABA4D5}"/>
+                <a16:creationId xmlns:a16="http://schemas.microsoft.com/office/drawing/2014/main" id="{5751C57A-5879-F9B9-6C9F-B20470ABA4D5}"/>
               </a:ext>
             </a:extLst>
           </p:cNvPr>
@@ -24362,7 +25936,7 @@
           <p:cNvPr id="22" name="TextBox 21">
             <a:extLst>
               <a:ext uri="{FF2B5EF4-FFF2-40B4-BE49-F238E27FC236}">
-                <a16:creationId xmlns="" xmlns:a16="http://schemas.microsoft.com/office/drawing/2014/main" id="{2F2DA160-EB90-49FC-ECBA-F36D71A57D15}"/>
+                <a16:creationId xmlns:a16="http://schemas.microsoft.com/office/drawing/2014/main" id="{2F2DA160-EB90-49FC-ECBA-F36D71A57D15}"/>
               </a:ext>
             </a:extLst>
           </p:cNvPr>
@@ -24388,18 +25962,17 @@
           <a:lstStyle/>
           <a:p>
             <a:r>
-              <a:rPr lang="en-US" sz="1100" noProof="1" smtClean="0"/>
+              <a:rPr lang="en-US" sz="1100" noProof="1"/>
               <a:t>!! Any modification of </a:t>
             </a:r>
             <a:r>
-              <a:rPr lang="en-US" sz="1100" i="1" noProof="1" smtClean="0"/>
+              <a:rPr lang="en-US" sz="1100" i="1" noProof="1"/>
               <a:t>CtrlrIDs.xml</a:t>
             </a:r>
             <a:r>
-              <a:rPr lang="en-US" sz="1100" noProof="1" smtClean="0"/>
+              <a:rPr lang="en-US" sz="1100" noProof="1"/>
               <a:t> requires deleting the temporary files in Builds/VisualStudio2022 and remaking them from the Projucer</a:t>
             </a:r>
-            <a:endParaRPr lang="en-US" sz="1100" noProof="1"/>
           </a:p>
         </p:txBody>
       </p:sp>
@@ -24408,7 +25981,7 @@
           <p:cNvPr id="23" name="Rectangle: Folded Corner 2">
             <a:extLst>
               <a:ext uri="{FF2B5EF4-FFF2-40B4-BE49-F238E27FC236}">
-                <a16:creationId xmlns="" xmlns:a16="http://schemas.microsoft.com/office/drawing/2014/main" id="{71489425-E604-DED0-0EC3-234871AA7B66}"/>
+                <a16:creationId xmlns:a16="http://schemas.microsoft.com/office/drawing/2014/main" id="{71489425-E604-DED0-0EC3-234871AA7B66}"/>
               </a:ext>
             </a:extLst>
           </p:cNvPr>
@@ -24454,7 +26027,7 @@
           <p:cNvPr id="24" name="TextBox 23">
             <a:extLst>
               <a:ext uri="{FF2B5EF4-FFF2-40B4-BE49-F238E27FC236}">
-                <a16:creationId xmlns="" xmlns:a16="http://schemas.microsoft.com/office/drawing/2014/main" id="{7E88EFD6-127A-381B-555B-327C19DC289B}"/>
+                <a16:creationId xmlns:a16="http://schemas.microsoft.com/office/drawing/2014/main" id="{7E88EFD6-127A-381B-555B-327C19DC289B}"/>
               </a:ext>
             </a:extLst>
           </p:cNvPr>
@@ -24478,7 +26051,7 @@
           <a:lstStyle/>
           <a:p>
             <a:r>
-              <a:rPr lang="en-US" sz="1100" i="1" dirty="0" smtClean="0"/>
+              <a:rPr lang="en-US" sz="1100" i="1" dirty="0"/>
               <a:t>Juce_LookAndFeel_V2.cpp </a:t>
             </a:r>
             <a:r>
@@ -24506,7 +26079,7 @@
           <p:cNvPr id="25" name="TextBox 24">
             <a:extLst>
               <a:ext uri="{FF2B5EF4-FFF2-40B4-BE49-F238E27FC236}">
-                <a16:creationId xmlns="" xmlns:a16="http://schemas.microsoft.com/office/drawing/2014/main" id="{0816987A-AC86-1053-003B-A881781771DF}"/>
+                <a16:creationId xmlns:a16="http://schemas.microsoft.com/office/drawing/2014/main" id="{0816987A-AC86-1053-003B-A881781771DF}"/>
               </a:ext>
             </a:extLst>
           </p:cNvPr>
@@ -24530,18 +26103,13 @@
           <a:lstStyle/>
           <a:p>
             <a:r>
-              <a:rPr lang="en-US" dirty="0" smtClean="0">
+              <a:rPr lang="en-US" dirty="0">
                 <a:solidFill>
                   <a:srgbClr val="C00000"/>
                 </a:solidFill>
               </a:rPr>
               <a:t>TO BE ADAPTED TO NEW WAY TO CREATE V4 THEMES</a:t>
             </a:r>
-            <a:endParaRPr lang="en-US" dirty="0">
-              <a:solidFill>
-                <a:srgbClr val="C00000"/>
-              </a:solidFill>
-            </a:endParaRPr>
           </a:p>
         </p:txBody>
       </p:sp>
@@ -24550,7 +26118,7 @@
           <p:cNvPr id="26" name="TextBox 25">
             <a:extLst>
               <a:ext uri="{FF2B5EF4-FFF2-40B4-BE49-F238E27FC236}">
-                <a16:creationId xmlns="" xmlns:a16="http://schemas.microsoft.com/office/drawing/2014/main" id="{7B07202A-2A22-D2CB-2C7E-DF8A0B1ABC98}"/>
+                <a16:creationId xmlns:a16="http://schemas.microsoft.com/office/drawing/2014/main" id="{7B07202A-2A22-D2CB-2C7E-DF8A0B1ABC98}"/>
               </a:ext>
             </a:extLst>
           </p:cNvPr>
@@ -24579,18 +26147,9 @@
           <a:lstStyle/>
           <a:p>
             <a:r>
-              <a:rPr lang="en-US" sz="1100" noProof="1" smtClean="0"/>
-              <a:t>All colours </a:t>
-            </a:r>
-            <a:r>
               <a:rPr lang="en-US" sz="1100" noProof="1"/>
-              <a:t>for </a:t>
-            </a:r>
-            <a:r>
-              <a:rPr lang="en-US" sz="1100" noProof="1" smtClean="0"/>
-              <a:t>each type of component in v2 and v3</a:t>
-            </a:r>
-            <a:endParaRPr lang="en-US" sz="1100" noProof="1"/>
+              <a:t>All colours for each type of component in v2 and v3</a:t>
+            </a:r>
           </a:p>
         </p:txBody>
       </p:sp>
@@ -24937,7 +26496,7 @@
   <a:extraClrSchemeLst/>
   <a:extLst>
     <a:ext uri="{05A4C25C-085E-4340-85A3-A5531E510DB2}">
-      <thm15:themeFamily xmlns="" xmlns:thm15="http://schemas.microsoft.com/office/thememl/2012/main" name="Office Theme" id="{62F939B6-93AF-4DB8-9C6B-D6C7DFDC589F}" vid="{4A3C46E8-61CC-4603-A589-7422A47A8E4A}"/>
+      <thm15:themeFamily xmlns:thm15="http://schemas.microsoft.com/office/thememl/2012/main" name="Office Theme" id="{62F939B6-93AF-4DB8-9C6B-D6C7DFDC589F}" vid="{4A3C46E8-61CC-4603-A589-7422A47A8E4A}"/>
     </a:ext>
   </a:extLst>
 </a:theme>
